--- a/content/decks/media-studies/media-studies-s1-lesson-09-genre.pptx
+++ b/content/decks/media-studies/media-studies-s1-lesson-09-genre.pptx
@@ -15,9 +15,12 @@
     <p:sldId id="263" r:id="rId9"/>
     <p:sldId id="264" r:id="rId10"/>
     <p:sldId id="265" r:id="rId11"/>
+    <p:sldId id="266" r:id="rId12"/>
+    <p:sldId id="267" r:id="rId13"/>
+    <p:sldId id="268" r:id="rId14"/>
   </p:sldIdLst>
   <p:notesMasterIdLst>
-    <p:notesMasterId r:id="rId12"/>
+    <p:notesMasterId r:id="rId15"/>
   </p:notesMasterIdLst>
   <p:sldSz cx="12192000" cy="6858000"/>
   <p:notesSz cx="6858000" cy="12192000"/>
@@ -599,7 +602,7 @@
           <a:p>
             <a:r>
               <a:rPr lang="en-US" dirty="0"/>
-              <a:t/>
+              <a:t>The D2 hybridity beat, with the canonical self-describing poster. The film is a 15; the poster is the teaching object, not a screening.</a:t>
             </a:r>
             <a:endParaRPr lang="en-US" dirty="0"/>
           </a:p>
@@ -623,6 +626,270 @@
             <a:fld id="{F7021451-1387-4CA6-816F-3879F97B5CBC}" type="slidenum">
               <a:rPr lang="en-US"/>
               <a:t>10</a:t>
+            </a:fld>
+            <a:endParaRPr lang="en-US"/>
+          </a:p>
+        </p:txBody>
+      </p:sp>
+    </p:spTree>
+    <p:extLst>
+      <p:ext uri="{BB962C8B-B14F-4D97-AF65-F5344CB8AC3E}">
+        <p14:creationId xmlns:p14="http://schemas.microsoft.com/office/powerpoint/2010/main" val="1024086991"/>
+      </p:ext>
+    </p:extLst>
+  </p:cSld>
+  <p:clrMapOvr>
+    <a:masterClrMapping/>
+  </p:clrMapOvr>
+</p:notes>
+</file>
+
+<file path=ppt/notesSlides/notesSlide11.xml><?xml version="1.0" encoding="utf-8"?>
+<p:notes xmlns:a="http://schemas.openxmlformats.org/drawingml/2006/main" xmlns:r="http://schemas.openxmlformats.org/officeDocument/2006/relationships" xmlns:p="http://schemas.openxmlformats.org/presentationml/2006/main">
+  <p:cSld>
+    <p:spTree>
+      <p:nvGrpSpPr>
+        <p:cNvPr id="1" name=""/>
+        <p:cNvGrpSpPr/>
+        <p:nvPr/>
+      </p:nvGrpSpPr>
+      <p:grpSpPr>
+        <a:xfrm>
+          <a:off x="0" y="0"/>
+          <a:ext cx="0" cy="0"/>
+          <a:chOff x="0" y="0"/>
+          <a:chExt cx="0" cy="0"/>
+        </a:xfrm>
+      </p:grpSpPr>
+      <p:sp>
+        <p:nvSpPr>
+          <p:cNvPr id="2" name="Slide Image Placeholder 1"/>
+          <p:cNvSpPr>
+            <a:spLocks noGrp="1" noRot="1" noChangeAspect="1"/>
+          </p:cNvSpPr>
+          <p:nvPr>
+            <p:ph type="sldImg"/>
+          </p:nvPr>
+        </p:nvSpPr>
+        <p:spPr/>
+      </p:sp>
+      <p:sp>
+        <p:nvSpPr>
+          <p:cNvPr id="3" name="Notes Placeholder 2"/>
+          <p:cNvSpPr>
+            <a:spLocks noGrp="1"/>
+          </p:cNvSpPr>
+          <p:nvPr>
+            <p:ph type="body" idx="1"/>
+          </p:nvPr>
+        </p:nvSpPr>
+        <p:spPr/>
+        <p:txBody>
+          <a:bodyPr/>
+          <a:lstStyle/>
+          <a:p>
+            <a:r>
+              <a:rPr lang="en-US" dirty="0"/>
+              <a:t>Genre must be recoverable from technical and symbolic codes alone: no famous faces. Safeguarding note from the pack applies to clip choices.</a:t>
+            </a:r>
+            <a:endParaRPr lang="en-US" dirty="0"/>
+          </a:p>
+        </p:txBody>
+      </p:sp>
+      <p:sp>
+        <p:nvSpPr>
+          <p:cNvPr id="4" name="Slide Number Placeholder 3"/>
+          <p:cNvSpPr>
+            <a:spLocks noGrp="1"/>
+          </p:cNvSpPr>
+          <p:nvPr>
+            <p:ph type="sldNum" sz="quarter" idx="10"/>
+          </p:nvPr>
+        </p:nvSpPr>
+        <p:spPr/>
+        <p:txBody>
+          <a:bodyPr/>
+          <a:lstStyle/>
+          <a:p>
+            <a:fld id="{F7021451-1387-4CA6-816F-3879F97B5CBC}" type="slidenum">
+              <a:rPr lang="en-US"/>
+              <a:t>11</a:t>
+            </a:fld>
+            <a:endParaRPr lang="en-US"/>
+          </a:p>
+        </p:txBody>
+      </p:sp>
+    </p:spTree>
+    <p:extLst>
+      <p:ext uri="{BB962C8B-B14F-4D97-AF65-F5344CB8AC3E}">
+        <p14:creationId xmlns:p14="http://schemas.microsoft.com/office/powerpoint/2010/main" val="1024086991"/>
+      </p:ext>
+    </p:extLst>
+  </p:cSld>
+  <p:clrMapOvr>
+    <a:masterClrMapping/>
+  </p:clrMapOvr>
+</p:notes>
+</file>
+
+<file path=ppt/notesSlides/notesSlide12.xml><?xml version="1.0" encoding="utf-8"?>
+<p:notes xmlns:a="http://schemas.openxmlformats.org/drawingml/2006/main" xmlns:r="http://schemas.openxmlformats.org/officeDocument/2006/relationships" xmlns:p="http://schemas.openxmlformats.org/presentationml/2006/main">
+  <p:cSld>
+    <p:spTree>
+      <p:nvGrpSpPr>
+        <p:cNvPr id="1" name=""/>
+        <p:cNvGrpSpPr/>
+        <p:nvPr/>
+      </p:nvGrpSpPr>
+      <p:grpSpPr>
+        <a:xfrm>
+          <a:off x="0" y="0"/>
+          <a:ext cx="0" cy="0"/>
+          <a:chOff x="0" y="0"/>
+          <a:chExt cx="0" cy="0"/>
+        </a:xfrm>
+      </p:grpSpPr>
+      <p:sp>
+        <p:nvSpPr>
+          <p:cNvPr id="2" name="Slide Image Placeholder 1"/>
+          <p:cNvSpPr>
+            <a:spLocks noGrp="1" noRot="1" noChangeAspect="1"/>
+          </p:cNvSpPr>
+          <p:nvPr>
+            <p:ph type="sldImg"/>
+          </p:nvPr>
+        </p:nvSpPr>
+        <p:spPr/>
+      </p:sp>
+      <p:sp>
+        <p:nvSpPr>
+          <p:cNvPr id="3" name="Notes Placeholder 2"/>
+          <p:cNvSpPr>
+            <a:spLocks noGrp="1"/>
+          </p:cNvSpPr>
+          <p:nvPr>
+            <p:ph type="body" idx="1"/>
+          </p:nvPr>
+        </p:nvSpPr>
+        <p:spPr/>
+        <p:txBody>
+          <a:bodyPr/>
+          <a:lstStyle/>
+          <a:p>
+            <a:r>
+              <a:rPr lang="en-US" dirty="0"/>
+              <a:t>The genre-contract post is C1 blog evidence, audited as part of CS9 at L10; A2 falls Mon 10-26. If the Foreign Culture Friday claims D1, the input compresses into Monday's first half and hybridity is the cut, not Four Corners.</a:t>
+            </a:r>
+            <a:endParaRPr lang="en-US" dirty="0"/>
+          </a:p>
+        </p:txBody>
+      </p:sp>
+      <p:sp>
+        <p:nvSpPr>
+          <p:cNvPr id="4" name="Slide Number Placeholder 3"/>
+          <p:cNvSpPr>
+            <a:spLocks noGrp="1"/>
+          </p:cNvSpPr>
+          <p:nvPr>
+            <p:ph type="sldNum" sz="quarter" idx="10"/>
+          </p:nvPr>
+        </p:nvSpPr>
+        <p:spPr/>
+        <p:txBody>
+          <a:bodyPr/>
+          <a:lstStyle/>
+          <a:p>
+            <a:fld id="{F7021451-1387-4CA6-816F-3879F97B5CBC}" type="slidenum">
+              <a:rPr lang="en-US"/>
+              <a:t>12</a:t>
+            </a:fld>
+            <a:endParaRPr lang="en-US"/>
+          </a:p>
+        </p:txBody>
+      </p:sp>
+    </p:spTree>
+    <p:extLst>
+      <p:ext uri="{BB962C8B-B14F-4D97-AF65-F5344CB8AC3E}">
+        <p14:creationId xmlns:p14="http://schemas.microsoft.com/office/powerpoint/2010/main" val="1024086991"/>
+      </p:ext>
+    </p:extLst>
+  </p:cSld>
+  <p:clrMapOvr>
+    <a:masterClrMapping/>
+  </p:clrMapOvr>
+</p:notes>
+</file>
+
+<file path=ppt/notesSlides/notesSlide13.xml><?xml version="1.0" encoding="utf-8"?>
+<p:notes xmlns:a="http://schemas.openxmlformats.org/drawingml/2006/main" xmlns:r="http://schemas.openxmlformats.org/officeDocument/2006/relationships" xmlns:p="http://schemas.openxmlformats.org/presentationml/2006/main">
+  <p:cSld>
+    <p:spTree>
+      <p:nvGrpSpPr>
+        <p:cNvPr id="1" name=""/>
+        <p:cNvGrpSpPr/>
+        <p:nvPr/>
+      </p:nvGrpSpPr>
+      <p:grpSpPr>
+        <a:xfrm>
+          <a:off x="0" y="0"/>
+          <a:ext cx="0" cy="0"/>
+          <a:chOff x="0" y="0"/>
+          <a:chExt cx="0" cy="0"/>
+        </a:xfrm>
+      </p:grpSpPr>
+      <p:sp>
+        <p:nvSpPr>
+          <p:cNvPr id="2" name="Slide Image Placeholder 1"/>
+          <p:cNvSpPr>
+            <a:spLocks noGrp="1" noRot="1" noChangeAspect="1"/>
+          </p:cNvSpPr>
+          <p:nvPr>
+            <p:ph type="sldImg"/>
+          </p:nvPr>
+        </p:nvSpPr>
+        <p:spPr/>
+      </p:sp>
+      <p:sp>
+        <p:nvSpPr>
+          <p:cNvPr id="3" name="Notes Placeholder 2"/>
+          <p:cNvSpPr>
+            <a:spLocks noGrp="1"/>
+          </p:cNvSpPr>
+          <p:nvPr>
+            <p:ph type="body" idx="1"/>
+          </p:nvPr>
+        </p:nvSpPr>
+        <p:spPr/>
+        <p:txBody>
+          <a:bodyPr/>
+          <a:lstStyle/>
+          <a:p>
+            <a:r>
+              <a:rPr lang="en-US" dirty="0"/>
+              <a:t/>
+            </a:r>
+            <a:endParaRPr lang="en-US" dirty="0"/>
+          </a:p>
+        </p:txBody>
+      </p:sp>
+      <p:sp>
+        <p:nvSpPr>
+          <p:cNvPr id="4" name="Slide Number Placeholder 3"/>
+          <p:cNvSpPr>
+            <a:spLocks noGrp="1"/>
+          </p:cNvSpPr>
+          <p:nvPr>
+            <p:ph type="sldNum" sz="quarter" idx="10"/>
+          </p:nvPr>
+        </p:nvSpPr>
+        <p:spPr/>
+        <p:txBody>
+          <a:bodyPr/>
+          <a:lstStyle/>
+          <a:p>
+            <a:fld id="{F7021451-1387-4CA6-816F-3879F97B5CBC}" type="slidenum">
+              <a:rPr lang="en-US"/>
+              <a:t>13</a:t>
             </a:fld>
             <a:endParaRPr lang="en-US"/>
           </a:p>
@@ -775,7 +1042,7 @@
           <a:p>
             <a:r>
               <a:rPr lang="en-US" dirty="0"/>
-              <a:t>Genre-recognition demonstrated on paintings students have never seen proves the mechanism is theirs already, before any film term is used.</a:t>
+              <a:t>Genre-recognition demonstrated on paintings students have never seen proves the mechanism is theirs already, before any film term is used. The plan scripts this starter; it stays.</a:t>
             </a:r>
             <a:endParaRPr lang="en-US" dirty="0"/>
           </a:p>
@@ -951,7 +1218,7 @@
           <a:p>
             <a:r>
               <a:rPr lang="en-US" dirty="0"/>
-              <a:t/>
+              <a:t>Stretch roster from the coursebook for fast readers: Lacey's repertoire of elements, Buckingham, Fiske.</a:t>
             </a:r>
             <a:endParaRPr lang="en-US" dirty="0"/>
           </a:p>
@@ -1039,7 +1306,7 @@
           <a:p>
             <a:r>
               <a:rPr lang="en-US" dirty="0"/>
-              <a:t/>
+              <a:t>Posters used for classroom teaching. Ask which elements repeat cell to cell (mask, title type, ensemble grid) and which vary; the industry side of Altman's deal is visible in the sameness.</a:t>
             </a:r>
             <a:endParaRPr lang="en-US" dirty="0"/>
           </a:p>
@@ -1127,7 +1394,7 @@
           <a:p>
             <a:r>
               <a:rPr lang="en-US" dirty="0"/>
-              <a:t/>
+              <a:t>Each student maps one exam-plausible genre onto the contract. A C-drama or xianxia mapping is a legitimate spoken aside per the exam-example rule; the written mapping stays exam-facing.</a:t>
             </a:r>
             <a:endParaRPr lang="en-US" dirty="0"/>
           </a:p>
@@ -1215,7 +1482,7 @@
           <a:p>
             <a:r>
               <a:rPr lang="en-US" dirty="0"/>
-              <a:t>Genre must be recoverable from technical and symbolic codes alone: no famous faces. Safeguarding note from the pack applies to clip choices.</a:t>
+              <a:t/>
             </a:r>
             <a:endParaRPr lang="en-US" dirty="0"/>
           </a:p>
@@ -1303,7 +1570,7 @@
           <a:p>
             <a:r>
               <a:rPr lang="en-US" dirty="0"/>
-              <a:t/>
+              <a:t>WS 3.1's two-poster comparison, which rehearses the L02 semiotics inside genre work: horror against documentary, dark serif dread against sunlit awe. Both one-sheets shown whole; the worksheet's columns run on exactly these two questions.</a:t>
             </a:r>
             <a:endParaRPr lang="en-US" dirty="0"/>
           </a:p>
@@ -1911,6 +2178,1644 @@
     <p:bg>
       <p:bgPr>
         <a:solidFill>
+          <a:srgbClr val="FAF8F1"/>
+        </a:solidFill>
+      </p:bgPr>
+    </p:bg>
+    <p:spTree>
+      <p:nvGrpSpPr>
+        <p:cNvPr id="1" name=""/>
+        <p:cNvGrpSpPr/>
+        <p:nvPr/>
+      </p:nvGrpSpPr>
+      <p:grpSpPr>
+        <a:xfrm>
+          <a:off x="0" y="0"/>
+          <a:ext cx="0" cy="0"/>
+          <a:chOff x="0" y="0"/>
+          <a:chExt cx="0" cy="0"/>
+        </a:xfrm>
+      </p:grpSpPr>
+      <p:pic>
+        <p:nvPicPr>
+          <p:cNvPr id="2" name="Image 0" descr="/Users/dogan/Documents/Vaults/Courses/wiki/classes/media-studies/decks/_build/img/crops/poster-shaun_a637.jpg">    </p:cNvPr>
+          <p:cNvPicPr>
+            <a:picLocks noChangeAspect="1"/>
+          </p:cNvPicPr>
+          <p:nvPr/>
+        </p:nvPicPr>
+        <p:blipFill>
+          <a:blip r:embed="rId1"/>
+          <a:stretch>
+            <a:fillRect/>
+          </a:stretch>
+        </p:blipFill>
+        <p:spPr>
+          <a:xfrm>
+            <a:off x="7818120" y="0"/>
+            <a:ext cx="4370832" cy="6858000"/>
+          </a:xfrm>
+          <a:prstGeom prst="rect">
+            <a:avLst/>
+          </a:prstGeom>
+        </p:spPr>
+      </p:pic>
+      <p:sp>
+        <p:nvSpPr>
+          <p:cNvPr id="3" name="Text 0"/>
+          <p:cNvSpPr/>
+          <p:nvPr/>
+        </p:nvSpPr>
+        <p:spPr>
+          <a:xfrm>
+            <a:off x="822960" y="822960"/>
+            <a:ext cx="5486400" cy="274320"/>
+          </a:xfrm>
+          <a:prstGeom prst="rect">
+            <a:avLst/>
+          </a:prstGeom>
+          <a:noFill/>
+          <a:ln/>
+        </p:spPr>
+        <p:txBody>
+          <a:bodyPr wrap="square" lIns="0" tIns="0" rIns="0" bIns="0" rtlCol="0" anchor="ctr"/>
+          <a:lstStyle/>
+          <a:p>
+            <a:pPr algn="l" indent="0" marL="0">
+              <a:buNone/>
+            </a:pPr>
+            <a:r>
+              <a:rPr lang="en-US" sz="1100" b="1" spc="250" kern="0" dirty="0">
+                <a:solidFill>
+                  <a:srgbClr val="4A6B5D"/>
+                </a:solidFill>
+                <a:latin typeface="Arial" pitchFamily="34" charset="0"/>
+                <a:ea typeface="Arial" pitchFamily="34" charset="-122"/>
+                <a:cs typeface="Arial" pitchFamily="34" charset="-120"/>
+              </a:rPr>
+              <a:t>HYBRIDITY</a:t>
+            </a:r>
+            <a:endParaRPr lang="en-US" sz="1100" dirty="0"/>
+          </a:p>
+        </p:txBody>
+      </p:sp>
+      <p:sp>
+        <p:nvSpPr>
+          <p:cNvPr id="4" name="Shape 1"/>
+          <p:cNvSpPr/>
+          <p:nvPr/>
+        </p:nvSpPr>
+        <p:spPr>
+          <a:xfrm>
+            <a:off x="822960" y="1188720"/>
+            <a:ext cx="6583680" cy="0"/>
+          </a:xfrm>
+          <a:prstGeom prst="line">
+            <a:avLst/>
+          </a:prstGeom>
+          <a:noFill/>
+          <a:ln w="9525">
+            <a:solidFill>
+              <a:srgbClr val="D9D4C4"/>
+            </a:solidFill>
+            <a:prstDash val="solid"/>
+          </a:ln>
+        </p:spPr>
+      </p:sp>
+      <p:sp>
+        <p:nvSpPr>
+          <p:cNvPr id="5" name="Text 2"/>
+          <p:cNvSpPr/>
+          <p:nvPr/>
+        </p:nvSpPr>
+        <p:spPr>
+          <a:xfrm>
+            <a:off x="822960" y="1371600"/>
+            <a:ext cx="6583680" cy="1463040"/>
+          </a:xfrm>
+          <a:prstGeom prst="rect">
+            <a:avLst/>
+          </a:prstGeom>
+          <a:noFill/>
+          <a:ln/>
+        </p:spPr>
+        <p:txBody>
+          <a:bodyPr wrap="square" lIns="0" tIns="0" rIns="0" bIns="0" rtlCol="0" anchor="t"/>
+          <a:lstStyle/>
+          <a:p>
+            <a:pPr indent="0" marL="0">
+              <a:lnSpc>
+                <a:spcPts val="4400"/>
+              </a:lnSpc>
+              <a:buNone/>
+            </a:pPr>
+            <a:r>
+              <a:rPr lang="en-US" sz="4000" dirty="0">
+                <a:solidFill>
+                  <a:srgbClr val="24313F"/>
+                </a:solidFill>
+                <a:latin typeface="Georgia" pitchFamily="34" charset="0"/>
+                <a:ea typeface="Georgia" pitchFamily="34" charset="-122"/>
+                <a:cs typeface="Georgia" pitchFamily="34" charset="-120"/>
+              </a:rPr>
+              <a:t>Two contracts,</a:t>
+            </a:r>
+            <a:endParaRPr lang="en-US" sz="4000" dirty="0"/>
+          </a:p>
+          <a:p>
+            <a:pPr indent="0" marL="0">
+              <a:lnSpc>
+                <a:spcPts val="4400"/>
+              </a:lnSpc>
+              <a:buNone/>
+            </a:pPr>
+            <a:r>
+              <a:rPr lang="en-US" sz="4000" dirty="0">
+                <a:solidFill>
+                  <a:srgbClr val="24313F"/>
+                </a:solidFill>
+                <a:latin typeface="Georgia" pitchFamily="34" charset="0"/>
+                <a:ea typeface="Georgia" pitchFamily="34" charset="-122"/>
+                <a:cs typeface="Georgia" pitchFamily="34" charset="-120"/>
+              </a:rPr>
+              <a:t>one ticket</a:t>
+            </a:r>
+            <a:endParaRPr lang="en-US" sz="4000" dirty="0"/>
+          </a:p>
+        </p:txBody>
+      </p:sp>
+      <p:sp>
+        <p:nvSpPr>
+          <p:cNvPr id="6" name="Text 3"/>
+          <p:cNvSpPr/>
+          <p:nvPr/>
+        </p:nvSpPr>
+        <p:spPr>
+          <a:xfrm>
+            <a:off x="822960" y="2926080"/>
+            <a:ext cx="6583680" cy="2926080"/>
+          </a:xfrm>
+          <a:prstGeom prst="rect">
+            <a:avLst/>
+          </a:prstGeom>
+          <a:noFill/>
+          <a:ln/>
+        </p:spPr>
+        <p:txBody>
+          <a:bodyPr wrap="square" lIns="0" tIns="0" rIns="0" bIns="0" rtlCol="0" anchor="t"/>
+          <a:lstStyle/>
+          <a:p>
+            <a:pPr indent="0" marL="0">
+              <a:lnSpc>
+                <a:spcPts val="2400"/>
+              </a:lnSpc>
+              <a:buNone/>
+            </a:pPr>
+            <a:r>
+              <a:rPr lang="en-US" sz="1700" dirty="0">
+                <a:solidFill>
+                  <a:srgbClr val="24313F"/>
+                </a:solidFill>
+                <a:latin typeface="Georgia" pitchFamily="34" charset="0"/>
+                <a:ea typeface="Georgia" pitchFamily="34" charset="-122"/>
+                <a:cs typeface="Georgia" pitchFamily="34" charset="-120"/>
+              </a:rPr>
+              <a:t>A romantic comedy. With zombies. The tagline names both parents, because the film needs both audiences: the romcom's promise of warmth and the zombie film's promise of chaos, each kept.</a:t>
+            </a:r>
+            <a:endParaRPr lang="en-US" sz="1700" dirty="0"/>
+          </a:p>
+          <a:p>
+            <a:pPr indent="0" marL="0">
+              <a:lnSpc>
+                <a:spcPts val="2400"/>
+              </a:lnSpc>
+              <a:buNone/>
+            </a:pPr>
+            <a:endParaRPr lang="en-US" sz="1700" dirty="0"/>
+          </a:p>
+          <a:p>
+            <a:pPr indent="0" marL="0">
+              <a:lnSpc>
+                <a:spcPts val="2400"/>
+              </a:lnSpc>
+              <a:buNone/>
+            </a:pPr>
+            <a:r>
+              <a:rPr lang="en-US" sz="1700" dirty="0">
+                <a:solidFill>
+                  <a:srgbClr val="24313F"/>
+                </a:solidFill>
+                <a:latin typeface="Georgia" pitchFamily="34" charset="0"/>
+                <a:ea typeface="Georgia" pitchFamily="34" charset="-122"/>
+                <a:cs typeface="Georgia" pitchFamily="34" charset="-120"/>
+              </a:rPr>
+              <a:t>Genres are not boxes. Name one text that sits across two, and say what each parent contributes. Studios build hybrids to reach two audiences with one budget.</a:t>
+            </a:r>
+            <a:endParaRPr lang="en-US" sz="1700" dirty="0"/>
+          </a:p>
+        </p:txBody>
+      </p:sp>
+      <p:sp>
+        <p:nvSpPr>
+          <p:cNvPr id="7" name="Text 4"/>
+          <p:cNvSpPr/>
+          <p:nvPr/>
+        </p:nvSpPr>
+        <p:spPr>
+          <a:xfrm>
+            <a:off x="8001000" y="6126480"/>
+            <a:ext cx="4005072" cy="365760"/>
+          </a:xfrm>
+          <a:prstGeom prst="rect">
+            <a:avLst/>
+          </a:prstGeom>
+          <a:solidFill>
+            <a:srgbClr val="FAF8F1"/>
+          </a:solidFill>
+          <a:ln/>
+        </p:spPr>
+        <p:txBody>
+          <a:bodyPr wrap="square" lIns="0" tIns="0" rIns="0" bIns="0" rtlCol="0" anchor="ctr"/>
+          <a:lstStyle/>
+          <a:p>
+            <a:pPr indent="0" marL="0">
+              <a:buNone/>
+            </a:pPr>
+            <a:r>
+              <a:rPr lang="en-US" sz="950" spc="50" kern="0" dirty="0">
+                <a:solidFill>
+                  <a:srgbClr val="7A7F72"/>
+                </a:solidFill>
+                <a:latin typeface="Arial" pitchFamily="34" charset="0"/>
+                <a:ea typeface="Arial" pitchFamily="34" charset="-122"/>
+                <a:cs typeface="Arial" pitchFamily="34" charset="-120"/>
+              </a:rPr>
+              <a:t>Shaun of the Dead (2004), one-sheet</a:t>
+            </a:r>
+            <a:endParaRPr lang="en-US" sz="950" dirty="0"/>
+          </a:p>
+        </p:txBody>
+      </p:sp>
+    </p:spTree>
+  </p:cSld>
+  <p:clrMapOvr>
+    <a:masterClrMapping/>
+  </p:clrMapOvr>
+</p:sld>
+</file>
+
+<file path=ppt/slides/slide11.xml><?xml version="1.0" encoding="utf-8"?>
+<p:sld xmlns:a="http://schemas.openxmlformats.org/drawingml/2006/main" xmlns:r="http://schemas.openxmlformats.org/officeDocument/2006/relationships" xmlns:p="http://schemas.openxmlformats.org/presentationml/2006/main">
+  <p:cSld name="Slide 11">
+    <p:bg>
+      <p:bgPr>
+        <a:solidFill>
+          <a:srgbClr val="FAF8F1"/>
+        </a:solidFill>
+      </p:bgPr>
+    </p:bg>
+    <p:spTree>
+      <p:nvGrpSpPr>
+        <p:cNvPr id="1" name=""/>
+        <p:cNvGrpSpPr/>
+        <p:nvPr/>
+      </p:nvGrpSpPr>
+      <p:grpSpPr>
+        <a:xfrm>
+          <a:off x="0" y="0"/>
+          <a:ext cx="0" cy="0"/>
+          <a:chOff x="0" y="0"/>
+          <a:chExt cx="0" cy="0"/>
+        </a:xfrm>
+      </p:grpSpPr>
+      <p:sp>
+        <p:nvSpPr>
+          <p:cNvPr id="2" name="Text 0"/>
+          <p:cNvSpPr/>
+          <p:nvPr/>
+        </p:nvSpPr>
+        <p:spPr>
+          <a:xfrm>
+            <a:off x="822960" y="457200"/>
+            <a:ext cx="6400800" cy="274320"/>
+          </a:xfrm>
+          <a:prstGeom prst="rect">
+            <a:avLst/>
+          </a:prstGeom>
+          <a:noFill/>
+          <a:ln/>
+        </p:spPr>
+        <p:txBody>
+          <a:bodyPr wrap="square" lIns="0" tIns="0" rIns="0" bIns="0" rtlCol="0" anchor="ctr"/>
+          <a:lstStyle/>
+          <a:p>
+            <a:pPr algn="l" indent="0" marL="0">
+              <a:buNone/>
+            </a:pPr>
+            <a:r>
+              <a:rPr lang="en-US" sz="1100" b="1" spc="250" kern="0" dirty="0">
+                <a:solidFill>
+                  <a:srgbClr val="4A6B5D"/>
+                </a:solidFill>
+                <a:latin typeface="Arial" pitchFamily="34" charset="0"/>
+                <a:ea typeface="Arial" pitchFamily="34" charset="-122"/>
+                <a:cs typeface="Arial" pitchFamily="34" charset="-120"/>
+              </a:rPr>
+              <a:t>FOUR CORNERS · TITLES STRIPPED</a:t>
+            </a:r>
+            <a:endParaRPr lang="en-US" sz="1100" dirty="0"/>
+          </a:p>
+        </p:txBody>
+      </p:sp>
+      <p:sp>
+        <p:nvSpPr>
+          <p:cNvPr id="3" name="Text 1"/>
+          <p:cNvSpPr/>
+          <p:nvPr/>
+        </p:nvSpPr>
+        <p:spPr>
+          <a:xfrm>
+            <a:off x="6793992" y="457200"/>
+            <a:ext cx="4572000" cy="274320"/>
+          </a:xfrm>
+          <a:prstGeom prst="rect">
+            <a:avLst/>
+          </a:prstGeom>
+          <a:noFill/>
+          <a:ln/>
+        </p:spPr>
+        <p:txBody>
+          <a:bodyPr wrap="square" lIns="0" tIns="0" rIns="0" bIns="0" rtlCol="0" anchor="ctr"/>
+          <a:lstStyle/>
+          <a:p>
+            <a:pPr algn="r" indent="0" marL="0">
+              <a:buNone/>
+            </a:pPr>
+            <a:r>
+              <a:rPr lang="en-US" sz="1100" b="1" spc="250" kern="0" dirty="0">
+                <a:solidFill>
+                  <a:srgbClr val="7A7F72"/>
+                </a:solidFill>
+                <a:latin typeface="Arial" pitchFamily="34" charset="0"/>
+                <a:ea typeface="Arial" pitchFamily="34" charset="-122"/>
+                <a:cs typeface="Arial" pitchFamily="34" charset="-120"/>
+              </a:rPr>
+              <a:t>THE BAR IS HIGHER THAN IT WAS IN SEPTEMBER</a:t>
+            </a:r>
+            <a:endParaRPr lang="en-US" sz="1100" dirty="0"/>
+          </a:p>
+        </p:txBody>
+      </p:sp>
+      <p:sp>
+        <p:nvSpPr>
+          <p:cNvPr id="4" name="Shape 2"/>
+          <p:cNvSpPr/>
+          <p:nvPr/>
+        </p:nvSpPr>
+        <p:spPr>
+          <a:xfrm>
+            <a:off x="822960" y="786384"/>
+            <a:ext cx="10543032" cy="0"/>
+          </a:xfrm>
+          <a:prstGeom prst="line">
+            <a:avLst/>
+          </a:prstGeom>
+          <a:noFill/>
+          <a:ln w="9525">
+            <a:solidFill>
+              <a:srgbClr val="D9D4C4"/>
+            </a:solidFill>
+            <a:prstDash val="solid"/>
+          </a:ln>
+        </p:spPr>
+      </p:sp>
+      <p:sp>
+        <p:nvSpPr>
+          <p:cNvPr id="5" name="Text 3"/>
+          <p:cNvSpPr/>
+          <p:nvPr/>
+        </p:nvSpPr>
+        <p:spPr>
+          <a:xfrm>
+            <a:off x="822960" y="1051560"/>
+            <a:ext cx="10543032" cy="731520"/>
+          </a:xfrm>
+          <a:prstGeom prst="rect">
+            <a:avLst/>
+          </a:prstGeom>
+          <a:noFill/>
+          <a:ln/>
+        </p:spPr>
+        <p:txBody>
+          <a:bodyPr wrap="square" lIns="0" tIns="0" rIns="0" bIns="0" rtlCol="0" anchor="ctr"/>
+          <a:lstStyle/>
+          <a:p>
+            <a:pPr indent="0" marL="0">
+              <a:buNone/>
+            </a:pPr>
+            <a:r>
+              <a:rPr lang="en-US" sz="3400" dirty="0">
+                <a:solidFill>
+                  <a:srgbClr val="24313F"/>
+                </a:solidFill>
+                <a:latin typeface="Georgia" pitchFamily="34" charset="0"/>
+                <a:ea typeface="Georgia" pitchFamily="34" charset="-122"/>
+                <a:cs typeface="Georgia" pitchFamily="34" charset="-120"/>
+              </a:rPr>
+              <a:t>Evidence, not atmosphere</a:t>
+            </a:r>
+            <a:endParaRPr lang="en-US" sz="3400" dirty="0"/>
+          </a:p>
+        </p:txBody>
+      </p:sp>
+      <p:sp>
+        <p:nvSpPr>
+          <p:cNvPr id="6" name="Text 4"/>
+          <p:cNvSpPr/>
+          <p:nvPr/>
+        </p:nvSpPr>
+        <p:spPr>
+          <a:xfrm>
+            <a:off x="822960" y="2011680"/>
+            <a:ext cx="4846320" cy="502920"/>
+          </a:xfrm>
+          <a:prstGeom prst="rect">
+            <a:avLst/>
+          </a:prstGeom>
+          <a:noFill/>
+          <a:ln/>
+        </p:spPr>
+        <p:txBody>
+          <a:bodyPr wrap="square" lIns="0" tIns="0" rIns="0" bIns="0" rtlCol="0" anchor="ctr"/>
+          <a:lstStyle/>
+          <a:p>
+            <a:pPr indent="0" marL="0">
+              <a:buNone/>
+            </a:pPr>
+            <a:r>
+              <a:rPr lang="en-US" sz="2200" dirty="0">
+                <a:solidFill>
+                  <a:srgbClr val="7A7F72"/>
+                </a:solidFill>
+                <a:latin typeface="Georgia" pitchFamily="34" charset="0"/>
+                <a:ea typeface="Georgia" pitchFamily="34" charset="-122"/>
+                <a:cs typeface="Georgia" pitchFamily="34" charset="-120"/>
+              </a:rPr>
+              <a:t>In September you would have said</a:t>
+            </a:r>
+            <a:endParaRPr lang="en-US" sz="2200" dirty="0"/>
+          </a:p>
+        </p:txBody>
+      </p:sp>
+      <p:sp>
+        <p:nvSpPr>
+          <p:cNvPr id="7" name="Shape 5"/>
+          <p:cNvSpPr/>
+          <p:nvPr/>
+        </p:nvSpPr>
+        <p:spPr>
+          <a:xfrm>
+            <a:off x="822960" y="2606040"/>
+            <a:ext cx="4754880" cy="0"/>
+          </a:xfrm>
+          <a:prstGeom prst="line">
+            <a:avLst/>
+          </a:prstGeom>
+          <a:noFill/>
+          <a:ln w="9525">
+            <a:solidFill>
+              <a:srgbClr val="D9D4C4"/>
+            </a:solidFill>
+            <a:prstDash val="solid"/>
+          </a:ln>
+        </p:spPr>
+      </p:sp>
+      <p:sp>
+        <p:nvSpPr>
+          <p:cNvPr id="8" name="Text 6"/>
+          <p:cNvSpPr/>
+          <p:nvPr/>
+        </p:nvSpPr>
+        <p:spPr>
+          <a:xfrm>
+            <a:off x="822960" y="2788920"/>
+            <a:ext cx="4846320" cy="1828800"/>
+          </a:xfrm>
+          <a:prstGeom prst="rect">
+            <a:avLst/>
+          </a:prstGeom>
+          <a:noFill/>
+          <a:ln/>
+        </p:spPr>
+        <p:txBody>
+          <a:bodyPr wrap="square" lIns="0" tIns="0" rIns="0" bIns="0" rtlCol="0" anchor="t"/>
+          <a:lstStyle/>
+          <a:p>
+            <a:pPr indent="0" marL="0">
+              <a:lnSpc>
+                <a:spcPts val="2500"/>
+              </a:lnSpc>
+              <a:buNone/>
+            </a:pPr>
+            <a:r>
+              <a:rPr lang="en-US" sz="1750" dirty="0">
+                <a:solidFill>
+                  <a:srgbClr val="24313F"/>
+                </a:solidFill>
+                <a:latin typeface="Georgia" pitchFamily="34" charset="0"/>
+                <a:ea typeface="Georgia" pitchFamily="34" charset="-122"/>
+                <a:cs typeface="Georgia" pitchFamily="34" charset="-120"/>
+              </a:rPr>
+              <a:t>It feels scary. The music is creepy and it is dark.</a:t>
+            </a:r>
+            <a:endParaRPr lang="en-US" sz="1750" dirty="0"/>
+          </a:p>
+        </p:txBody>
+      </p:sp>
+      <p:sp>
+        <p:nvSpPr>
+          <p:cNvPr id="9" name="Text 7"/>
+          <p:cNvSpPr/>
+          <p:nvPr/>
+        </p:nvSpPr>
+        <p:spPr>
+          <a:xfrm>
+            <a:off x="6309360" y="2011680"/>
+            <a:ext cx="4846320" cy="502920"/>
+          </a:xfrm>
+          <a:prstGeom prst="rect">
+            <a:avLst/>
+          </a:prstGeom>
+          <a:noFill/>
+          <a:ln/>
+        </p:spPr>
+        <p:txBody>
+          <a:bodyPr wrap="square" lIns="0" tIns="0" rIns="0" bIns="0" rtlCol="0" anchor="ctr"/>
+          <a:lstStyle/>
+          <a:p>
+            <a:pPr indent="0" marL="0">
+              <a:buNone/>
+            </a:pPr>
+            <a:r>
+              <a:rPr lang="en-US" sz="2200" dirty="0">
+                <a:solidFill>
+                  <a:srgbClr val="4A6B5D"/>
+                </a:solidFill>
+                <a:latin typeface="Georgia" pitchFamily="34" charset="0"/>
+                <a:ea typeface="Georgia" pitchFamily="34" charset="-122"/>
+                <a:cs typeface="Georgia" pitchFamily="34" charset="-120"/>
+              </a:rPr>
+              <a:t>Now you can say</a:t>
+            </a:r>
+            <a:endParaRPr lang="en-US" sz="2200" dirty="0"/>
+          </a:p>
+        </p:txBody>
+      </p:sp>
+      <p:sp>
+        <p:nvSpPr>
+          <p:cNvPr id="10" name="Shape 8"/>
+          <p:cNvSpPr/>
+          <p:nvPr/>
+        </p:nvSpPr>
+        <p:spPr>
+          <a:xfrm>
+            <a:off x="6309360" y="2606040"/>
+            <a:ext cx="4754880" cy="0"/>
+          </a:xfrm>
+          <a:prstGeom prst="line">
+            <a:avLst/>
+          </a:prstGeom>
+          <a:noFill/>
+          <a:ln w="9525">
+            <a:solidFill>
+              <a:srgbClr val="D9D4C4"/>
+            </a:solidFill>
+            <a:prstDash val="solid"/>
+          </a:ln>
+        </p:spPr>
+      </p:sp>
+      <p:sp>
+        <p:nvSpPr>
+          <p:cNvPr id="11" name="Text 9"/>
+          <p:cNvSpPr/>
+          <p:nvPr/>
+        </p:nvSpPr>
+        <p:spPr>
+          <a:xfrm>
+            <a:off x="6309360" y="2788920"/>
+            <a:ext cx="4846320" cy="1828800"/>
+          </a:xfrm>
+          <a:prstGeom prst="rect">
+            <a:avLst/>
+          </a:prstGeom>
+          <a:noFill/>
+          <a:ln/>
+        </p:spPr>
+        <p:txBody>
+          <a:bodyPr wrap="square" lIns="0" tIns="0" rIns="0" bIns="0" rtlCol="0" anchor="t"/>
+          <a:lstStyle/>
+          <a:p>
+            <a:pPr indent="0" marL="0">
+              <a:lnSpc>
+                <a:spcPts val="2500"/>
+              </a:lnSpc>
+              <a:buNone/>
+            </a:pPr>
+            <a:r>
+              <a:rPr lang="en-US" sz="1750" dirty="0">
+                <a:solidFill>
+                  <a:srgbClr val="24313F"/>
+                </a:solidFill>
+                <a:latin typeface="Georgia" pitchFamily="34" charset="0"/>
+                <a:ea typeface="Georgia" pitchFamily="34" charset="-122"/>
+                <a:cs typeface="Georgia" pitchFamily="34" charset="-120"/>
+              </a:rPr>
+              <a:t>Low key lighting, faces held in shallow focus, eleven cuts in twenty seconds, and a non-diegetic drone under the whole thing.</a:t>
+            </a:r>
+            <a:endParaRPr lang="en-US" sz="1750" dirty="0"/>
+          </a:p>
+        </p:txBody>
+      </p:sp>
+      <p:sp>
+        <p:nvSpPr>
+          <p:cNvPr id="12" name="Shape 10"/>
+          <p:cNvSpPr/>
+          <p:nvPr/>
+        </p:nvSpPr>
+        <p:spPr>
+          <a:xfrm>
+            <a:off x="822960" y="4937760"/>
+            <a:ext cx="914400" cy="0"/>
+          </a:xfrm>
+          <a:prstGeom prst="line">
+            <a:avLst/>
+          </a:prstGeom>
+          <a:noFill/>
+          <a:ln w="31750">
+            <a:solidFill>
+              <a:srgbClr val="8C3A38"/>
+            </a:solidFill>
+            <a:prstDash val="solid"/>
+          </a:ln>
+        </p:spPr>
+      </p:sp>
+      <p:sp>
+        <p:nvSpPr>
+          <p:cNvPr id="13" name="Text 11"/>
+          <p:cNvSpPr/>
+          <p:nvPr/>
+        </p:nvSpPr>
+        <p:spPr>
+          <a:xfrm>
+            <a:off x="822960" y="5120640"/>
+            <a:ext cx="10424160" cy="640080"/>
+          </a:xfrm>
+          <a:prstGeom prst="rect">
+            <a:avLst/>
+          </a:prstGeom>
+          <a:noFill/>
+          <a:ln/>
+        </p:spPr>
+        <p:txBody>
+          <a:bodyPr wrap="square" lIns="0" tIns="0" rIns="0" bIns="0" rtlCol="0" anchor="t"/>
+          <a:lstStyle/>
+          <a:p>
+            <a:pPr indent="0" marL="0">
+              <a:lnSpc>
+                <a:spcPts val="2200"/>
+              </a:lnSpc>
+              <a:buNone/>
+            </a:pPr>
+            <a:r>
+              <a:rPr lang="en-US" sz="1650" i="1" dirty="0">
+                <a:solidFill>
+                  <a:srgbClr val="4A6B5D"/>
+                </a:solidFill>
+                <a:latin typeface="Georgia" pitchFamily="34" charset="0"/>
+                <a:ea typeface="Georgia" pitchFamily="34" charset="-122"/>
+                <a:cs typeface="Georgia" pitchFamily="34" charset="-120"/>
+              </a:rPr>
+              <a:t>Four clips, titles and credits removed, four candidate genres in the four corners. Commit by moving, then defend the corner from codes alone, two pieces of evidence noted.</a:t>
+            </a:r>
+            <a:endParaRPr lang="en-US" sz="1650" dirty="0"/>
+          </a:p>
+        </p:txBody>
+      </p:sp>
+      <p:sp>
+        <p:nvSpPr>
+          <p:cNvPr id="14" name="Shape 12"/>
+          <p:cNvSpPr/>
+          <p:nvPr/>
+        </p:nvSpPr>
+        <p:spPr>
+          <a:xfrm>
+            <a:off x="822960" y="6382512"/>
+            <a:ext cx="10543032" cy="0"/>
+          </a:xfrm>
+          <a:prstGeom prst="line">
+            <a:avLst/>
+          </a:prstGeom>
+          <a:noFill/>
+          <a:ln w="9525">
+            <a:solidFill>
+              <a:srgbClr val="D9D4C4"/>
+            </a:solidFill>
+            <a:prstDash val="solid"/>
+          </a:ln>
+        </p:spPr>
+      </p:sp>
+      <p:sp>
+        <p:nvSpPr>
+          <p:cNvPr id="15" name="Text 13"/>
+          <p:cNvSpPr/>
+          <p:nvPr/>
+        </p:nvSpPr>
+        <p:spPr>
+          <a:xfrm>
+            <a:off x="822960" y="6419088"/>
+            <a:ext cx="7315200" cy="274320"/>
+          </a:xfrm>
+          <a:prstGeom prst="rect">
+            <a:avLst/>
+          </a:prstGeom>
+          <a:noFill/>
+          <a:ln/>
+        </p:spPr>
+        <p:txBody>
+          <a:bodyPr wrap="square" lIns="0" tIns="0" rIns="0" bIns="0" rtlCol="0" anchor="ctr"/>
+          <a:lstStyle/>
+          <a:p>
+            <a:pPr indent="0" marL="0">
+              <a:buNone/>
+            </a:pPr>
+            <a:r>
+              <a:rPr lang="en-US" sz="900" spc="150" kern="0" dirty="0">
+                <a:solidFill>
+                  <a:srgbClr val="7A7F72"/>
+                </a:solidFill>
+                <a:latin typeface="Arial" pitchFamily="34" charset="0"/>
+                <a:ea typeface="Arial" pitchFamily="34" charset="-122"/>
+                <a:cs typeface="Arial" pitchFamily="34" charset="-120"/>
+              </a:rPr>
+              <a:t>MEDIA STUDIES 9607 · SEMESTER I</a:t>
+            </a:r>
+            <a:endParaRPr lang="en-US" sz="900" dirty="0"/>
+          </a:p>
+        </p:txBody>
+      </p:sp>
+      <p:sp>
+        <p:nvSpPr>
+          <p:cNvPr id="16" name="Text 14"/>
+          <p:cNvSpPr/>
+          <p:nvPr/>
+        </p:nvSpPr>
+        <p:spPr>
+          <a:xfrm>
+            <a:off x="10268712" y="6355080"/>
+            <a:ext cx="1097280" cy="365760"/>
+          </a:xfrm>
+          <a:prstGeom prst="rect">
+            <a:avLst/>
+          </a:prstGeom>
+          <a:noFill/>
+          <a:ln/>
+        </p:spPr>
+        <p:txBody>
+          <a:bodyPr wrap="square" lIns="0" tIns="0" rIns="0" bIns="0" rtlCol="0" anchor="ctr"/>
+          <a:lstStyle/>
+          <a:p>
+            <a:pPr algn="r" indent="0" marL="0">
+              <a:buNone/>
+            </a:pPr>
+            <a:r>
+              <a:rPr lang="en-US" sz="1600" dirty="0">
+                <a:solidFill>
+                  <a:srgbClr val="A3C1AD"/>
+                </a:solidFill>
+                <a:latin typeface="Georgia" pitchFamily="34" charset="0"/>
+                <a:ea typeface="Georgia" pitchFamily="34" charset="-122"/>
+                <a:cs typeface="Georgia" pitchFamily="34" charset="-120"/>
+              </a:rPr>
+              <a:t>05</a:t>
+            </a:r>
+            <a:endParaRPr lang="en-US" sz="1600" dirty="0"/>
+          </a:p>
+        </p:txBody>
+      </p:sp>
+    </p:spTree>
+  </p:cSld>
+  <p:clrMapOvr>
+    <a:masterClrMapping/>
+  </p:clrMapOvr>
+</p:sld>
+</file>
+
+<file path=ppt/slides/slide12.xml><?xml version="1.0" encoding="utf-8"?>
+<p:sld xmlns:a="http://schemas.openxmlformats.org/drawingml/2006/main" xmlns:r="http://schemas.openxmlformats.org/officeDocument/2006/relationships" xmlns:p="http://schemas.openxmlformats.org/presentationml/2006/main">
+  <p:cSld name="Slide 12">
+    <p:bg>
+      <p:bgPr>
+        <a:solidFill>
+          <a:srgbClr val="FAF8F1"/>
+        </a:solidFill>
+      </p:bgPr>
+    </p:bg>
+    <p:spTree>
+      <p:nvGrpSpPr>
+        <p:cNvPr id="1" name=""/>
+        <p:cNvGrpSpPr/>
+        <p:nvPr/>
+      </p:nvGrpSpPr>
+      <p:grpSpPr>
+        <a:xfrm>
+          <a:off x="0" y="0"/>
+          <a:ext cx="0" cy="0"/>
+          <a:chOff x="0" y="0"/>
+          <a:chExt cx="0" cy="0"/>
+        </a:xfrm>
+      </p:grpSpPr>
+      <p:sp>
+        <p:nvSpPr>
+          <p:cNvPr id="2" name="Text 0"/>
+          <p:cNvSpPr/>
+          <p:nvPr/>
+        </p:nvSpPr>
+        <p:spPr>
+          <a:xfrm>
+            <a:off x="822960" y="457200"/>
+            <a:ext cx="6400800" cy="274320"/>
+          </a:xfrm>
+          <a:prstGeom prst="rect">
+            <a:avLst/>
+          </a:prstGeom>
+          <a:noFill/>
+          <a:ln/>
+        </p:spPr>
+        <p:txBody>
+          <a:bodyPr wrap="square" lIns="0" tIns="0" rIns="0" bIns="0" rtlCol="0" anchor="ctr"/>
+          <a:lstStyle/>
+          <a:p>
+            <a:pPr algn="l" indent="0" marL="0">
+              <a:buNone/>
+            </a:pPr>
+            <a:r>
+              <a:rPr lang="en-US" sz="1100" b="1" spc="250" kern="0" dirty="0">
+                <a:solidFill>
+                  <a:srgbClr val="4A6B5D"/>
+                </a:solidFill>
+                <a:latin typeface="Arial" pitchFamily="34" charset="0"/>
+                <a:ea typeface="Arial" pitchFamily="34" charset="-122"/>
+                <a:cs typeface="Arial" pitchFamily="34" charset="-120"/>
+              </a:rPr>
+              <a:t>MONDAY · POSTED TO THE BLOG</a:t>
+            </a:r>
+            <a:endParaRPr lang="en-US" sz="1100" dirty="0"/>
+          </a:p>
+        </p:txBody>
+      </p:sp>
+      <p:sp>
+        <p:nvSpPr>
+          <p:cNvPr id="3" name="Text 1"/>
+          <p:cNvSpPr/>
+          <p:nvPr/>
+        </p:nvSpPr>
+        <p:spPr>
+          <a:xfrm>
+            <a:off x="6793992" y="457200"/>
+            <a:ext cx="4572000" cy="274320"/>
+          </a:xfrm>
+          <a:prstGeom prst="rect">
+            <a:avLst/>
+          </a:prstGeom>
+          <a:noFill/>
+          <a:ln/>
+        </p:spPr>
+        <p:txBody>
+          <a:bodyPr wrap="square" lIns="0" tIns="0" rIns="0" bIns="0" rtlCol="0" anchor="ctr"/>
+          <a:lstStyle/>
+          <a:p>
+            <a:pPr algn="r" indent="0" marL="0">
+              <a:buNone/>
+            </a:pPr>
+            <a:r>
+              <a:rPr lang="en-US" sz="1100" b="1" spc="250" kern="0" dirty="0">
+                <a:solidFill>
+                  <a:srgbClr val="7A7F72"/>
+                </a:solidFill>
+                <a:latin typeface="Arial" pitchFamily="34" charset="0"/>
+                <a:ea typeface="Arial" pitchFamily="34" charset="-122"/>
+                <a:cs typeface="Arial" pitchFamily="34" charset="-120"/>
+              </a:rPr>
+              <a:t>A COMPONENT 1 RESEARCH ENTRY</a:t>
+            </a:r>
+            <a:endParaRPr lang="en-US" sz="1100" dirty="0"/>
+          </a:p>
+        </p:txBody>
+      </p:sp>
+      <p:sp>
+        <p:nvSpPr>
+          <p:cNvPr id="4" name="Shape 2"/>
+          <p:cNvSpPr/>
+          <p:nvPr/>
+        </p:nvSpPr>
+        <p:spPr>
+          <a:xfrm>
+            <a:off x="822960" y="786384"/>
+            <a:ext cx="10543032" cy="0"/>
+          </a:xfrm>
+          <a:prstGeom prst="line">
+            <a:avLst/>
+          </a:prstGeom>
+          <a:noFill/>
+          <a:ln w="9525">
+            <a:solidFill>
+              <a:srgbClr val="D9D4C4"/>
+            </a:solidFill>
+            <a:prstDash val="solid"/>
+          </a:ln>
+        </p:spPr>
+      </p:sp>
+      <p:sp>
+        <p:nvSpPr>
+          <p:cNvPr id="5" name="Text 3"/>
+          <p:cNvSpPr/>
+          <p:nvPr/>
+        </p:nvSpPr>
+        <p:spPr>
+          <a:xfrm>
+            <a:off x="822960" y="1051560"/>
+            <a:ext cx="10543032" cy="777240"/>
+          </a:xfrm>
+          <a:prstGeom prst="rect">
+            <a:avLst/>
+          </a:prstGeom>
+          <a:noFill/>
+          <a:ln/>
+        </p:spPr>
+        <p:txBody>
+          <a:bodyPr wrap="square" lIns="0" tIns="0" rIns="0" bIns="0" rtlCol="0" anchor="ctr"/>
+          <a:lstStyle/>
+          <a:p>
+            <a:pPr indent="0" marL="0">
+              <a:buNone/>
+            </a:pPr>
+            <a:r>
+              <a:rPr lang="en-US" sz="3400" dirty="0">
+                <a:solidFill>
+                  <a:srgbClr val="24313F"/>
+                </a:solidFill>
+                <a:latin typeface="Georgia" pitchFamily="34" charset="0"/>
+                <a:ea typeface="Georgia" pitchFamily="34" charset="-122"/>
+                <a:cs typeface="Georgia" pitchFamily="34" charset="-120"/>
+              </a:rPr>
+              <a:t>What is your opening promising?</a:t>
+            </a:r>
+            <a:endParaRPr lang="en-US" sz="3400" dirty="0"/>
+          </a:p>
+        </p:txBody>
+      </p:sp>
+      <p:sp>
+        <p:nvSpPr>
+          <p:cNvPr id="6" name="Text 4"/>
+          <p:cNvSpPr/>
+          <p:nvPr/>
+        </p:nvSpPr>
+        <p:spPr>
+          <a:xfrm>
+            <a:off x="822960" y="1965960"/>
+            <a:ext cx="822960" cy="548640"/>
+          </a:xfrm>
+          <a:prstGeom prst="rect">
+            <a:avLst/>
+          </a:prstGeom>
+          <a:noFill/>
+          <a:ln/>
+        </p:spPr>
+        <p:txBody>
+          <a:bodyPr wrap="square" lIns="0" tIns="0" rIns="0" bIns="0" rtlCol="0" anchor="ctr"/>
+          <a:lstStyle/>
+          <a:p>
+            <a:pPr indent="0" marL="0">
+              <a:buNone/>
+            </a:pPr>
+            <a:r>
+              <a:rPr lang="en-US" sz="2600" dirty="0">
+                <a:solidFill>
+                  <a:srgbClr val="A3C1AD"/>
+                </a:solidFill>
+                <a:latin typeface="Georgia" pitchFamily="34" charset="0"/>
+                <a:ea typeface="Georgia" pitchFamily="34" charset="-122"/>
+                <a:cs typeface="Georgia" pitchFamily="34" charset="-120"/>
+              </a:rPr>
+              <a:t>01</a:t>
+            </a:r>
+            <a:endParaRPr lang="en-US" sz="2600" dirty="0"/>
+          </a:p>
+        </p:txBody>
+      </p:sp>
+      <p:sp>
+        <p:nvSpPr>
+          <p:cNvPr id="7" name="Text 5"/>
+          <p:cNvSpPr/>
+          <p:nvPr/>
+        </p:nvSpPr>
+        <p:spPr>
+          <a:xfrm>
+            <a:off x="1828800" y="1965960"/>
+            <a:ext cx="3108960" cy="548640"/>
+          </a:xfrm>
+          <a:prstGeom prst="rect">
+            <a:avLst/>
+          </a:prstGeom>
+          <a:noFill/>
+          <a:ln/>
+        </p:spPr>
+        <p:txBody>
+          <a:bodyPr wrap="square" lIns="0" tIns="0" rIns="0" bIns="0" rtlCol="0" anchor="ctr"/>
+          <a:lstStyle/>
+          <a:p>
+            <a:pPr indent="0" marL="0">
+              <a:buNone/>
+            </a:pPr>
+            <a:r>
+              <a:rPr lang="en-US" sz="2100" dirty="0">
+                <a:solidFill>
+                  <a:srgbClr val="4A6B5D"/>
+                </a:solidFill>
+                <a:latin typeface="Georgia" pitchFamily="34" charset="0"/>
+                <a:ea typeface="Georgia" pitchFamily="34" charset="-122"/>
+                <a:cs typeface="Georgia" pitchFamily="34" charset="-120"/>
+              </a:rPr>
+              <a:t>The genre</a:t>
+            </a:r>
+            <a:endParaRPr lang="en-US" sz="2100" dirty="0"/>
+          </a:p>
+        </p:txBody>
+      </p:sp>
+      <p:sp>
+        <p:nvSpPr>
+          <p:cNvPr id="8" name="Text 6"/>
+          <p:cNvSpPr/>
+          <p:nvPr/>
+        </p:nvSpPr>
+        <p:spPr>
+          <a:xfrm>
+            <a:off x="5120640" y="1965960"/>
+            <a:ext cx="6949440" cy="548640"/>
+          </a:xfrm>
+          <a:prstGeom prst="rect">
+            <a:avLst/>
+          </a:prstGeom>
+          <a:noFill/>
+          <a:ln/>
+        </p:spPr>
+        <p:txBody>
+          <a:bodyPr wrap="square" lIns="0" tIns="0" rIns="0" bIns="0" rtlCol="0" anchor="ctr"/>
+          <a:lstStyle/>
+          <a:p>
+            <a:pPr indent="0" marL="0">
+              <a:buNone/>
+            </a:pPr>
+            <a:r>
+              <a:rPr lang="en-US" sz="1650" dirty="0">
+                <a:solidFill>
+                  <a:srgbClr val="24313F"/>
+                </a:solidFill>
+                <a:latin typeface="Georgia" pitchFamily="34" charset="0"/>
+                <a:ea typeface="Georgia" pitchFamily="34" charset="-122"/>
+                <a:cs typeface="Georgia" pitchFamily="34" charset="-120"/>
+              </a:rPr>
+              <a:t>which one your opening is offering, named plainly</a:t>
+            </a:r>
+            <a:endParaRPr lang="en-US" sz="1650" dirty="0"/>
+          </a:p>
+        </p:txBody>
+      </p:sp>
+      <p:sp>
+        <p:nvSpPr>
+          <p:cNvPr id="9" name="Text 7"/>
+          <p:cNvSpPr/>
+          <p:nvPr/>
+        </p:nvSpPr>
+        <p:spPr>
+          <a:xfrm>
+            <a:off x="822960" y="2862072"/>
+            <a:ext cx="822960" cy="548640"/>
+          </a:xfrm>
+          <a:prstGeom prst="rect">
+            <a:avLst/>
+          </a:prstGeom>
+          <a:noFill/>
+          <a:ln/>
+        </p:spPr>
+        <p:txBody>
+          <a:bodyPr wrap="square" lIns="0" tIns="0" rIns="0" bIns="0" rtlCol="0" anchor="ctr"/>
+          <a:lstStyle/>
+          <a:p>
+            <a:pPr indent="0" marL="0">
+              <a:buNone/>
+            </a:pPr>
+            <a:r>
+              <a:rPr lang="en-US" sz="2600" dirty="0">
+                <a:solidFill>
+                  <a:srgbClr val="A3C1AD"/>
+                </a:solidFill>
+                <a:latin typeface="Georgia" pitchFamily="34" charset="0"/>
+                <a:ea typeface="Georgia" pitchFamily="34" charset="-122"/>
+                <a:cs typeface="Georgia" pitchFamily="34" charset="-120"/>
+              </a:rPr>
+              <a:t>02</a:t>
+            </a:r>
+            <a:endParaRPr lang="en-US" sz="2600" dirty="0"/>
+          </a:p>
+        </p:txBody>
+      </p:sp>
+      <p:sp>
+        <p:nvSpPr>
+          <p:cNvPr id="10" name="Text 8"/>
+          <p:cNvSpPr/>
+          <p:nvPr/>
+        </p:nvSpPr>
+        <p:spPr>
+          <a:xfrm>
+            <a:off x="1828800" y="2862072"/>
+            <a:ext cx="3108960" cy="548640"/>
+          </a:xfrm>
+          <a:prstGeom prst="rect">
+            <a:avLst/>
+          </a:prstGeom>
+          <a:noFill/>
+          <a:ln/>
+        </p:spPr>
+        <p:txBody>
+          <a:bodyPr wrap="square" lIns="0" tIns="0" rIns="0" bIns="0" rtlCol="0" anchor="ctr"/>
+          <a:lstStyle/>
+          <a:p>
+            <a:pPr indent="0" marL="0">
+              <a:buNone/>
+            </a:pPr>
+            <a:r>
+              <a:rPr lang="en-US" sz="2100" dirty="0">
+                <a:solidFill>
+                  <a:srgbClr val="4A6B5D"/>
+                </a:solidFill>
+                <a:latin typeface="Georgia" pitchFamily="34" charset="0"/>
+                <a:ea typeface="Georgia" pitchFamily="34" charset="-122"/>
+                <a:cs typeface="Georgia" pitchFamily="34" charset="-120"/>
+              </a:rPr>
+              <a:t>The promise</a:t>
+            </a:r>
+            <a:endParaRPr lang="en-US" sz="2100" dirty="0"/>
+          </a:p>
+        </p:txBody>
+      </p:sp>
+      <p:sp>
+        <p:nvSpPr>
+          <p:cNvPr id="11" name="Text 9"/>
+          <p:cNvSpPr/>
+          <p:nvPr/>
+        </p:nvSpPr>
+        <p:spPr>
+          <a:xfrm>
+            <a:off x="5120640" y="2862072"/>
+            <a:ext cx="6949440" cy="548640"/>
+          </a:xfrm>
+          <a:prstGeom prst="rect">
+            <a:avLst/>
+          </a:prstGeom>
+          <a:noFill/>
+          <a:ln/>
+        </p:spPr>
+        <p:txBody>
+          <a:bodyPr wrap="square" lIns="0" tIns="0" rIns="0" bIns="0" rtlCol="0" anchor="ctr"/>
+          <a:lstStyle/>
+          <a:p>
+            <a:pPr indent="0" marL="0">
+              <a:buNone/>
+            </a:pPr>
+            <a:r>
+              <a:rPr lang="en-US" sz="1650" dirty="0">
+                <a:solidFill>
+                  <a:srgbClr val="24313F"/>
+                </a:solidFill>
+                <a:latin typeface="Georgia" pitchFamily="34" charset="0"/>
+                <a:ea typeface="Georgia" pitchFamily="34" charset="-122"/>
+                <a:cs typeface="Georgia" pitchFamily="34" charset="-120"/>
+              </a:rPr>
+              <a:t>what the audience is being sold: fear, romance, awe, comfort</a:t>
+            </a:r>
+            <a:endParaRPr lang="en-US" sz="1650" dirty="0"/>
+          </a:p>
+        </p:txBody>
+      </p:sp>
+      <p:sp>
+        <p:nvSpPr>
+          <p:cNvPr id="12" name="Text 10"/>
+          <p:cNvSpPr/>
+          <p:nvPr/>
+        </p:nvSpPr>
+        <p:spPr>
+          <a:xfrm>
+            <a:off x="822960" y="3758184"/>
+            <a:ext cx="822960" cy="548640"/>
+          </a:xfrm>
+          <a:prstGeom prst="rect">
+            <a:avLst/>
+          </a:prstGeom>
+          <a:noFill/>
+          <a:ln/>
+        </p:spPr>
+        <p:txBody>
+          <a:bodyPr wrap="square" lIns="0" tIns="0" rIns="0" bIns="0" rtlCol="0" anchor="ctr"/>
+          <a:lstStyle/>
+          <a:p>
+            <a:pPr indent="0" marL="0">
+              <a:buNone/>
+            </a:pPr>
+            <a:r>
+              <a:rPr lang="en-US" sz="2600" dirty="0">
+                <a:solidFill>
+                  <a:srgbClr val="A3C1AD"/>
+                </a:solidFill>
+                <a:latin typeface="Georgia" pitchFamily="34" charset="0"/>
+                <a:ea typeface="Georgia" pitchFamily="34" charset="-122"/>
+                <a:cs typeface="Georgia" pitchFamily="34" charset="-120"/>
+              </a:rPr>
+              <a:t>03</a:t>
+            </a:r>
+            <a:endParaRPr lang="en-US" sz="2600" dirty="0"/>
+          </a:p>
+        </p:txBody>
+      </p:sp>
+      <p:sp>
+        <p:nvSpPr>
+          <p:cNvPr id="13" name="Text 11"/>
+          <p:cNvSpPr/>
+          <p:nvPr/>
+        </p:nvSpPr>
+        <p:spPr>
+          <a:xfrm>
+            <a:off x="1828800" y="3758184"/>
+            <a:ext cx="3108960" cy="548640"/>
+          </a:xfrm>
+          <a:prstGeom prst="rect">
+            <a:avLst/>
+          </a:prstGeom>
+          <a:noFill/>
+          <a:ln/>
+        </p:spPr>
+        <p:txBody>
+          <a:bodyPr wrap="square" lIns="0" tIns="0" rIns="0" bIns="0" rtlCol="0" anchor="ctr"/>
+          <a:lstStyle/>
+          <a:p>
+            <a:pPr indent="0" marL="0">
+              <a:buNone/>
+            </a:pPr>
+            <a:r>
+              <a:rPr lang="en-US" sz="2100" dirty="0">
+                <a:solidFill>
+                  <a:srgbClr val="4A6B5D"/>
+                </a:solidFill>
+                <a:latin typeface="Georgia" pitchFamily="34" charset="0"/>
+                <a:ea typeface="Georgia" pitchFamily="34" charset="-122"/>
+                <a:cs typeface="Georgia" pitchFamily="34" charset="-120"/>
+              </a:rPr>
+              <a:t>Three codes</a:t>
+            </a:r>
+            <a:endParaRPr lang="en-US" sz="2100" dirty="0"/>
+          </a:p>
+        </p:txBody>
+      </p:sp>
+      <p:sp>
+        <p:nvSpPr>
+          <p:cNvPr id="14" name="Text 12"/>
+          <p:cNvSpPr/>
+          <p:nvPr/>
+        </p:nvSpPr>
+        <p:spPr>
+          <a:xfrm>
+            <a:off x="5120640" y="3758184"/>
+            <a:ext cx="6949440" cy="548640"/>
+          </a:xfrm>
+          <a:prstGeom prst="rect">
+            <a:avLst/>
+          </a:prstGeom>
+          <a:noFill/>
+          <a:ln/>
+        </p:spPr>
+        <p:txBody>
+          <a:bodyPr wrap="square" lIns="0" tIns="0" rIns="0" bIns="0" rtlCol="0" anchor="ctr"/>
+          <a:lstStyle/>
+          <a:p>
+            <a:pPr indent="0" marL="0">
+              <a:buNone/>
+            </a:pPr>
+            <a:r>
+              <a:rPr lang="en-US" sz="1650" dirty="0">
+                <a:solidFill>
+                  <a:srgbClr val="24313F"/>
+                </a:solidFill>
+                <a:latin typeface="Georgia" pitchFamily="34" charset="0"/>
+                <a:ea typeface="Georgia" pitchFamily="34" charset="-122"/>
+                <a:cs typeface="Georgia" pitchFamily="34" charset="-120"/>
+              </a:rPr>
+              <a:t>which technical or symbolic codes carry that promise</a:t>
+            </a:r>
+            <a:endParaRPr lang="en-US" sz="1650" dirty="0"/>
+          </a:p>
+        </p:txBody>
+      </p:sp>
+      <p:sp>
+        <p:nvSpPr>
+          <p:cNvPr id="15" name="Text 13"/>
+          <p:cNvSpPr/>
+          <p:nvPr/>
+        </p:nvSpPr>
+        <p:spPr>
+          <a:xfrm>
+            <a:off x="822960" y="4654296"/>
+            <a:ext cx="822960" cy="548640"/>
+          </a:xfrm>
+          <a:prstGeom prst="rect">
+            <a:avLst/>
+          </a:prstGeom>
+          <a:noFill/>
+          <a:ln/>
+        </p:spPr>
+        <p:txBody>
+          <a:bodyPr wrap="square" lIns="0" tIns="0" rIns="0" bIns="0" rtlCol="0" anchor="ctr"/>
+          <a:lstStyle/>
+          <a:p>
+            <a:pPr indent="0" marL="0">
+              <a:buNone/>
+            </a:pPr>
+            <a:r>
+              <a:rPr lang="en-US" sz="2600" dirty="0">
+                <a:solidFill>
+                  <a:srgbClr val="A3C1AD"/>
+                </a:solidFill>
+                <a:latin typeface="Georgia" pitchFamily="34" charset="0"/>
+                <a:ea typeface="Georgia" pitchFamily="34" charset="-122"/>
+                <a:cs typeface="Georgia" pitchFamily="34" charset="-120"/>
+              </a:rPr>
+              <a:t>04</a:t>
+            </a:r>
+            <a:endParaRPr lang="en-US" sz="2600" dirty="0"/>
+          </a:p>
+        </p:txBody>
+      </p:sp>
+      <p:sp>
+        <p:nvSpPr>
+          <p:cNvPr id="16" name="Text 14"/>
+          <p:cNvSpPr/>
+          <p:nvPr/>
+        </p:nvSpPr>
+        <p:spPr>
+          <a:xfrm>
+            <a:off x="1828800" y="4654296"/>
+            <a:ext cx="3108960" cy="548640"/>
+          </a:xfrm>
+          <a:prstGeom prst="rect">
+            <a:avLst/>
+          </a:prstGeom>
+          <a:noFill/>
+          <a:ln/>
+        </p:spPr>
+        <p:txBody>
+          <a:bodyPr wrap="square" lIns="0" tIns="0" rIns="0" bIns="0" rtlCol="0" anchor="ctr"/>
+          <a:lstStyle/>
+          <a:p>
+            <a:pPr indent="0" marL="0">
+              <a:buNone/>
+            </a:pPr>
+            <a:r>
+              <a:rPr lang="en-US" sz="2100" dirty="0">
+                <a:solidFill>
+                  <a:srgbClr val="4A6B5D"/>
+                </a:solidFill>
+                <a:latin typeface="Georgia" pitchFamily="34" charset="0"/>
+                <a:ea typeface="Georgia" pitchFamily="34" charset="-122"/>
+                <a:cs typeface="Georgia" pitchFamily="34" charset="-120"/>
+              </a:rPr>
+              <a:t>The variation</a:t>
+            </a:r>
+            <a:endParaRPr lang="en-US" sz="2100" dirty="0"/>
+          </a:p>
+        </p:txBody>
+      </p:sp>
+      <p:sp>
+        <p:nvSpPr>
+          <p:cNvPr id="17" name="Text 15"/>
+          <p:cNvSpPr/>
+          <p:nvPr/>
+        </p:nvSpPr>
+        <p:spPr>
+          <a:xfrm>
+            <a:off x="5120640" y="4654296"/>
+            <a:ext cx="6949440" cy="548640"/>
+          </a:xfrm>
+          <a:prstGeom prst="rect">
+            <a:avLst/>
+          </a:prstGeom>
+          <a:noFill/>
+          <a:ln/>
+        </p:spPr>
+        <p:txBody>
+          <a:bodyPr wrap="square" lIns="0" tIns="0" rIns="0" bIns="0" rtlCol="0" anchor="ctr"/>
+          <a:lstStyle/>
+          <a:p>
+            <a:pPr indent="0" marL="0">
+              <a:buNone/>
+            </a:pPr>
+            <a:r>
+              <a:rPr lang="en-US" sz="1650" dirty="0">
+                <a:solidFill>
+                  <a:srgbClr val="24313F"/>
+                </a:solidFill>
+                <a:latin typeface="Georgia" pitchFamily="34" charset="0"/>
+                <a:ea typeface="Georgia" pitchFamily="34" charset="-122"/>
+                <a:cs typeface="Georgia" pitchFamily="34" charset="-120"/>
+              </a:rPr>
+              <a:t>what you will do differently, so it is not a copy</a:t>
+            </a:r>
+            <a:endParaRPr lang="en-US" sz="1650" dirty="0"/>
+          </a:p>
+        </p:txBody>
+      </p:sp>
+      <p:sp>
+        <p:nvSpPr>
+          <p:cNvPr id="18" name="Shape 16"/>
+          <p:cNvSpPr/>
+          <p:nvPr/>
+        </p:nvSpPr>
+        <p:spPr>
+          <a:xfrm>
+            <a:off x="822960" y="5623560"/>
+            <a:ext cx="10543032" cy="822960"/>
+          </a:xfrm>
+          <a:prstGeom prst="rect">
+            <a:avLst/>
+          </a:prstGeom>
+          <a:solidFill>
+            <a:srgbClr val="E8EFE7"/>
+          </a:solidFill>
+          <a:ln/>
+        </p:spPr>
+      </p:sp>
+      <p:sp>
+        <p:nvSpPr>
+          <p:cNvPr id="19" name="Text 17"/>
+          <p:cNvSpPr/>
+          <p:nvPr/>
+        </p:nvSpPr>
+        <p:spPr>
+          <a:xfrm>
+            <a:off x="1097280" y="5669280"/>
+            <a:ext cx="9994392" cy="731520"/>
+          </a:xfrm>
+          <a:prstGeom prst="rect">
+            <a:avLst/>
+          </a:prstGeom>
+          <a:noFill/>
+          <a:ln/>
+        </p:spPr>
+        <p:txBody>
+          <a:bodyPr wrap="square" lIns="0" tIns="0" rIns="0" bIns="0" rtlCol="0" anchor="ctr"/>
+          <a:lstStyle/>
+          <a:p>
+            <a:pPr indent="0" marL="0">
+              <a:buNone/>
+            </a:pPr>
+            <a:r>
+              <a:rPr lang="en-US" sz="1600" i="1" dirty="0">
+                <a:solidFill>
+                  <a:srgbClr val="4A6B5D"/>
+                </a:solidFill>
+                <a:latin typeface="Georgia" pitchFamily="34" charset="0"/>
+                <a:ea typeface="Georgia" pitchFamily="34" charset="-122"/>
+                <a:cs typeface="Georgia" pitchFamily="34" charset="-120"/>
+              </a:rPr>
+              <a:t>A group that cannot answer the last one has designed a pastiche, and now knows it eight days before A2. That is why genre sits here and not in November.</a:t>
+            </a:r>
+            <a:endParaRPr lang="en-US" sz="1600" dirty="0"/>
+          </a:p>
+        </p:txBody>
+      </p:sp>
+      <p:sp>
+        <p:nvSpPr>
+          <p:cNvPr id="20" name="Shape 18"/>
+          <p:cNvSpPr/>
+          <p:nvPr/>
+        </p:nvSpPr>
+        <p:spPr>
+          <a:xfrm>
+            <a:off x="822960" y="6382512"/>
+            <a:ext cx="10543032" cy="0"/>
+          </a:xfrm>
+          <a:prstGeom prst="line">
+            <a:avLst/>
+          </a:prstGeom>
+          <a:noFill/>
+          <a:ln w="9525">
+            <a:solidFill>
+              <a:srgbClr val="D9D4C4"/>
+            </a:solidFill>
+            <a:prstDash val="solid"/>
+          </a:ln>
+        </p:spPr>
+      </p:sp>
+      <p:sp>
+        <p:nvSpPr>
+          <p:cNvPr id="21" name="Text 19"/>
+          <p:cNvSpPr/>
+          <p:nvPr/>
+        </p:nvSpPr>
+        <p:spPr>
+          <a:xfrm>
+            <a:off x="822960" y="6419088"/>
+            <a:ext cx="7315200" cy="274320"/>
+          </a:xfrm>
+          <a:prstGeom prst="rect">
+            <a:avLst/>
+          </a:prstGeom>
+          <a:noFill/>
+          <a:ln/>
+        </p:spPr>
+        <p:txBody>
+          <a:bodyPr wrap="square" lIns="0" tIns="0" rIns="0" bIns="0" rtlCol="0" anchor="ctr"/>
+          <a:lstStyle/>
+          <a:p>
+            <a:pPr indent="0" marL="0">
+              <a:buNone/>
+            </a:pPr>
+            <a:r>
+              <a:rPr lang="en-US" sz="900" spc="150" kern="0" dirty="0">
+                <a:solidFill>
+                  <a:srgbClr val="7A7F72"/>
+                </a:solidFill>
+                <a:latin typeface="Arial" pitchFamily="34" charset="0"/>
+                <a:ea typeface="Arial" pitchFamily="34" charset="-122"/>
+                <a:cs typeface="Arial" pitchFamily="34" charset="-120"/>
+              </a:rPr>
+              <a:t>MEDIA STUDIES 9607 · SEMESTER I</a:t>
+            </a:r>
+            <a:endParaRPr lang="en-US" sz="900" dirty="0"/>
+          </a:p>
+        </p:txBody>
+      </p:sp>
+      <p:sp>
+        <p:nvSpPr>
+          <p:cNvPr id="22" name="Text 20"/>
+          <p:cNvSpPr/>
+          <p:nvPr/>
+        </p:nvSpPr>
+        <p:spPr>
+          <a:xfrm>
+            <a:off x="10268712" y="6355080"/>
+            <a:ext cx="1097280" cy="365760"/>
+          </a:xfrm>
+          <a:prstGeom prst="rect">
+            <a:avLst/>
+          </a:prstGeom>
+          <a:noFill/>
+          <a:ln/>
+        </p:spPr>
+        <p:txBody>
+          <a:bodyPr wrap="square" lIns="0" tIns="0" rIns="0" bIns="0" rtlCol="0" anchor="ctr"/>
+          <a:lstStyle/>
+          <a:p>
+            <a:pPr algn="r" indent="0" marL="0">
+              <a:buNone/>
+            </a:pPr>
+            <a:r>
+              <a:rPr lang="en-US" sz="1600" dirty="0">
+                <a:solidFill>
+                  <a:srgbClr val="A3C1AD"/>
+                </a:solidFill>
+                <a:latin typeface="Georgia" pitchFamily="34" charset="0"/>
+                <a:ea typeface="Georgia" pitchFamily="34" charset="-122"/>
+                <a:cs typeface="Georgia" pitchFamily="34" charset="-120"/>
+              </a:rPr>
+              <a:t>06</a:t>
+            </a:r>
+            <a:endParaRPr lang="en-US" sz="1600" dirty="0"/>
+          </a:p>
+        </p:txBody>
+      </p:sp>
+    </p:spTree>
+  </p:cSld>
+  <p:clrMapOvr>
+    <a:masterClrMapping/>
+  </p:clrMapOvr>
+</p:sld>
+</file>
+
+<file path=ppt/slides/slide13.xml><?xml version="1.0" encoding="utf-8"?>
+<p:sld xmlns:a="http://schemas.openxmlformats.org/drawingml/2006/main" xmlns:r="http://schemas.openxmlformats.org/officeDocument/2006/relationships" xmlns:p="http://schemas.openxmlformats.org/presentationml/2006/main">
+  <p:cSld name="Slide 13">
+    <p:bg>
+      <p:bgPr>
+        <a:solidFill>
           <a:srgbClr val="4A6B5D"/>
         </a:solidFill>
       </p:bgPr>
@@ -2190,7 +4095,7 @@
                 <a:ea typeface="Georgia" pitchFamily="34" charset="-122"/>
                 <a:cs typeface="Georgia" pitchFamily="34" charset="-120"/>
               </a:rPr>
-              <a:t>05</a:t>
+              <a:t>07</a:t>
             </a:r>
             <a:endParaRPr lang="en-US" sz="1600" dirty="0"/>
           </a:p>
@@ -2772,7 +4677,7 @@
                 <a:ea typeface="Arial" pitchFamily="34" charset="-122"/>
                 <a:cs typeface="Arial" pitchFamily="34" charset="-120"/>
               </a:rPr>
-              <a:t>Two skulls, two centuries apart. The recognition was instant, and it happened before a single film term. That recognition is genre working.</a:t>
+              <a:t>Two skulls, three centuries apart. The recognition was instant, and it happened before a single film term. That recognition is genre working.</a:t>
             </a:r>
             <a:endParaRPr lang="en-US" sz="1200" dirty="0"/>
           </a:p>
@@ -2872,12 +4777,12 @@
           <a:p>
             <a:pPr indent="0" marL="0">
               <a:lnSpc>
-                <a:spcPts val="4800"/>
+                <a:spcPts val="4600"/>
               </a:lnSpc>
               <a:buNone/>
             </a:pPr>
             <a:r>
-              <a:rPr lang="en-US" sz="3800" dirty="0">
+              <a:rPr lang="en-US" sz="3600" dirty="0">
                 <a:solidFill>
                   <a:srgbClr val="24313F"/>
                 </a:solidFill>
@@ -2885,9 +4790,9 @@
                 <a:ea typeface="Georgia" pitchFamily="34" charset="-122"/>
                 <a:cs typeface="Georgia" pitchFamily="34" charset="-120"/>
               </a:rPr>
-              <a:t>Genres are instances of repetition and difference, and difference is absolutely essential to the economy of genre.</a:t>
-            </a:r>
-            <a:endParaRPr lang="en-US" sz="3800" dirty="0"/>
+              <a:t>Genres are instances of repetition and difference ... difference is absolutely essential to the economy of genre.</a:t>
+            </a:r>
+            <a:endParaRPr lang="en-US" sz="3600" dirty="0"/>
           </a:p>
         </p:txBody>
       </p:sp>
@@ -2947,7 +4852,7 @@
                 <a:ea typeface="Arial" pitchFamily="34" charset="-122"/>
                 <a:cs typeface="Arial" pitchFamily="34" charset="-120"/>
               </a:rPr>
-              <a:t>Steve Neale, Genre and Hollywood</a:t>
+              <a:t>Steve Neale, Genre, 1980</a:t>
             </a:r>
             <a:endParaRPr lang="en-US" sz="1400" dirty="0"/>
           </a:p>
@@ -3561,7 +5466,7 @@
                 <a:ea typeface="Arial" pitchFamily="34" charset="-122"/>
                 <a:cs typeface="Arial" pitchFamily="34" charset="-120"/>
               </a:rPr>
-              <a:t>MAP A GENRE YOU KNOW</a:t>
+              <a:t>REPETITION AND DIFFERENCE, ON ONE WALL</a:t>
             </a:r>
             <a:endParaRPr lang="en-US" sz="1100" dirty="0"/>
           </a:p>
@@ -3600,7 +5505,7 @@
                 <a:ea typeface="Arial" pitchFamily="34" charset="-122"/>
                 <a:cs typeface="Arial" pitchFamily="34" charset="-120"/>
               </a:rPr>
-              <a:t>HORROR, CRIME DRAMA, SITCOM, DOCUMENTARY</a:t>
+              <a:t>THE DEAL, PRINTED</a:t>
             </a:r>
             <a:endParaRPr lang="en-US" sz="1100" dirty="0"/>
           </a:p>
@@ -3631,538 +5536,21 @@
       </p:sp>
       <p:sp>
         <p:nvSpPr>
-          <p:cNvPr id="5" name="Text 3"/>
-          <p:cNvSpPr/>
-          <p:nvPr/>
-        </p:nvSpPr>
-        <p:spPr>
-          <a:xfrm>
-            <a:off x="822960" y="932688"/>
-            <a:ext cx="10543032" cy="640080"/>
-          </a:xfrm>
-          <a:prstGeom prst="rect">
-            <a:avLst/>
-          </a:prstGeom>
-          <a:noFill/>
-          <a:ln/>
-        </p:spPr>
-        <p:txBody>
-          <a:bodyPr wrap="square" lIns="0" tIns="0" rIns="0" bIns="0" rtlCol="0" anchor="ctr"/>
-          <a:lstStyle/>
-          <a:p>
-            <a:pPr indent="0" marL="0">
-              <a:buNone/>
-            </a:pPr>
-            <a:r>
-              <a:rPr lang="en-US" sz="3200" dirty="0">
-                <a:solidFill>
-                  <a:srgbClr val="24313F"/>
-                </a:solidFill>
-                <a:latin typeface="Georgia" pitchFamily="34" charset="0"/>
-                <a:ea typeface="Georgia" pitchFamily="34" charset="-122"/>
-                <a:cs typeface="Georgia" pitchFamily="34" charset="-120"/>
-              </a:rPr>
-              <a:t>Four questions of the contract</a:t>
-            </a:r>
-            <a:endParaRPr lang="en-US" sz="3200" dirty="0"/>
-          </a:p>
-        </p:txBody>
-      </p:sp>
-      <p:sp>
-        <p:nvSpPr>
-          <p:cNvPr id="6" name="Text 4"/>
-          <p:cNvSpPr/>
-          <p:nvPr/>
-        </p:nvSpPr>
-        <p:spPr>
-          <a:xfrm>
-            <a:off x="822960" y="1920240"/>
-            <a:ext cx="914400" cy="548640"/>
-          </a:xfrm>
-          <a:prstGeom prst="rect">
-            <a:avLst/>
-          </a:prstGeom>
-          <a:noFill/>
-          <a:ln/>
-        </p:spPr>
-        <p:txBody>
-          <a:bodyPr wrap="square" lIns="0" tIns="0" rIns="0" bIns="0" rtlCol="0" anchor="ctr"/>
-          <a:lstStyle/>
-          <a:p>
-            <a:pPr indent="0" marL="0">
-              <a:buNone/>
-            </a:pPr>
-            <a:r>
-              <a:rPr lang="en-US" sz="3000" dirty="0">
-                <a:solidFill>
-                  <a:srgbClr val="A3C1AD"/>
-                </a:solidFill>
-                <a:latin typeface="Georgia" pitchFamily="34" charset="0"/>
-                <a:ea typeface="Georgia" pitchFamily="34" charset="-122"/>
-                <a:cs typeface="Georgia" pitchFamily="34" charset="-120"/>
-              </a:rPr>
-              <a:t>01</a:t>
-            </a:r>
-            <a:endParaRPr lang="en-US" sz="3000" dirty="0"/>
-          </a:p>
-        </p:txBody>
-      </p:sp>
-      <p:sp>
-        <p:nvSpPr>
-          <p:cNvPr id="7" name="Text 5"/>
-          <p:cNvSpPr/>
-          <p:nvPr/>
-        </p:nvSpPr>
-        <p:spPr>
-          <a:xfrm>
-            <a:off x="1737360" y="1938528"/>
-            <a:ext cx="4082796" cy="457200"/>
-          </a:xfrm>
-          <a:prstGeom prst="rect">
-            <a:avLst/>
-          </a:prstGeom>
-          <a:noFill/>
-          <a:ln/>
-        </p:spPr>
-        <p:txBody>
-          <a:bodyPr wrap="square" lIns="0" tIns="0" rIns="0" bIns="0" rtlCol="0" anchor="ctr"/>
-          <a:lstStyle/>
-          <a:p>
-            <a:pPr indent="0" marL="0">
-              <a:buNone/>
-            </a:pPr>
-            <a:r>
-              <a:rPr lang="en-US" sz="2300" dirty="0">
-                <a:solidFill>
-                  <a:srgbClr val="4A6B5D"/>
-                </a:solidFill>
-                <a:latin typeface="Georgia" pitchFamily="34" charset="0"/>
-                <a:ea typeface="Georgia" pitchFamily="34" charset="-122"/>
-                <a:cs typeface="Georgia" pitchFamily="34" charset="-120"/>
-              </a:rPr>
-              <a:t>What repeats</a:t>
-            </a:r>
-            <a:endParaRPr lang="en-US" sz="2300" dirty="0"/>
-          </a:p>
-        </p:txBody>
-      </p:sp>
-      <p:sp>
-        <p:nvSpPr>
-          <p:cNvPr id="8" name="Text 6"/>
-          <p:cNvSpPr/>
-          <p:nvPr/>
-        </p:nvSpPr>
-        <p:spPr>
-          <a:xfrm>
-            <a:off x="1737360" y="2468880"/>
-            <a:ext cx="4082796" cy="1188720"/>
-          </a:xfrm>
-          <a:prstGeom prst="rect">
-            <a:avLst/>
-          </a:prstGeom>
-          <a:noFill/>
-          <a:ln/>
-        </p:spPr>
-        <p:txBody>
-          <a:bodyPr wrap="square" lIns="0" tIns="0" rIns="0" bIns="0" rtlCol="0" anchor="t"/>
-          <a:lstStyle/>
-          <a:p>
-            <a:pPr indent="0" marL="0">
-              <a:lnSpc>
-                <a:spcPts val="2100"/>
-              </a:lnSpc>
-              <a:buNone/>
-            </a:pPr>
-            <a:r>
-              <a:rPr lang="en-US" sz="1550" dirty="0">
-                <a:solidFill>
-                  <a:srgbClr val="24313F"/>
-                </a:solidFill>
-                <a:latin typeface="Georgia" pitchFamily="34" charset="0"/>
-                <a:ea typeface="Georgia" pitchFamily="34" charset="-122"/>
-                <a:cs typeface="Georgia" pitchFamily="34" charset="-120"/>
-              </a:rPr>
-              <a:t>The conventions the audience expects and would miss if absent.</a:t>
-            </a:r>
-            <a:endParaRPr lang="en-US" sz="1550" dirty="0"/>
-          </a:p>
-        </p:txBody>
-      </p:sp>
-      <p:sp>
-        <p:nvSpPr>
-          <p:cNvPr id="9" name="Text 7"/>
-          <p:cNvSpPr/>
-          <p:nvPr/>
-        </p:nvSpPr>
-        <p:spPr>
-          <a:xfrm>
-            <a:off x="6368796" y="1920240"/>
-            <a:ext cx="914400" cy="548640"/>
-          </a:xfrm>
-          <a:prstGeom prst="rect">
-            <a:avLst/>
-          </a:prstGeom>
-          <a:noFill/>
-          <a:ln/>
-        </p:spPr>
-        <p:txBody>
-          <a:bodyPr wrap="square" lIns="0" tIns="0" rIns="0" bIns="0" rtlCol="0" anchor="ctr"/>
-          <a:lstStyle/>
-          <a:p>
-            <a:pPr indent="0" marL="0">
-              <a:buNone/>
-            </a:pPr>
-            <a:r>
-              <a:rPr lang="en-US" sz="3000" dirty="0">
-                <a:solidFill>
-                  <a:srgbClr val="A3C1AD"/>
-                </a:solidFill>
-                <a:latin typeface="Georgia" pitchFamily="34" charset="0"/>
-                <a:ea typeface="Georgia" pitchFamily="34" charset="-122"/>
-                <a:cs typeface="Georgia" pitchFamily="34" charset="-120"/>
-              </a:rPr>
-              <a:t>02</a:t>
-            </a:r>
-            <a:endParaRPr lang="en-US" sz="3000" dirty="0"/>
-          </a:p>
-        </p:txBody>
-      </p:sp>
-      <p:sp>
-        <p:nvSpPr>
-          <p:cNvPr id="10" name="Text 8"/>
-          <p:cNvSpPr/>
-          <p:nvPr/>
-        </p:nvSpPr>
-        <p:spPr>
-          <a:xfrm>
-            <a:off x="7283196" y="1938528"/>
-            <a:ext cx="4082796" cy="457200"/>
-          </a:xfrm>
-          <a:prstGeom prst="rect">
-            <a:avLst/>
-          </a:prstGeom>
-          <a:noFill/>
-          <a:ln/>
-        </p:spPr>
-        <p:txBody>
-          <a:bodyPr wrap="square" lIns="0" tIns="0" rIns="0" bIns="0" rtlCol="0" anchor="ctr"/>
-          <a:lstStyle/>
-          <a:p>
-            <a:pPr indent="0" marL="0">
-              <a:buNone/>
-            </a:pPr>
-            <a:r>
-              <a:rPr lang="en-US" sz="2300" dirty="0">
-                <a:solidFill>
-                  <a:srgbClr val="4A6B5D"/>
-                </a:solidFill>
-                <a:latin typeface="Georgia" pitchFamily="34" charset="0"/>
-                <a:ea typeface="Georgia" pitchFamily="34" charset="-122"/>
-                <a:cs typeface="Georgia" pitchFamily="34" charset="-120"/>
-              </a:rPr>
-              <a:t>What varies</a:t>
-            </a:r>
-            <a:endParaRPr lang="en-US" sz="2300" dirty="0"/>
-          </a:p>
-        </p:txBody>
-      </p:sp>
-      <p:sp>
-        <p:nvSpPr>
-          <p:cNvPr id="11" name="Text 9"/>
-          <p:cNvSpPr/>
-          <p:nvPr/>
-        </p:nvSpPr>
-        <p:spPr>
-          <a:xfrm>
-            <a:off x="7283196" y="2468880"/>
-            <a:ext cx="4082796" cy="1188720"/>
-          </a:xfrm>
-          <a:prstGeom prst="rect">
-            <a:avLst/>
-          </a:prstGeom>
-          <a:noFill/>
-          <a:ln/>
-        </p:spPr>
-        <p:txBody>
-          <a:bodyPr wrap="square" lIns="0" tIns="0" rIns="0" bIns="0" rtlCol="0" anchor="t"/>
-          <a:lstStyle/>
-          <a:p>
-            <a:pPr indent="0" marL="0">
-              <a:lnSpc>
-                <a:spcPts val="2100"/>
-              </a:lnSpc>
-              <a:buNone/>
-            </a:pPr>
-            <a:r>
-              <a:rPr lang="en-US" sz="1550" dirty="0">
-                <a:solidFill>
-                  <a:srgbClr val="24313F"/>
-                </a:solidFill>
-                <a:latin typeface="Georgia" pitchFamily="34" charset="0"/>
-                <a:ea typeface="Georgia" pitchFamily="34" charset="-122"/>
-                <a:cs typeface="Georgia" pitchFamily="34" charset="-120"/>
-              </a:rPr>
-              <a:t>The difference this instance offers: the reason to watch this one.</a:t>
-            </a:r>
-            <a:endParaRPr lang="en-US" sz="1550" dirty="0"/>
-          </a:p>
-        </p:txBody>
-      </p:sp>
-      <p:sp>
-        <p:nvSpPr>
-          <p:cNvPr id="12" name="Text 10"/>
-          <p:cNvSpPr/>
-          <p:nvPr/>
-        </p:nvSpPr>
-        <p:spPr>
-          <a:xfrm>
-            <a:off x="822960" y="4114800"/>
-            <a:ext cx="914400" cy="548640"/>
-          </a:xfrm>
-          <a:prstGeom prst="rect">
-            <a:avLst/>
-          </a:prstGeom>
-          <a:noFill/>
-          <a:ln/>
-        </p:spPr>
-        <p:txBody>
-          <a:bodyPr wrap="square" lIns="0" tIns="0" rIns="0" bIns="0" rtlCol="0" anchor="ctr"/>
-          <a:lstStyle/>
-          <a:p>
-            <a:pPr indent="0" marL="0">
-              <a:buNone/>
-            </a:pPr>
-            <a:r>
-              <a:rPr lang="en-US" sz="3000" dirty="0">
-                <a:solidFill>
-                  <a:srgbClr val="A3C1AD"/>
-                </a:solidFill>
-                <a:latin typeface="Georgia" pitchFamily="34" charset="0"/>
-                <a:ea typeface="Georgia" pitchFamily="34" charset="-122"/>
-                <a:cs typeface="Georgia" pitchFamily="34" charset="-120"/>
-              </a:rPr>
-              <a:t>03</a:t>
-            </a:r>
-            <a:endParaRPr lang="en-US" sz="3000" dirty="0"/>
-          </a:p>
-        </p:txBody>
-      </p:sp>
-      <p:sp>
-        <p:nvSpPr>
-          <p:cNvPr id="13" name="Text 11"/>
-          <p:cNvSpPr/>
-          <p:nvPr/>
-        </p:nvSpPr>
-        <p:spPr>
-          <a:xfrm>
-            <a:off x="1737360" y="4133088"/>
-            <a:ext cx="4082796" cy="457200"/>
-          </a:xfrm>
-          <a:prstGeom prst="rect">
-            <a:avLst/>
-          </a:prstGeom>
-          <a:noFill/>
-          <a:ln/>
-        </p:spPr>
-        <p:txBody>
-          <a:bodyPr wrap="square" lIns="0" tIns="0" rIns="0" bIns="0" rtlCol="0" anchor="ctr"/>
-          <a:lstStyle/>
-          <a:p>
-            <a:pPr indent="0" marL="0">
-              <a:buNone/>
-            </a:pPr>
-            <a:r>
-              <a:rPr lang="en-US" sz="2300" dirty="0">
-                <a:solidFill>
-                  <a:srgbClr val="4A6B5D"/>
-                </a:solidFill>
-                <a:latin typeface="Georgia" pitchFamily="34" charset="0"/>
-                <a:ea typeface="Georgia" pitchFamily="34" charset="-122"/>
-                <a:cs typeface="Georgia" pitchFamily="34" charset="-120"/>
-              </a:rPr>
-              <a:t>Who profits</a:t>
-            </a:r>
-            <a:endParaRPr lang="en-US" sz="2300" dirty="0"/>
-          </a:p>
-        </p:txBody>
-      </p:sp>
-      <p:sp>
-        <p:nvSpPr>
-          <p:cNvPr id="14" name="Text 12"/>
-          <p:cNvSpPr/>
-          <p:nvPr/>
-        </p:nvSpPr>
-        <p:spPr>
-          <a:xfrm>
-            <a:off x="1737360" y="4663440"/>
-            <a:ext cx="4082796" cy="1188720"/>
-          </a:xfrm>
-          <a:prstGeom prst="rect">
-            <a:avLst/>
-          </a:prstGeom>
-          <a:noFill/>
-          <a:ln/>
-        </p:spPr>
-        <p:txBody>
-          <a:bodyPr wrap="square" lIns="0" tIns="0" rIns="0" bIns="0" rtlCol="0" anchor="t"/>
-          <a:lstStyle/>
-          <a:p>
-            <a:pPr indent="0" marL="0">
-              <a:lnSpc>
-                <a:spcPts val="2100"/>
-              </a:lnSpc>
-              <a:buNone/>
-            </a:pPr>
-            <a:r>
-              <a:rPr lang="en-US" sz="1550" dirty="0">
-                <a:solidFill>
-                  <a:srgbClr val="24313F"/>
-                </a:solidFill>
-                <a:latin typeface="Georgia" pitchFamily="34" charset="0"/>
-                <a:ea typeface="Georgia" pitchFamily="34" charset="-122"/>
-                <a:cs typeface="Georgia" pitchFamily="34" charset="-120"/>
-              </a:rPr>
-              <a:t>Who banks on the repetition: the studio, the platform, the franchise.</a:t>
-            </a:r>
-            <a:endParaRPr lang="en-US" sz="1550" dirty="0"/>
-          </a:p>
-        </p:txBody>
-      </p:sp>
-      <p:sp>
-        <p:nvSpPr>
-          <p:cNvPr id="15" name="Text 13"/>
-          <p:cNvSpPr/>
-          <p:nvPr/>
-        </p:nvSpPr>
-        <p:spPr>
-          <a:xfrm>
-            <a:off x="6368796" y="4114800"/>
-            <a:ext cx="914400" cy="548640"/>
-          </a:xfrm>
-          <a:prstGeom prst="rect">
-            <a:avLst/>
-          </a:prstGeom>
-          <a:noFill/>
-          <a:ln/>
-        </p:spPr>
-        <p:txBody>
-          <a:bodyPr wrap="square" lIns="0" tIns="0" rIns="0" bIns="0" rtlCol="0" anchor="ctr"/>
-          <a:lstStyle/>
-          <a:p>
-            <a:pPr indent="0" marL="0">
-              <a:buNone/>
-            </a:pPr>
-            <a:r>
-              <a:rPr lang="en-US" sz="3000" dirty="0">
-                <a:solidFill>
-                  <a:srgbClr val="A3C1AD"/>
-                </a:solidFill>
-                <a:latin typeface="Georgia" pitchFamily="34" charset="0"/>
-                <a:ea typeface="Georgia" pitchFamily="34" charset="-122"/>
-                <a:cs typeface="Georgia" pitchFamily="34" charset="-120"/>
-              </a:rPr>
-              <a:t>04</a:t>
-            </a:r>
-            <a:endParaRPr lang="en-US" sz="3000" dirty="0"/>
-          </a:p>
-        </p:txBody>
-      </p:sp>
-      <p:sp>
-        <p:nvSpPr>
-          <p:cNvPr id="16" name="Text 14"/>
-          <p:cNvSpPr/>
-          <p:nvPr/>
-        </p:nvSpPr>
-        <p:spPr>
-          <a:xfrm>
-            <a:off x="7283196" y="4133088"/>
-            <a:ext cx="4082796" cy="457200"/>
-          </a:xfrm>
-          <a:prstGeom prst="rect">
-            <a:avLst/>
-          </a:prstGeom>
-          <a:noFill/>
-          <a:ln/>
-        </p:spPr>
-        <p:txBody>
-          <a:bodyPr wrap="square" lIns="0" tIns="0" rIns="0" bIns="0" rtlCol="0" anchor="ctr"/>
-          <a:lstStyle/>
-          <a:p>
-            <a:pPr indent="0" marL="0">
-              <a:buNone/>
-            </a:pPr>
-            <a:r>
-              <a:rPr lang="en-US" sz="2300" dirty="0">
-                <a:solidFill>
-                  <a:srgbClr val="4A6B5D"/>
-                </a:solidFill>
-                <a:latin typeface="Georgia" pitchFamily="34" charset="0"/>
-                <a:ea typeface="Georgia" pitchFamily="34" charset="-122"/>
-                <a:cs typeface="Georgia" pitchFamily="34" charset="-120"/>
-              </a:rPr>
-              <a:t>What is promised</a:t>
-            </a:r>
-            <a:endParaRPr lang="en-US" sz="2300" dirty="0"/>
-          </a:p>
-        </p:txBody>
-      </p:sp>
-      <p:sp>
-        <p:nvSpPr>
-          <p:cNvPr id="17" name="Text 15"/>
-          <p:cNvSpPr/>
-          <p:nvPr/>
-        </p:nvSpPr>
-        <p:spPr>
-          <a:xfrm>
-            <a:off x="7283196" y="4663440"/>
-            <a:ext cx="4082796" cy="1188720"/>
-          </a:xfrm>
-          <a:prstGeom prst="rect">
-            <a:avLst/>
-          </a:prstGeom>
-          <a:noFill/>
-          <a:ln/>
-        </p:spPr>
-        <p:txBody>
-          <a:bodyPr wrap="square" lIns="0" tIns="0" rIns="0" bIns="0" rtlCol="0" anchor="t"/>
-          <a:lstStyle/>
-          <a:p>
-            <a:pPr indent="0" marL="0">
-              <a:lnSpc>
-                <a:spcPts val="2100"/>
-              </a:lnSpc>
-              <a:buNone/>
-            </a:pPr>
-            <a:r>
-              <a:rPr lang="en-US" sz="1550" dirty="0">
-                <a:solidFill>
-                  <a:srgbClr val="24313F"/>
-                </a:solidFill>
-                <a:latin typeface="Georgia" pitchFamily="34" charset="0"/>
-                <a:ea typeface="Georgia" pitchFamily="34" charset="-122"/>
-                <a:cs typeface="Georgia" pitchFamily="34" charset="-120"/>
-              </a:rPr>
-              <a:t>The pleasure the audience is being sold: fear, romance, awe, comfort.</a:t>
-            </a:r>
-            <a:endParaRPr lang="en-US" sz="1550" dirty="0"/>
-          </a:p>
-        </p:txBody>
-      </p:sp>
-      <p:sp>
-        <p:nvSpPr>
-          <p:cNvPr id="18" name="Shape 16"/>
-          <p:cNvSpPr/>
-          <p:nvPr/>
-        </p:nvSpPr>
-        <p:spPr>
-          <a:xfrm>
-            <a:off x="822960" y="6382512"/>
-            <a:ext cx="10543032" cy="0"/>
-          </a:xfrm>
-          <a:prstGeom prst="line">
-            <a:avLst/>
-          </a:prstGeom>
-          <a:noFill/>
+          <p:cNvPr id="5" name="Shape 3"/>
+          <p:cNvSpPr/>
+          <p:nvPr/>
+        </p:nvSpPr>
+        <p:spPr>
+          <a:xfrm>
+            <a:off x="822960" y="1097280"/>
+            <a:ext cx="3270504" cy="4206240"/>
+          </a:xfrm>
+          <a:prstGeom prst="rect">
+            <a:avLst/>
+          </a:prstGeom>
+          <a:solidFill>
+            <a:srgbClr val="FAF8F1"/>
+          </a:solidFill>
           <a:ln w="9525">
             <a:solidFill>
               <a:srgbClr val="D9D4C4"/>
@@ -4171,32 +5559,154 @@
           </a:ln>
         </p:spPr>
       </p:sp>
-      <p:sp>
-        <p:nvSpPr>
-          <p:cNvPr id="19" name="Text 17"/>
-          <p:cNvSpPr/>
-          <p:nvPr/>
-        </p:nvSpPr>
-        <p:spPr>
-          <a:xfrm>
-            <a:off x="822960" y="6419088"/>
-            <a:ext cx="7315200" cy="274320"/>
-          </a:xfrm>
-          <a:prstGeom prst="rect">
-            <a:avLst/>
-          </a:prstGeom>
-          <a:noFill/>
-          <a:ln/>
-        </p:spPr>
-        <p:txBody>
-          <a:bodyPr wrap="square" lIns="0" tIns="0" rIns="0" bIns="0" rtlCol="0" anchor="ctr"/>
-          <a:lstStyle/>
-          <a:p>
-            <a:pPr indent="0" marL="0">
-              <a:buNone/>
-            </a:pPr>
-            <a:r>
-              <a:rPr lang="en-US" sz="900" spc="150" kern="0" dirty="0">
+      <p:pic>
+        <p:nvPicPr>
+          <p:cNvPr id="6" name="Image 0" descr="/Users/dogan/Documents/Vaults/Courses/wiki/classes/media-studies/decks/_build/img/poster-scream1.jpg">    </p:cNvPr>
+          <p:cNvPicPr>
+            <a:picLocks noChangeAspect="1"/>
+          </p:cNvPicPr>
+          <p:nvPr/>
+        </p:nvPicPr>
+        <p:blipFill>
+          <a:blip r:embed="rId1"/>
+          <a:stretch>
+            <a:fillRect/>
+          </a:stretch>
+        </p:blipFill>
+        <p:spPr>
+          <a:xfrm>
+            <a:off x="1094074" y="1170432"/>
+            <a:ext cx="2728277" cy="4059936"/>
+          </a:xfrm>
+          <a:prstGeom prst="rect">
+            <a:avLst/>
+          </a:prstGeom>
+        </p:spPr>
+      </p:pic>
+      <p:sp>
+        <p:nvSpPr>
+          <p:cNvPr id="7" name="Shape 4"/>
+          <p:cNvSpPr/>
+          <p:nvPr/>
+        </p:nvSpPr>
+        <p:spPr>
+          <a:xfrm>
+            <a:off x="4459224" y="1097280"/>
+            <a:ext cx="3270504" cy="4206240"/>
+          </a:xfrm>
+          <a:prstGeom prst="rect">
+            <a:avLst/>
+          </a:prstGeom>
+          <a:solidFill>
+            <a:srgbClr val="FAF8F1"/>
+          </a:solidFill>
+          <a:ln w="9525">
+            <a:solidFill>
+              <a:srgbClr val="D9D4C4"/>
+            </a:solidFill>
+            <a:prstDash val="solid"/>
+          </a:ln>
+        </p:spPr>
+      </p:sp>
+      <p:pic>
+        <p:nvPicPr>
+          <p:cNvPr id="8" name="Image 1" descr="/Users/dogan/Documents/Vaults/Courses/wiki/classes/media-studies/decks/_build/img/poster-scream2.jpg">    </p:cNvPr>
+          <p:cNvPicPr>
+            <a:picLocks noChangeAspect="1"/>
+          </p:cNvPicPr>
+          <p:nvPr/>
+        </p:nvPicPr>
+        <p:blipFill>
+          <a:blip r:embed="rId2"/>
+          <a:stretch>
+            <a:fillRect/>
+          </a:stretch>
+        </p:blipFill>
+        <p:spPr>
+          <a:xfrm>
+            <a:off x="4722218" y="1170432"/>
+            <a:ext cx="2744517" cy="4059936"/>
+          </a:xfrm>
+          <a:prstGeom prst="rect">
+            <a:avLst/>
+          </a:prstGeom>
+        </p:spPr>
+      </p:pic>
+      <p:sp>
+        <p:nvSpPr>
+          <p:cNvPr id="9" name="Shape 5"/>
+          <p:cNvSpPr/>
+          <p:nvPr/>
+        </p:nvSpPr>
+        <p:spPr>
+          <a:xfrm>
+            <a:off x="8095488" y="1097280"/>
+            <a:ext cx="3270504" cy="4206240"/>
+          </a:xfrm>
+          <a:prstGeom prst="rect">
+            <a:avLst/>
+          </a:prstGeom>
+          <a:solidFill>
+            <a:srgbClr val="FAF8F1"/>
+          </a:solidFill>
+          <a:ln w="9525">
+            <a:solidFill>
+              <a:srgbClr val="D9D4C4"/>
+            </a:solidFill>
+            <a:prstDash val="solid"/>
+          </a:ln>
+        </p:spPr>
+      </p:sp>
+      <p:pic>
+        <p:nvPicPr>
+          <p:cNvPr id="10" name="Image 2" descr="/Users/dogan/Documents/Vaults/Courses/wiki/classes/media-studies/decks/_build/img/poster-scream3.jpg">    </p:cNvPr>
+          <p:cNvPicPr>
+            <a:picLocks noChangeAspect="1"/>
+          </p:cNvPicPr>
+          <p:nvPr/>
+        </p:nvPicPr>
+        <p:blipFill>
+          <a:blip r:embed="rId3"/>
+          <a:stretch>
+            <a:fillRect/>
+          </a:stretch>
+        </p:blipFill>
+        <p:spPr>
+          <a:xfrm>
+            <a:off x="8377428" y="1170432"/>
+            <a:ext cx="2706624" cy="4059936"/>
+          </a:xfrm>
+          <a:prstGeom prst="rect">
+            <a:avLst/>
+          </a:prstGeom>
+        </p:spPr>
+      </p:pic>
+      <p:sp>
+        <p:nvSpPr>
+          <p:cNvPr id="11" name="Text 6"/>
+          <p:cNvSpPr/>
+          <p:nvPr/>
+        </p:nvSpPr>
+        <p:spPr>
+          <a:xfrm>
+            <a:off x="822960" y="5349240"/>
+            <a:ext cx="10543032" cy="274320"/>
+          </a:xfrm>
+          <a:prstGeom prst="rect">
+            <a:avLst/>
+          </a:prstGeom>
+          <a:noFill/>
+          <a:ln/>
+        </p:spPr>
+        <p:txBody>
+          <a:bodyPr wrap="square" lIns="0" tIns="0" rIns="0" bIns="0" rtlCol="0" anchor="ctr"/>
+          <a:lstStyle/>
+          <a:p>
+            <a:pPr algn="ctr" indent="0" marL="0">
+              <a:buNone/>
+            </a:pPr>
+            <a:r>
+              <a:rPr lang="en-US" sz="1000" dirty="0">
                 <a:solidFill>
                   <a:srgbClr val="7A7F72"/>
                 </a:solidFill>
@@ -4204,6 +5714,133 @@
                 <a:ea typeface="Arial" pitchFamily="34" charset="-122"/>
                 <a:cs typeface="Arial" pitchFamily="34" charset="-120"/>
               </a:rPr>
+              <a:t>Scream (1996), Scream 2 (1997), Scream 3 (2000): one-sheets</a:t>
+            </a:r>
+            <a:endParaRPr lang="en-US" sz="1000" dirty="0"/>
+          </a:p>
+        </p:txBody>
+      </p:sp>
+      <p:sp>
+        <p:nvSpPr>
+          <p:cNvPr id="12" name="Shape 7"/>
+          <p:cNvSpPr/>
+          <p:nvPr/>
+        </p:nvSpPr>
+        <p:spPr>
+          <a:xfrm>
+            <a:off x="822960" y="5715000"/>
+            <a:ext cx="914400" cy="0"/>
+          </a:xfrm>
+          <a:prstGeom prst="line">
+            <a:avLst/>
+          </a:prstGeom>
+          <a:noFill/>
+          <a:ln w="31750">
+            <a:solidFill>
+              <a:srgbClr val="8C3A38"/>
+            </a:solidFill>
+            <a:prstDash val="solid"/>
+          </a:ln>
+        </p:spPr>
+      </p:sp>
+      <p:sp>
+        <p:nvSpPr>
+          <p:cNvPr id="13" name="Text 8"/>
+          <p:cNvSpPr/>
+          <p:nvPr/>
+        </p:nvSpPr>
+        <p:spPr>
+          <a:xfrm>
+            <a:off x="822960" y="5852160"/>
+            <a:ext cx="10543032" cy="457200"/>
+          </a:xfrm>
+          <a:prstGeom prst="rect">
+            <a:avLst/>
+          </a:prstGeom>
+          <a:noFill/>
+          <a:ln/>
+        </p:spPr>
+        <p:txBody>
+          <a:bodyPr wrap="square" lIns="0" tIns="0" rIns="0" bIns="0" rtlCol="0" anchor="t"/>
+          <a:lstStyle/>
+          <a:p>
+            <a:pPr indent="0" marL="0">
+              <a:lnSpc>
+                <a:spcPts val="1700"/>
+              </a:lnSpc>
+              <a:buNone/>
+            </a:pPr>
+            <a:r>
+              <a:rPr lang="en-US" sz="1300" i="1" dirty="0">
+                <a:solidFill>
+                  <a:srgbClr val="4A6B5D"/>
+                </a:solidFill>
+                <a:latin typeface="Georgia" pitchFamily="34" charset="0"/>
+                <a:ea typeface="Georgia" pitchFamily="34" charset="-122"/>
+                <a:cs typeface="Georgia" pitchFamily="34" charset="-120"/>
+              </a:rPr>
+              <a:t>Same mask, same type, same faces arranged the same way: the repetition is the promise. The number is the difference, and the difference is what sells the ticket twice more. Neale's economy of genre, in three posters.</a:t>
+            </a:r>
+            <a:endParaRPr lang="en-US" sz="1300" dirty="0"/>
+          </a:p>
+        </p:txBody>
+      </p:sp>
+      <p:sp>
+        <p:nvSpPr>
+          <p:cNvPr id="14" name="Shape 9"/>
+          <p:cNvSpPr/>
+          <p:nvPr/>
+        </p:nvSpPr>
+        <p:spPr>
+          <a:xfrm>
+            <a:off x="822960" y="6382512"/>
+            <a:ext cx="10543032" cy="0"/>
+          </a:xfrm>
+          <a:prstGeom prst="line">
+            <a:avLst/>
+          </a:prstGeom>
+          <a:noFill/>
+          <a:ln w="9525">
+            <a:solidFill>
+              <a:srgbClr val="D9D4C4"/>
+            </a:solidFill>
+            <a:prstDash val="solid"/>
+          </a:ln>
+        </p:spPr>
+      </p:sp>
+      <p:sp>
+        <p:nvSpPr>
+          <p:cNvPr id="15" name="Text 10"/>
+          <p:cNvSpPr/>
+          <p:nvPr/>
+        </p:nvSpPr>
+        <p:spPr>
+          <a:xfrm>
+            <a:off x="822960" y="6419088"/>
+            <a:ext cx="7315200" cy="274320"/>
+          </a:xfrm>
+          <a:prstGeom prst="rect">
+            <a:avLst/>
+          </a:prstGeom>
+          <a:noFill/>
+          <a:ln/>
+        </p:spPr>
+        <p:txBody>
+          <a:bodyPr wrap="square" lIns="0" tIns="0" rIns="0" bIns="0" rtlCol="0" anchor="ctr"/>
+          <a:lstStyle/>
+          <a:p>
+            <a:pPr indent="0" marL="0">
+              <a:buNone/>
+            </a:pPr>
+            <a:r>
+              <a:rPr lang="en-US" sz="900" spc="150" kern="0" dirty="0">
+                <a:solidFill>
+                  <a:srgbClr val="7A7F72"/>
+                </a:solidFill>
+                <a:latin typeface="Arial" pitchFamily="34" charset="0"/>
+                <a:ea typeface="Arial" pitchFamily="34" charset="-122"/>
+                <a:cs typeface="Arial" pitchFamily="34" charset="-120"/>
+              </a:rPr>
               <a:t>MEDIA STUDIES 9607 · SEMESTER I</a:t>
             </a:r>
             <a:endParaRPr lang="en-US" sz="900" dirty="0"/>
@@ -4212,7 +5849,7 @@
       </p:sp>
       <p:sp>
         <p:nvSpPr>
-          <p:cNvPr id="20" name="Text 18"/>
+          <p:cNvPr id="16" name="Text 11"/>
           <p:cNvSpPr/>
           <p:nvPr/>
         </p:nvSpPr>
@@ -4260,6 +5897,759 @@
 <file path=ppt/slides/slide7.xml><?xml version="1.0" encoding="utf-8"?>
 <p:sld xmlns:a="http://schemas.openxmlformats.org/drawingml/2006/main" xmlns:r="http://schemas.openxmlformats.org/officeDocument/2006/relationships" xmlns:p="http://schemas.openxmlformats.org/presentationml/2006/main">
   <p:cSld name="Slide 7">
+    <p:bg>
+      <p:bgPr>
+        <a:solidFill>
+          <a:srgbClr val="FAF8F1"/>
+        </a:solidFill>
+      </p:bgPr>
+    </p:bg>
+    <p:spTree>
+      <p:nvGrpSpPr>
+        <p:cNvPr id="1" name=""/>
+        <p:cNvGrpSpPr/>
+        <p:nvPr/>
+      </p:nvGrpSpPr>
+      <p:grpSpPr>
+        <a:xfrm>
+          <a:off x="0" y="0"/>
+          <a:ext cx="0" cy="0"/>
+          <a:chOff x="0" y="0"/>
+          <a:chExt cx="0" cy="0"/>
+        </a:xfrm>
+      </p:grpSpPr>
+      <p:sp>
+        <p:nvSpPr>
+          <p:cNvPr id="2" name="Text 0"/>
+          <p:cNvSpPr/>
+          <p:nvPr/>
+        </p:nvSpPr>
+        <p:spPr>
+          <a:xfrm>
+            <a:off x="822960" y="457200"/>
+            <a:ext cx="6400800" cy="274320"/>
+          </a:xfrm>
+          <a:prstGeom prst="rect">
+            <a:avLst/>
+          </a:prstGeom>
+          <a:noFill/>
+          <a:ln/>
+        </p:spPr>
+        <p:txBody>
+          <a:bodyPr wrap="square" lIns="0" tIns="0" rIns="0" bIns="0" rtlCol="0" anchor="ctr"/>
+          <a:lstStyle/>
+          <a:p>
+            <a:pPr algn="l" indent="0" marL="0">
+              <a:buNone/>
+            </a:pPr>
+            <a:r>
+              <a:rPr lang="en-US" sz="1100" b="1" spc="250" kern="0" dirty="0">
+                <a:solidFill>
+                  <a:srgbClr val="4A6B5D"/>
+                </a:solidFill>
+                <a:latin typeface="Arial" pitchFamily="34" charset="0"/>
+                <a:ea typeface="Arial" pitchFamily="34" charset="-122"/>
+                <a:cs typeface="Arial" pitchFamily="34" charset="-120"/>
+              </a:rPr>
+              <a:t>MAP A GENRE YOU KNOW</a:t>
+            </a:r>
+            <a:endParaRPr lang="en-US" sz="1100" dirty="0"/>
+          </a:p>
+        </p:txBody>
+      </p:sp>
+      <p:sp>
+        <p:nvSpPr>
+          <p:cNvPr id="3" name="Text 1"/>
+          <p:cNvSpPr/>
+          <p:nvPr/>
+        </p:nvSpPr>
+        <p:spPr>
+          <a:xfrm>
+            <a:off x="6793992" y="457200"/>
+            <a:ext cx="4572000" cy="274320"/>
+          </a:xfrm>
+          <a:prstGeom prst="rect">
+            <a:avLst/>
+          </a:prstGeom>
+          <a:noFill/>
+          <a:ln/>
+        </p:spPr>
+        <p:txBody>
+          <a:bodyPr wrap="square" lIns="0" tIns="0" rIns="0" bIns="0" rtlCol="0" anchor="ctr"/>
+          <a:lstStyle/>
+          <a:p>
+            <a:pPr algn="r" indent="0" marL="0">
+              <a:buNone/>
+            </a:pPr>
+            <a:r>
+              <a:rPr lang="en-US" sz="1100" b="1" spc="250" kern="0" dirty="0">
+                <a:solidFill>
+                  <a:srgbClr val="7A7F72"/>
+                </a:solidFill>
+                <a:latin typeface="Arial" pitchFamily="34" charset="0"/>
+                <a:ea typeface="Arial" pitchFamily="34" charset="-122"/>
+                <a:cs typeface="Arial" pitchFamily="34" charset="-120"/>
+              </a:rPr>
+              <a:t>HORROR, CRIME DRAMA, SITCOM, DOCUMENTARY</a:t>
+            </a:r>
+            <a:endParaRPr lang="en-US" sz="1100" dirty="0"/>
+          </a:p>
+        </p:txBody>
+      </p:sp>
+      <p:sp>
+        <p:nvSpPr>
+          <p:cNvPr id="4" name="Shape 2"/>
+          <p:cNvSpPr/>
+          <p:nvPr/>
+        </p:nvSpPr>
+        <p:spPr>
+          <a:xfrm>
+            <a:off x="822960" y="786384"/>
+            <a:ext cx="10543032" cy="0"/>
+          </a:xfrm>
+          <a:prstGeom prst="line">
+            <a:avLst/>
+          </a:prstGeom>
+          <a:noFill/>
+          <a:ln w="9525">
+            <a:solidFill>
+              <a:srgbClr val="D9D4C4"/>
+            </a:solidFill>
+            <a:prstDash val="solid"/>
+          </a:ln>
+        </p:spPr>
+      </p:sp>
+      <p:sp>
+        <p:nvSpPr>
+          <p:cNvPr id="5" name="Text 3"/>
+          <p:cNvSpPr/>
+          <p:nvPr/>
+        </p:nvSpPr>
+        <p:spPr>
+          <a:xfrm>
+            <a:off x="822960" y="932688"/>
+            <a:ext cx="10543032" cy="640080"/>
+          </a:xfrm>
+          <a:prstGeom prst="rect">
+            <a:avLst/>
+          </a:prstGeom>
+          <a:noFill/>
+          <a:ln/>
+        </p:spPr>
+        <p:txBody>
+          <a:bodyPr wrap="square" lIns="0" tIns="0" rIns="0" bIns="0" rtlCol="0" anchor="ctr"/>
+          <a:lstStyle/>
+          <a:p>
+            <a:pPr indent="0" marL="0">
+              <a:buNone/>
+            </a:pPr>
+            <a:r>
+              <a:rPr lang="en-US" sz="3200" dirty="0">
+                <a:solidFill>
+                  <a:srgbClr val="24313F"/>
+                </a:solidFill>
+                <a:latin typeface="Georgia" pitchFamily="34" charset="0"/>
+                <a:ea typeface="Georgia" pitchFamily="34" charset="-122"/>
+                <a:cs typeface="Georgia" pitchFamily="34" charset="-120"/>
+              </a:rPr>
+              <a:t>Four questions of the contract</a:t>
+            </a:r>
+            <a:endParaRPr lang="en-US" sz="3200" dirty="0"/>
+          </a:p>
+        </p:txBody>
+      </p:sp>
+      <p:sp>
+        <p:nvSpPr>
+          <p:cNvPr id="6" name="Text 4"/>
+          <p:cNvSpPr/>
+          <p:nvPr/>
+        </p:nvSpPr>
+        <p:spPr>
+          <a:xfrm>
+            <a:off x="822960" y="1920240"/>
+            <a:ext cx="914400" cy="548640"/>
+          </a:xfrm>
+          <a:prstGeom prst="rect">
+            <a:avLst/>
+          </a:prstGeom>
+          <a:noFill/>
+          <a:ln/>
+        </p:spPr>
+        <p:txBody>
+          <a:bodyPr wrap="square" lIns="0" tIns="0" rIns="0" bIns="0" rtlCol="0" anchor="ctr"/>
+          <a:lstStyle/>
+          <a:p>
+            <a:pPr indent="0" marL="0">
+              <a:buNone/>
+            </a:pPr>
+            <a:r>
+              <a:rPr lang="en-US" sz="3000" dirty="0">
+                <a:solidFill>
+                  <a:srgbClr val="A3C1AD"/>
+                </a:solidFill>
+                <a:latin typeface="Georgia" pitchFamily="34" charset="0"/>
+                <a:ea typeface="Georgia" pitchFamily="34" charset="-122"/>
+                <a:cs typeface="Georgia" pitchFamily="34" charset="-120"/>
+              </a:rPr>
+              <a:t>01</a:t>
+            </a:r>
+            <a:endParaRPr lang="en-US" sz="3000" dirty="0"/>
+          </a:p>
+        </p:txBody>
+      </p:sp>
+      <p:sp>
+        <p:nvSpPr>
+          <p:cNvPr id="7" name="Text 5"/>
+          <p:cNvSpPr/>
+          <p:nvPr/>
+        </p:nvSpPr>
+        <p:spPr>
+          <a:xfrm>
+            <a:off x="1737360" y="1938528"/>
+            <a:ext cx="4082796" cy="457200"/>
+          </a:xfrm>
+          <a:prstGeom prst="rect">
+            <a:avLst/>
+          </a:prstGeom>
+          <a:noFill/>
+          <a:ln/>
+        </p:spPr>
+        <p:txBody>
+          <a:bodyPr wrap="square" lIns="0" tIns="0" rIns="0" bIns="0" rtlCol="0" anchor="ctr"/>
+          <a:lstStyle/>
+          <a:p>
+            <a:pPr indent="0" marL="0">
+              <a:buNone/>
+            </a:pPr>
+            <a:r>
+              <a:rPr lang="en-US" sz="2300" dirty="0">
+                <a:solidFill>
+                  <a:srgbClr val="4A6B5D"/>
+                </a:solidFill>
+                <a:latin typeface="Georgia" pitchFamily="34" charset="0"/>
+                <a:ea typeface="Georgia" pitchFamily="34" charset="-122"/>
+                <a:cs typeface="Georgia" pitchFamily="34" charset="-120"/>
+              </a:rPr>
+              <a:t>What repeats</a:t>
+            </a:r>
+            <a:endParaRPr lang="en-US" sz="2300" dirty="0"/>
+          </a:p>
+        </p:txBody>
+      </p:sp>
+      <p:sp>
+        <p:nvSpPr>
+          <p:cNvPr id="8" name="Text 6"/>
+          <p:cNvSpPr/>
+          <p:nvPr/>
+        </p:nvSpPr>
+        <p:spPr>
+          <a:xfrm>
+            <a:off x="1737360" y="2468880"/>
+            <a:ext cx="4082796" cy="1188720"/>
+          </a:xfrm>
+          <a:prstGeom prst="rect">
+            <a:avLst/>
+          </a:prstGeom>
+          <a:noFill/>
+          <a:ln/>
+        </p:spPr>
+        <p:txBody>
+          <a:bodyPr wrap="square" lIns="0" tIns="0" rIns="0" bIns="0" rtlCol="0" anchor="t"/>
+          <a:lstStyle/>
+          <a:p>
+            <a:pPr indent="0" marL="0">
+              <a:lnSpc>
+                <a:spcPts val="2100"/>
+              </a:lnSpc>
+              <a:buNone/>
+            </a:pPr>
+            <a:r>
+              <a:rPr lang="en-US" sz="1550" dirty="0">
+                <a:solidFill>
+                  <a:srgbClr val="24313F"/>
+                </a:solidFill>
+                <a:latin typeface="Georgia" pitchFamily="34" charset="0"/>
+                <a:ea typeface="Georgia" pitchFamily="34" charset="-122"/>
+                <a:cs typeface="Georgia" pitchFamily="34" charset="-120"/>
+              </a:rPr>
+              <a:t>The conventions the audience expects and would miss if absent.</a:t>
+            </a:r>
+            <a:endParaRPr lang="en-US" sz="1550" dirty="0"/>
+          </a:p>
+        </p:txBody>
+      </p:sp>
+      <p:sp>
+        <p:nvSpPr>
+          <p:cNvPr id="9" name="Text 7"/>
+          <p:cNvSpPr/>
+          <p:nvPr/>
+        </p:nvSpPr>
+        <p:spPr>
+          <a:xfrm>
+            <a:off x="6368796" y="1920240"/>
+            <a:ext cx="914400" cy="548640"/>
+          </a:xfrm>
+          <a:prstGeom prst="rect">
+            <a:avLst/>
+          </a:prstGeom>
+          <a:noFill/>
+          <a:ln/>
+        </p:spPr>
+        <p:txBody>
+          <a:bodyPr wrap="square" lIns="0" tIns="0" rIns="0" bIns="0" rtlCol="0" anchor="ctr"/>
+          <a:lstStyle/>
+          <a:p>
+            <a:pPr indent="0" marL="0">
+              <a:buNone/>
+            </a:pPr>
+            <a:r>
+              <a:rPr lang="en-US" sz="3000" dirty="0">
+                <a:solidFill>
+                  <a:srgbClr val="A3C1AD"/>
+                </a:solidFill>
+                <a:latin typeface="Georgia" pitchFamily="34" charset="0"/>
+                <a:ea typeface="Georgia" pitchFamily="34" charset="-122"/>
+                <a:cs typeface="Georgia" pitchFamily="34" charset="-120"/>
+              </a:rPr>
+              <a:t>02</a:t>
+            </a:r>
+            <a:endParaRPr lang="en-US" sz="3000" dirty="0"/>
+          </a:p>
+        </p:txBody>
+      </p:sp>
+      <p:sp>
+        <p:nvSpPr>
+          <p:cNvPr id="10" name="Text 8"/>
+          <p:cNvSpPr/>
+          <p:nvPr/>
+        </p:nvSpPr>
+        <p:spPr>
+          <a:xfrm>
+            <a:off x="7283196" y="1938528"/>
+            <a:ext cx="4082796" cy="457200"/>
+          </a:xfrm>
+          <a:prstGeom prst="rect">
+            <a:avLst/>
+          </a:prstGeom>
+          <a:noFill/>
+          <a:ln/>
+        </p:spPr>
+        <p:txBody>
+          <a:bodyPr wrap="square" lIns="0" tIns="0" rIns="0" bIns="0" rtlCol="0" anchor="ctr"/>
+          <a:lstStyle/>
+          <a:p>
+            <a:pPr indent="0" marL="0">
+              <a:buNone/>
+            </a:pPr>
+            <a:r>
+              <a:rPr lang="en-US" sz="2300" dirty="0">
+                <a:solidFill>
+                  <a:srgbClr val="4A6B5D"/>
+                </a:solidFill>
+                <a:latin typeface="Georgia" pitchFamily="34" charset="0"/>
+                <a:ea typeface="Georgia" pitchFamily="34" charset="-122"/>
+                <a:cs typeface="Georgia" pitchFamily="34" charset="-120"/>
+              </a:rPr>
+              <a:t>What varies</a:t>
+            </a:r>
+            <a:endParaRPr lang="en-US" sz="2300" dirty="0"/>
+          </a:p>
+        </p:txBody>
+      </p:sp>
+      <p:sp>
+        <p:nvSpPr>
+          <p:cNvPr id="11" name="Text 9"/>
+          <p:cNvSpPr/>
+          <p:nvPr/>
+        </p:nvSpPr>
+        <p:spPr>
+          <a:xfrm>
+            <a:off x="7283196" y="2468880"/>
+            <a:ext cx="4082796" cy="1188720"/>
+          </a:xfrm>
+          <a:prstGeom prst="rect">
+            <a:avLst/>
+          </a:prstGeom>
+          <a:noFill/>
+          <a:ln/>
+        </p:spPr>
+        <p:txBody>
+          <a:bodyPr wrap="square" lIns="0" tIns="0" rIns="0" bIns="0" rtlCol="0" anchor="t"/>
+          <a:lstStyle/>
+          <a:p>
+            <a:pPr indent="0" marL="0">
+              <a:lnSpc>
+                <a:spcPts val="2100"/>
+              </a:lnSpc>
+              <a:buNone/>
+            </a:pPr>
+            <a:r>
+              <a:rPr lang="en-US" sz="1550" dirty="0">
+                <a:solidFill>
+                  <a:srgbClr val="24313F"/>
+                </a:solidFill>
+                <a:latin typeface="Georgia" pitchFamily="34" charset="0"/>
+                <a:ea typeface="Georgia" pitchFamily="34" charset="-122"/>
+                <a:cs typeface="Georgia" pitchFamily="34" charset="-120"/>
+              </a:rPr>
+              <a:t>The difference this instance offers: the reason to watch this one.</a:t>
+            </a:r>
+            <a:endParaRPr lang="en-US" sz="1550" dirty="0"/>
+          </a:p>
+        </p:txBody>
+      </p:sp>
+      <p:sp>
+        <p:nvSpPr>
+          <p:cNvPr id="12" name="Text 10"/>
+          <p:cNvSpPr/>
+          <p:nvPr/>
+        </p:nvSpPr>
+        <p:spPr>
+          <a:xfrm>
+            <a:off x="822960" y="4114800"/>
+            <a:ext cx="914400" cy="548640"/>
+          </a:xfrm>
+          <a:prstGeom prst="rect">
+            <a:avLst/>
+          </a:prstGeom>
+          <a:noFill/>
+          <a:ln/>
+        </p:spPr>
+        <p:txBody>
+          <a:bodyPr wrap="square" lIns="0" tIns="0" rIns="0" bIns="0" rtlCol="0" anchor="ctr"/>
+          <a:lstStyle/>
+          <a:p>
+            <a:pPr indent="0" marL="0">
+              <a:buNone/>
+            </a:pPr>
+            <a:r>
+              <a:rPr lang="en-US" sz="3000" dirty="0">
+                <a:solidFill>
+                  <a:srgbClr val="A3C1AD"/>
+                </a:solidFill>
+                <a:latin typeface="Georgia" pitchFamily="34" charset="0"/>
+                <a:ea typeface="Georgia" pitchFamily="34" charset="-122"/>
+                <a:cs typeface="Georgia" pitchFamily="34" charset="-120"/>
+              </a:rPr>
+              <a:t>03</a:t>
+            </a:r>
+            <a:endParaRPr lang="en-US" sz="3000" dirty="0"/>
+          </a:p>
+        </p:txBody>
+      </p:sp>
+      <p:sp>
+        <p:nvSpPr>
+          <p:cNvPr id="13" name="Text 11"/>
+          <p:cNvSpPr/>
+          <p:nvPr/>
+        </p:nvSpPr>
+        <p:spPr>
+          <a:xfrm>
+            <a:off x="1737360" y="4133088"/>
+            <a:ext cx="4082796" cy="457200"/>
+          </a:xfrm>
+          <a:prstGeom prst="rect">
+            <a:avLst/>
+          </a:prstGeom>
+          <a:noFill/>
+          <a:ln/>
+        </p:spPr>
+        <p:txBody>
+          <a:bodyPr wrap="square" lIns="0" tIns="0" rIns="0" bIns="0" rtlCol="0" anchor="ctr"/>
+          <a:lstStyle/>
+          <a:p>
+            <a:pPr indent="0" marL="0">
+              <a:buNone/>
+            </a:pPr>
+            <a:r>
+              <a:rPr lang="en-US" sz="2300" dirty="0">
+                <a:solidFill>
+                  <a:srgbClr val="4A6B5D"/>
+                </a:solidFill>
+                <a:latin typeface="Georgia" pitchFamily="34" charset="0"/>
+                <a:ea typeface="Georgia" pitchFamily="34" charset="-122"/>
+                <a:cs typeface="Georgia" pitchFamily="34" charset="-120"/>
+              </a:rPr>
+              <a:t>Who profits</a:t>
+            </a:r>
+            <a:endParaRPr lang="en-US" sz="2300" dirty="0"/>
+          </a:p>
+        </p:txBody>
+      </p:sp>
+      <p:sp>
+        <p:nvSpPr>
+          <p:cNvPr id="14" name="Text 12"/>
+          <p:cNvSpPr/>
+          <p:nvPr/>
+        </p:nvSpPr>
+        <p:spPr>
+          <a:xfrm>
+            <a:off x="1737360" y="4663440"/>
+            <a:ext cx="4082796" cy="1188720"/>
+          </a:xfrm>
+          <a:prstGeom prst="rect">
+            <a:avLst/>
+          </a:prstGeom>
+          <a:noFill/>
+          <a:ln/>
+        </p:spPr>
+        <p:txBody>
+          <a:bodyPr wrap="square" lIns="0" tIns="0" rIns="0" bIns="0" rtlCol="0" anchor="t"/>
+          <a:lstStyle/>
+          <a:p>
+            <a:pPr indent="0" marL="0">
+              <a:lnSpc>
+                <a:spcPts val="2100"/>
+              </a:lnSpc>
+              <a:buNone/>
+            </a:pPr>
+            <a:r>
+              <a:rPr lang="en-US" sz="1550" dirty="0">
+                <a:solidFill>
+                  <a:srgbClr val="24313F"/>
+                </a:solidFill>
+                <a:latin typeface="Georgia" pitchFamily="34" charset="0"/>
+                <a:ea typeface="Georgia" pitchFamily="34" charset="-122"/>
+                <a:cs typeface="Georgia" pitchFamily="34" charset="-120"/>
+              </a:rPr>
+              <a:t>Who banks on the repetition: the studio, the platform, the franchise.</a:t>
+            </a:r>
+            <a:endParaRPr lang="en-US" sz="1550" dirty="0"/>
+          </a:p>
+        </p:txBody>
+      </p:sp>
+      <p:sp>
+        <p:nvSpPr>
+          <p:cNvPr id="15" name="Text 13"/>
+          <p:cNvSpPr/>
+          <p:nvPr/>
+        </p:nvSpPr>
+        <p:spPr>
+          <a:xfrm>
+            <a:off x="6368796" y="4114800"/>
+            <a:ext cx="914400" cy="548640"/>
+          </a:xfrm>
+          <a:prstGeom prst="rect">
+            <a:avLst/>
+          </a:prstGeom>
+          <a:noFill/>
+          <a:ln/>
+        </p:spPr>
+        <p:txBody>
+          <a:bodyPr wrap="square" lIns="0" tIns="0" rIns="0" bIns="0" rtlCol="0" anchor="ctr"/>
+          <a:lstStyle/>
+          <a:p>
+            <a:pPr indent="0" marL="0">
+              <a:buNone/>
+            </a:pPr>
+            <a:r>
+              <a:rPr lang="en-US" sz="3000" dirty="0">
+                <a:solidFill>
+                  <a:srgbClr val="A3C1AD"/>
+                </a:solidFill>
+                <a:latin typeface="Georgia" pitchFamily="34" charset="0"/>
+                <a:ea typeface="Georgia" pitchFamily="34" charset="-122"/>
+                <a:cs typeface="Georgia" pitchFamily="34" charset="-120"/>
+              </a:rPr>
+              <a:t>04</a:t>
+            </a:r>
+            <a:endParaRPr lang="en-US" sz="3000" dirty="0"/>
+          </a:p>
+        </p:txBody>
+      </p:sp>
+      <p:sp>
+        <p:nvSpPr>
+          <p:cNvPr id="16" name="Text 14"/>
+          <p:cNvSpPr/>
+          <p:nvPr/>
+        </p:nvSpPr>
+        <p:spPr>
+          <a:xfrm>
+            <a:off x="7283196" y="4133088"/>
+            <a:ext cx="4082796" cy="457200"/>
+          </a:xfrm>
+          <a:prstGeom prst="rect">
+            <a:avLst/>
+          </a:prstGeom>
+          <a:noFill/>
+          <a:ln/>
+        </p:spPr>
+        <p:txBody>
+          <a:bodyPr wrap="square" lIns="0" tIns="0" rIns="0" bIns="0" rtlCol="0" anchor="ctr"/>
+          <a:lstStyle/>
+          <a:p>
+            <a:pPr indent="0" marL="0">
+              <a:buNone/>
+            </a:pPr>
+            <a:r>
+              <a:rPr lang="en-US" sz="2300" dirty="0">
+                <a:solidFill>
+                  <a:srgbClr val="4A6B5D"/>
+                </a:solidFill>
+                <a:latin typeface="Georgia" pitchFamily="34" charset="0"/>
+                <a:ea typeface="Georgia" pitchFamily="34" charset="-122"/>
+                <a:cs typeface="Georgia" pitchFamily="34" charset="-120"/>
+              </a:rPr>
+              <a:t>What is promised</a:t>
+            </a:r>
+            <a:endParaRPr lang="en-US" sz="2300" dirty="0"/>
+          </a:p>
+        </p:txBody>
+      </p:sp>
+      <p:sp>
+        <p:nvSpPr>
+          <p:cNvPr id="17" name="Text 15"/>
+          <p:cNvSpPr/>
+          <p:nvPr/>
+        </p:nvSpPr>
+        <p:spPr>
+          <a:xfrm>
+            <a:off x="7283196" y="4663440"/>
+            <a:ext cx="4082796" cy="1188720"/>
+          </a:xfrm>
+          <a:prstGeom prst="rect">
+            <a:avLst/>
+          </a:prstGeom>
+          <a:noFill/>
+          <a:ln/>
+        </p:spPr>
+        <p:txBody>
+          <a:bodyPr wrap="square" lIns="0" tIns="0" rIns="0" bIns="0" rtlCol="0" anchor="t"/>
+          <a:lstStyle/>
+          <a:p>
+            <a:pPr indent="0" marL="0">
+              <a:lnSpc>
+                <a:spcPts val="2100"/>
+              </a:lnSpc>
+              <a:buNone/>
+            </a:pPr>
+            <a:r>
+              <a:rPr lang="en-US" sz="1550" dirty="0">
+                <a:solidFill>
+                  <a:srgbClr val="24313F"/>
+                </a:solidFill>
+                <a:latin typeface="Georgia" pitchFamily="34" charset="0"/>
+                <a:ea typeface="Georgia" pitchFamily="34" charset="-122"/>
+                <a:cs typeface="Georgia" pitchFamily="34" charset="-120"/>
+              </a:rPr>
+              <a:t>The pleasure the audience is being sold: fear, romance, awe, comfort.</a:t>
+            </a:r>
+            <a:endParaRPr lang="en-US" sz="1550" dirty="0"/>
+          </a:p>
+        </p:txBody>
+      </p:sp>
+      <p:sp>
+        <p:nvSpPr>
+          <p:cNvPr id="18" name="Shape 16"/>
+          <p:cNvSpPr/>
+          <p:nvPr/>
+        </p:nvSpPr>
+        <p:spPr>
+          <a:xfrm>
+            <a:off x="822960" y="6382512"/>
+            <a:ext cx="10543032" cy="0"/>
+          </a:xfrm>
+          <a:prstGeom prst="line">
+            <a:avLst/>
+          </a:prstGeom>
+          <a:noFill/>
+          <a:ln w="9525">
+            <a:solidFill>
+              <a:srgbClr val="D9D4C4"/>
+            </a:solidFill>
+            <a:prstDash val="solid"/>
+          </a:ln>
+        </p:spPr>
+      </p:sp>
+      <p:sp>
+        <p:nvSpPr>
+          <p:cNvPr id="19" name="Text 17"/>
+          <p:cNvSpPr/>
+          <p:nvPr/>
+        </p:nvSpPr>
+        <p:spPr>
+          <a:xfrm>
+            <a:off x="822960" y="6419088"/>
+            <a:ext cx="7315200" cy="274320"/>
+          </a:xfrm>
+          <a:prstGeom prst="rect">
+            <a:avLst/>
+          </a:prstGeom>
+          <a:noFill/>
+          <a:ln/>
+        </p:spPr>
+        <p:txBody>
+          <a:bodyPr wrap="square" lIns="0" tIns="0" rIns="0" bIns="0" rtlCol="0" anchor="ctr"/>
+          <a:lstStyle/>
+          <a:p>
+            <a:pPr indent="0" marL="0">
+              <a:buNone/>
+            </a:pPr>
+            <a:r>
+              <a:rPr lang="en-US" sz="900" spc="150" kern="0" dirty="0">
+                <a:solidFill>
+                  <a:srgbClr val="7A7F72"/>
+                </a:solidFill>
+                <a:latin typeface="Arial" pitchFamily="34" charset="0"/>
+                <a:ea typeface="Arial" pitchFamily="34" charset="-122"/>
+                <a:cs typeface="Arial" pitchFamily="34" charset="-120"/>
+              </a:rPr>
+              <a:t>MEDIA STUDIES 9607 · SEMESTER I</a:t>
+            </a:r>
+            <a:endParaRPr lang="en-US" sz="900" dirty="0"/>
+          </a:p>
+        </p:txBody>
+      </p:sp>
+      <p:sp>
+        <p:nvSpPr>
+          <p:cNvPr id="20" name="Text 18"/>
+          <p:cNvSpPr/>
+          <p:nvPr/>
+        </p:nvSpPr>
+        <p:spPr>
+          <a:xfrm>
+            <a:off x="10268712" y="6355080"/>
+            <a:ext cx="1097280" cy="365760"/>
+          </a:xfrm>
+          <a:prstGeom prst="rect">
+            <a:avLst/>
+          </a:prstGeom>
+          <a:noFill/>
+          <a:ln/>
+        </p:spPr>
+        <p:txBody>
+          <a:bodyPr wrap="square" lIns="0" tIns="0" rIns="0" bIns="0" rtlCol="0" anchor="ctr"/>
+          <a:lstStyle/>
+          <a:p>
+            <a:pPr algn="r" indent="0" marL="0">
+              <a:buNone/>
+            </a:pPr>
+            <a:r>
+              <a:rPr lang="en-US" sz="1600" dirty="0">
+                <a:solidFill>
+                  <a:srgbClr val="A3C1AD"/>
+                </a:solidFill>
+                <a:latin typeface="Georgia" pitchFamily="34" charset="0"/>
+                <a:ea typeface="Georgia" pitchFamily="34" charset="-122"/>
+                <a:cs typeface="Georgia" pitchFamily="34" charset="-120"/>
+              </a:rPr>
+              <a:t>03</a:t>
+            </a:r>
+            <a:endParaRPr lang="en-US" sz="1600" dirty="0"/>
+          </a:p>
+        </p:txBody>
+      </p:sp>
+    </p:spTree>
+  </p:cSld>
+  <p:clrMapOvr>
+    <a:masterClrMapping/>
+  </p:clrMapOvr>
+</p:sld>
+</file>
+
+<file path=ppt/slides/slide8.xml><?xml version="1.0" encoding="utf-8"?>
+<p:sld xmlns:a="http://schemas.openxmlformats.org/drawingml/2006/main" xmlns:r="http://schemas.openxmlformats.org/officeDocument/2006/relationships" xmlns:p="http://schemas.openxmlformats.org/presentationml/2006/main">
+  <p:cSld name="Slide 8">
     <p:bg>
       <p:bgPr>
         <a:solidFill>
@@ -4343,12 +6733,12 @@
           <a:p>
             <a:pPr indent="0" marL="0">
               <a:lnSpc>
-                <a:spcPts val="5000"/>
+                <a:spcPts val="4800"/>
               </a:lnSpc>
               <a:buNone/>
             </a:pPr>
             <a:r>
-              <a:rPr lang="en-US" sz="4200" dirty="0">
+              <a:rPr lang="en-US" sz="3800" dirty="0">
                 <a:solidFill>
                   <a:srgbClr val="24313F"/>
                 </a:solidFill>
@@ -4356,9 +6746,9 @@
                 <a:ea typeface="Georgia" pitchFamily="34" charset="-122"/>
                 <a:cs typeface="Georgia" pitchFamily="34" charset="-120"/>
               </a:rPr>
-              <a:t>Genre is not simply given by the culture: it is a constant process of negotiation and change.</a:t>
-            </a:r>
-            <a:endParaRPr lang="en-US" sz="4200" dirty="0"/>
+              <a:t>Genre is not simply given by culture: rather, it is in a constant process of negotiation and change.</a:t>
+            </a:r>
+            <a:endParaRPr lang="en-US" sz="3800" dirty="0"/>
           </a:p>
         </p:txBody>
       </p:sp>
@@ -4418,555 +6808,9 @@
                 <a:ea typeface="Arial" pitchFamily="34" charset="-122"/>
                 <a:cs typeface="Arial" pitchFamily="34" charset="-120"/>
               </a:rPr>
-              <a:t>David Buckingham</a:t>
+              <a:t>David Buckingham, 1993</a:t>
             </a:r>
             <a:endParaRPr lang="en-US" sz="1400" dirty="0"/>
-          </a:p>
-        </p:txBody>
-      </p:sp>
-    </p:spTree>
-  </p:cSld>
-  <p:clrMapOvr>
-    <a:masterClrMapping/>
-  </p:clrMapOvr>
-</p:sld>
-</file>
-
-<file path=ppt/slides/slide8.xml><?xml version="1.0" encoding="utf-8"?>
-<p:sld xmlns:a="http://schemas.openxmlformats.org/drawingml/2006/main" xmlns:r="http://schemas.openxmlformats.org/officeDocument/2006/relationships" xmlns:p="http://schemas.openxmlformats.org/presentationml/2006/main">
-  <p:cSld name="Slide 8">
-    <p:bg>
-      <p:bgPr>
-        <a:solidFill>
-          <a:srgbClr val="FAF8F1"/>
-        </a:solidFill>
-      </p:bgPr>
-    </p:bg>
-    <p:spTree>
-      <p:nvGrpSpPr>
-        <p:cNvPr id="1" name=""/>
-        <p:cNvGrpSpPr/>
-        <p:nvPr/>
-      </p:nvGrpSpPr>
-      <p:grpSpPr>
-        <a:xfrm>
-          <a:off x="0" y="0"/>
-          <a:ext cx="0" cy="0"/>
-          <a:chOff x="0" y="0"/>
-          <a:chExt cx="0" cy="0"/>
-        </a:xfrm>
-      </p:grpSpPr>
-      <p:sp>
-        <p:nvSpPr>
-          <p:cNvPr id="2" name="Text 0"/>
-          <p:cNvSpPr/>
-          <p:nvPr/>
-        </p:nvSpPr>
-        <p:spPr>
-          <a:xfrm>
-            <a:off x="822960" y="457200"/>
-            <a:ext cx="6400800" cy="274320"/>
-          </a:xfrm>
-          <a:prstGeom prst="rect">
-            <a:avLst/>
-          </a:prstGeom>
-          <a:noFill/>
-          <a:ln/>
-        </p:spPr>
-        <p:txBody>
-          <a:bodyPr wrap="square" lIns="0" tIns="0" rIns="0" bIns="0" rtlCol="0" anchor="ctr"/>
-          <a:lstStyle/>
-          <a:p>
-            <a:pPr algn="l" indent="0" marL="0">
-              <a:buNone/>
-            </a:pPr>
-            <a:r>
-              <a:rPr lang="en-US" sz="1100" b="1" spc="250" kern="0" dirty="0">
-                <a:solidFill>
-                  <a:srgbClr val="4A6B5D"/>
-                </a:solidFill>
-                <a:latin typeface="Arial" pitchFamily="34" charset="0"/>
-                <a:ea typeface="Arial" pitchFamily="34" charset="-122"/>
-                <a:cs typeface="Arial" pitchFamily="34" charset="-120"/>
-              </a:rPr>
-              <a:t>FOUR CORNERS · TITLES STRIPPED</a:t>
-            </a:r>
-            <a:endParaRPr lang="en-US" sz="1100" dirty="0"/>
-          </a:p>
-        </p:txBody>
-      </p:sp>
-      <p:sp>
-        <p:nvSpPr>
-          <p:cNvPr id="3" name="Text 1"/>
-          <p:cNvSpPr/>
-          <p:nvPr/>
-        </p:nvSpPr>
-        <p:spPr>
-          <a:xfrm>
-            <a:off x="6793992" y="457200"/>
-            <a:ext cx="4572000" cy="274320"/>
-          </a:xfrm>
-          <a:prstGeom prst="rect">
-            <a:avLst/>
-          </a:prstGeom>
-          <a:noFill/>
-          <a:ln/>
-        </p:spPr>
-        <p:txBody>
-          <a:bodyPr wrap="square" lIns="0" tIns="0" rIns="0" bIns="0" rtlCol="0" anchor="ctr"/>
-          <a:lstStyle/>
-          <a:p>
-            <a:pPr algn="r" indent="0" marL="0">
-              <a:buNone/>
-            </a:pPr>
-            <a:r>
-              <a:rPr lang="en-US" sz="1100" b="1" spc="250" kern="0" dirty="0">
-                <a:solidFill>
-                  <a:srgbClr val="7A7F72"/>
-                </a:solidFill>
-                <a:latin typeface="Arial" pitchFamily="34" charset="0"/>
-                <a:ea typeface="Arial" pitchFamily="34" charset="-122"/>
-                <a:cs typeface="Arial" pitchFamily="34" charset="-120"/>
-              </a:rPr>
-              <a:t>THE BAR IS HIGHER THAN IT WAS IN SEPTEMBER</a:t>
-            </a:r>
-            <a:endParaRPr lang="en-US" sz="1100" dirty="0"/>
-          </a:p>
-        </p:txBody>
-      </p:sp>
-      <p:sp>
-        <p:nvSpPr>
-          <p:cNvPr id="4" name="Shape 2"/>
-          <p:cNvSpPr/>
-          <p:nvPr/>
-        </p:nvSpPr>
-        <p:spPr>
-          <a:xfrm>
-            <a:off x="822960" y="786384"/>
-            <a:ext cx="10543032" cy="0"/>
-          </a:xfrm>
-          <a:prstGeom prst="line">
-            <a:avLst/>
-          </a:prstGeom>
-          <a:noFill/>
-          <a:ln w="9525">
-            <a:solidFill>
-              <a:srgbClr val="D9D4C4"/>
-            </a:solidFill>
-            <a:prstDash val="solid"/>
-          </a:ln>
-        </p:spPr>
-      </p:sp>
-      <p:sp>
-        <p:nvSpPr>
-          <p:cNvPr id="5" name="Text 3"/>
-          <p:cNvSpPr/>
-          <p:nvPr/>
-        </p:nvSpPr>
-        <p:spPr>
-          <a:xfrm>
-            <a:off x="822960" y="1051560"/>
-            <a:ext cx="10543032" cy="731520"/>
-          </a:xfrm>
-          <a:prstGeom prst="rect">
-            <a:avLst/>
-          </a:prstGeom>
-          <a:noFill/>
-          <a:ln/>
-        </p:spPr>
-        <p:txBody>
-          <a:bodyPr wrap="square" lIns="0" tIns="0" rIns="0" bIns="0" rtlCol="0" anchor="ctr"/>
-          <a:lstStyle/>
-          <a:p>
-            <a:pPr indent="0" marL="0">
-              <a:buNone/>
-            </a:pPr>
-            <a:r>
-              <a:rPr lang="en-US" sz="3400" dirty="0">
-                <a:solidFill>
-                  <a:srgbClr val="24313F"/>
-                </a:solidFill>
-                <a:latin typeface="Georgia" pitchFamily="34" charset="0"/>
-                <a:ea typeface="Georgia" pitchFamily="34" charset="-122"/>
-                <a:cs typeface="Georgia" pitchFamily="34" charset="-120"/>
-              </a:rPr>
-              <a:t>Evidence, not atmosphere</a:t>
-            </a:r>
-            <a:endParaRPr lang="en-US" sz="3400" dirty="0"/>
-          </a:p>
-        </p:txBody>
-      </p:sp>
-      <p:sp>
-        <p:nvSpPr>
-          <p:cNvPr id="6" name="Text 4"/>
-          <p:cNvSpPr/>
-          <p:nvPr/>
-        </p:nvSpPr>
-        <p:spPr>
-          <a:xfrm>
-            <a:off x="822960" y="2011680"/>
-            <a:ext cx="4846320" cy="502920"/>
-          </a:xfrm>
-          <a:prstGeom prst="rect">
-            <a:avLst/>
-          </a:prstGeom>
-          <a:noFill/>
-          <a:ln/>
-        </p:spPr>
-        <p:txBody>
-          <a:bodyPr wrap="square" lIns="0" tIns="0" rIns="0" bIns="0" rtlCol="0" anchor="ctr"/>
-          <a:lstStyle/>
-          <a:p>
-            <a:pPr indent="0" marL="0">
-              <a:buNone/>
-            </a:pPr>
-            <a:r>
-              <a:rPr lang="en-US" sz="2200" dirty="0">
-                <a:solidFill>
-                  <a:srgbClr val="7A7F72"/>
-                </a:solidFill>
-                <a:latin typeface="Georgia" pitchFamily="34" charset="0"/>
-                <a:ea typeface="Georgia" pitchFamily="34" charset="-122"/>
-                <a:cs typeface="Georgia" pitchFamily="34" charset="-120"/>
-              </a:rPr>
-              <a:t>In September you would have said</a:t>
-            </a:r>
-            <a:endParaRPr lang="en-US" sz="2200" dirty="0"/>
-          </a:p>
-        </p:txBody>
-      </p:sp>
-      <p:sp>
-        <p:nvSpPr>
-          <p:cNvPr id="7" name="Shape 5"/>
-          <p:cNvSpPr/>
-          <p:nvPr/>
-        </p:nvSpPr>
-        <p:spPr>
-          <a:xfrm>
-            <a:off x="822960" y="2606040"/>
-            <a:ext cx="4754880" cy="0"/>
-          </a:xfrm>
-          <a:prstGeom prst="line">
-            <a:avLst/>
-          </a:prstGeom>
-          <a:noFill/>
-          <a:ln w="9525">
-            <a:solidFill>
-              <a:srgbClr val="D9D4C4"/>
-            </a:solidFill>
-            <a:prstDash val="solid"/>
-          </a:ln>
-        </p:spPr>
-      </p:sp>
-      <p:sp>
-        <p:nvSpPr>
-          <p:cNvPr id="8" name="Text 6"/>
-          <p:cNvSpPr/>
-          <p:nvPr/>
-        </p:nvSpPr>
-        <p:spPr>
-          <a:xfrm>
-            <a:off x="822960" y="2788920"/>
-            <a:ext cx="4846320" cy="1828800"/>
-          </a:xfrm>
-          <a:prstGeom prst="rect">
-            <a:avLst/>
-          </a:prstGeom>
-          <a:noFill/>
-          <a:ln/>
-        </p:spPr>
-        <p:txBody>
-          <a:bodyPr wrap="square" lIns="0" tIns="0" rIns="0" bIns="0" rtlCol="0" anchor="t"/>
-          <a:lstStyle/>
-          <a:p>
-            <a:pPr indent="0" marL="0">
-              <a:lnSpc>
-                <a:spcPts val="2500"/>
-              </a:lnSpc>
-              <a:buNone/>
-            </a:pPr>
-            <a:r>
-              <a:rPr lang="en-US" sz="1750" dirty="0">
-                <a:solidFill>
-                  <a:srgbClr val="24313F"/>
-                </a:solidFill>
-                <a:latin typeface="Georgia" pitchFamily="34" charset="0"/>
-                <a:ea typeface="Georgia" pitchFamily="34" charset="-122"/>
-                <a:cs typeface="Georgia" pitchFamily="34" charset="-120"/>
-              </a:rPr>
-              <a:t>It feels scary. The music is creepy and it is dark.</a:t>
-            </a:r>
-            <a:endParaRPr lang="en-US" sz="1750" dirty="0"/>
-          </a:p>
-        </p:txBody>
-      </p:sp>
-      <p:sp>
-        <p:nvSpPr>
-          <p:cNvPr id="9" name="Text 7"/>
-          <p:cNvSpPr/>
-          <p:nvPr/>
-        </p:nvSpPr>
-        <p:spPr>
-          <a:xfrm>
-            <a:off x="6309360" y="2011680"/>
-            <a:ext cx="4846320" cy="502920"/>
-          </a:xfrm>
-          <a:prstGeom prst="rect">
-            <a:avLst/>
-          </a:prstGeom>
-          <a:noFill/>
-          <a:ln/>
-        </p:spPr>
-        <p:txBody>
-          <a:bodyPr wrap="square" lIns="0" tIns="0" rIns="0" bIns="0" rtlCol="0" anchor="ctr"/>
-          <a:lstStyle/>
-          <a:p>
-            <a:pPr indent="0" marL="0">
-              <a:buNone/>
-            </a:pPr>
-            <a:r>
-              <a:rPr lang="en-US" sz="2200" dirty="0">
-                <a:solidFill>
-                  <a:srgbClr val="4A6B5D"/>
-                </a:solidFill>
-                <a:latin typeface="Georgia" pitchFamily="34" charset="0"/>
-                <a:ea typeface="Georgia" pitchFamily="34" charset="-122"/>
-                <a:cs typeface="Georgia" pitchFamily="34" charset="-120"/>
-              </a:rPr>
-              <a:t>Now you can say</a:t>
-            </a:r>
-            <a:endParaRPr lang="en-US" sz="2200" dirty="0"/>
-          </a:p>
-        </p:txBody>
-      </p:sp>
-      <p:sp>
-        <p:nvSpPr>
-          <p:cNvPr id="10" name="Shape 8"/>
-          <p:cNvSpPr/>
-          <p:nvPr/>
-        </p:nvSpPr>
-        <p:spPr>
-          <a:xfrm>
-            <a:off x="6309360" y="2606040"/>
-            <a:ext cx="4754880" cy="0"/>
-          </a:xfrm>
-          <a:prstGeom prst="line">
-            <a:avLst/>
-          </a:prstGeom>
-          <a:noFill/>
-          <a:ln w="9525">
-            <a:solidFill>
-              <a:srgbClr val="D9D4C4"/>
-            </a:solidFill>
-            <a:prstDash val="solid"/>
-          </a:ln>
-        </p:spPr>
-      </p:sp>
-      <p:sp>
-        <p:nvSpPr>
-          <p:cNvPr id="11" name="Text 9"/>
-          <p:cNvSpPr/>
-          <p:nvPr/>
-        </p:nvSpPr>
-        <p:spPr>
-          <a:xfrm>
-            <a:off x="6309360" y="2788920"/>
-            <a:ext cx="4846320" cy="1828800"/>
-          </a:xfrm>
-          <a:prstGeom prst="rect">
-            <a:avLst/>
-          </a:prstGeom>
-          <a:noFill/>
-          <a:ln/>
-        </p:spPr>
-        <p:txBody>
-          <a:bodyPr wrap="square" lIns="0" tIns="0" rIns="0" bIns="0" rtlCol="0" anchor="t"/>
-          <a:lstStyle/>
-          <a:p>
-            <a:pPr indent="0" marL="0">
-              <a:lnSpc>
-                <a:spcPts val="2500"/>
-              </a:lnSpc>
-              <a:buNone/>
-            </a:pPr>
-            <a:r>
-              <a:rPr lang="en-US" sz="1750" dirty="0">
-                <a:solidFill>
-                  <a:srgbClr val="24313F"/>
-                </a:solidFill>
-                <a:latin typeface="Georgia" pitchFamily="34" charset="0"/>
-                <a:ea typeface="Georgia" pitchFamily="34" charset="-122"/>
-                <a:cs typeface="Georgia" pitchFamily="34" charset="-120"/>
-              </a:rPr>
-              <a:t>Low key lighting, faces held in shallow focus, eleven cuts in twenty seconds, and a non-diegetic drone under the whole thing.</a:t>
-            </a:r>
-            <a:endParaRPr lang="en-US" sz="1750" dirty="0"/>
-          </a:p>
-        </p:txBody>
-      </p:sp>
-      <p:sp>
-        <p:nvSpPr>
-          <p:cNvPr id="12" name="Shape 10"/>
-          <p:cNvSpPr/>
-          <p:nvPr/>
-        </p:nvSpPr>
-        <p:spPr>
-          <a:xfrm>
-            <a:off x="822960" y="4937760"/>
-            <a:ext cx="914400" cy="0"/>
-          </a:xfrm>
-          <a:prstGeom prst="line">
-            <a:avLst/>
-          </a:prstGeom>
-          <a:noFill/>
-          <a:ln w="31750">
-            <a:solidFill>
-              <a:srgbClr val="8C3A38"/>
-            </a:solidFill>
-            <a:prstDash val="solid"/>
-          </a:ln>
-        </p:spPr>
-      </p:sp>
-      <p:sp>
-        <p:nvSpPr>
-          <p:cNvPr id="13" name="Text 11"/>
-          <p:cNvSpPr/>
-          <p:nvPr/>
-        </p:nvSpPr>
-        <p:spPr>
-          <a:xfrm>
-            <a:off x="822960" y="5120640"/>
-            <a:ext cx="10424160" cy="640080"/>
-          </a:xfrm>
-          <a:prstGeom prst="rect">
-            <a:avLst/>
-          </a:prstGeom>
-          <a:noFill/>
-          <a:ln/>
-        </p:spPr>
-        <p:txBody>
-          <a:bodyPr wrap="square" lIns="0" tIns="0" rIns="0" bIns="0" rtlCol="0" anchor="t"/>
-          <a:lstStyle/>
-          <a:p>
-            <a:pPr indent="0" marL="0">
-              <a:lnSpc>
-                <a:spcPts val="2200"/>
-              </a:lnSpc>
-              <a:buNone/>
-            </a:pPr>
-            <a:r>
-              <a:rPr lang="en-US" sz="1650" i="1" dirty="0">
-                <a:solidFill>
-                  <a:srgbClr val="4A6B5D"/>
-                </a:solidFill>
-                <a:latin typeface="Georgia" pitchFamily="34" charset="0"/>
-                <a:ea typeface="Georgia" pitchFamily="34" charset="-122"/>
-                <a:cs typeface="Georgia" pitchFamily="34" charset="-120"/>
-              </a:rPr>
-              <a:t>Four clips, titles and credits removed, four candidate genres in the four corners. Commit by moving, then defend the corner from codes alone, two pieces of evidence noted.</a:t>
-            </a:r>
-            <a:endParaRPr lang="en-US" sz="1650" dirty="0"/>
-          </a:p>
-        </p:txBody>
-      </p:sp>
-      <p:sp>
-        <p:nvSpPr>
-          <p:cNvPr id="14" name="Shape 12"/>
-          <p:cNvSpPr/>
-          <p:nvPr/>
-        </p:nvSpPr>
-        <p:spPr>
-          <a:xfrm>
-            <a:off x="822960" y="6382512"/>
-            <a:ext cx="10543032" cy="0"/>
-          </a:xfrm>
-          <a:prstGeom prst="line">
-            <a:avLst/>
-          </a:prstGeom>
-          <a:noFill/>
-          <a:ln w="9525">
-            <a:solidFill>
-              <a:srgbClr val="D9D4C4"/>
-            </a:solidFill>
-            <a:prstDash val="solid"/>
-          </a:ln>
-        </p:spPr>
-      </p:sp>
-      <p:sp>
-        <p:nvSpPr>
-          <p:cNvPr id="15" name="Text 13"/>
-          <p:cNvSpPr/>
-          <p:nvPr/>
-        </p:nvSpPr>
-        <p:spPr>
-          <a:xfrm>
-            <a:off x="822960" y="6419088"/>
-            <a:ext cx="7315200" cy="274320"/>
-          </a:xfrm>
-          <a:prstGeom prst="rect">
-            <a:avLst/>
-          </a:prstGeom>
-          <a:noFill/>
-          <a:ln/>
-        </p:spPr>
-        <p:txBody>
-          <a:bodyPr wrap="square" lIns="0" tIns="0" rIns="0" bIns="0" rtlCol="0" anchor="ctr"/>
-          <a:lstStyle/>
-          <a:p>
-            <a:pPr indent="0" marL="0">
-              <a:buNone/>
-            </a:pPr>
-            <a:r>
-              <a:rPr lang="en-US" sz="900" spc="150" kern="0" dirty="0">
-                <a:solidFill>
-                  <a:srgbClr val="7A7F72"/>
-                </a:solidFill>
-                <a:latin typeface="Arial" pitchFamily="34" charset="0"/>
-                <a:ea typeface="Arial" pitchFamily="34" charset="-122"/>
-                <a:cs typeface="Arial" pitchFamily="34" charset="-120"/>
-              </a:rPr>
-              <a:t>MEDIA STUDIES 9607 · SEMESTER I</a:t>
-            </a:r>
-            <a:endParaRPr lang="en-US" sz="900" dirty="0"/>
-          </a:p>
-        </p:txBody>
-      </p:sp>
-      <p:sp>
-        <p:nvSpPr>
-          <p:cNvPr id="16" name="Text 14"/>
-          <p:cNvSpPr/>
-          <p:nvPr/>
-        </p:nvSpPr>
-        <p:spPr>
-          <a:xfrm>
-            <a:off x="10268712" y="6355080"/>
-            <a:ext cx="1097280" cy="365760"/>
-          </a:xfrm>
-          <a:prstGeom prst="rect">
-            <a:avLst/>
-          </a:prstGeom>
-          <a:noFill/>
-          <a:ln/>
-        </p:spPr>
-        <p:txBody>
-          <a:bodyPr wrap="square" lIns="0" tIns="0" rIns="0" bIns="0" rtlCol="0" anchor="ctr"/>
-          <a:lstStyle/>
-          <a:p>
-            <a:pPr algn="r" indent="0" marL="0">
-              <a:buNone/>
-            </a:pPr>
-            <a:r>
-              <a:rPr lang="en-US" sz="1600" dirty="0">
-                <a:solidFill>
-                  <a:srgbClr val="A3C1AD"/>
-                </a:solidFill>
-                <a:latin typeface="Georgia" pitchFamily="34" charset="0"/>
-                <a:ea typeface="Georgia" pitchFamily="34" charset="-122"/>
-                <a:cs typeface="Georgia" pitchFamily="34" charset="-120"/>
-              </a:rPr>
-              <a:t>03</a:t>
-            </a:r>
-            <a:endParaRPr lang="en-US" sz="1600" dirty="0"/>
           </a:p>
         </p:txBody>
       </p:sp>
@@ -5035,7 +6879,7 @@
                 <a:ea typeface="Arial" pitchFamily="34" charset="-122"/>
                 <a:cs typeface="Arial" pitchFamily="34" charset="-120"/>
               </a:rPr>
-              <a:t>MONDAY · POSTED TO THE BLOG</a:t>
+              <a:t>TWO POSTERS, TWO CONTRACTS</a:t>
             </a:r>
             <a:endParaRPr lang="en-US" sz="1100" dirty="0"/>
           </a:p>
@@ -5074,7 +6918,7 @@
                 <a:ea typeface="Arial" pitchFamily="34" charset="-122"/>
                 <a:cs typeface="Arial" pitchFamily="34" charset="-120"/>
               </a:rPr>
-              <a:t>A COMPONENT 1 RESEARCH ENTRY</a:t>
+              <a:t>WS 3.1: EXPECTATIONS AGAINST SIGNIFIERS</a:t>
             </a:r>
             <a:endParaRPr lang="en-US" sz="1100" dirty="0"/>
           </a:p>
@@ -5105,585 +6949,21 @@
       </p:sp>
       <p:sp>
         <p:nvSpPr>
-          <p:cNvPr id="5" name="Text 3"/>
-          <p:cNvSpPr/>
-          <p:nvPr/>
-        </p:nvSpPr>
-        <p:spPr>
-          <a:xfrm>
-            <a:off x="822960" y="1051560"/>
-            <a:ext cx="10543032" cy="777240"/>
-          </a:xfrm>
-          <a:prstGeom prst="rect">
-            <a:avLst/>
-          </a:prstGeom>
-          <a:noFill/>
-          <a:ln/>
-        </p:spPr>
-        <p:txBody>
-          <a:bodyPr wrap="square" lIns="0" tIns="0" rIns="0" bIns="0" rtlCol="0" anchor="ctr"/>
-          <a:lstStyle/>
-          <a:p>
-            <a:pPr indent="0" marL="0">
-              <a:buNone/>
-            </a:pPr>
-            <a:r>
-              <a:rPr lang="en-US" sz="3400" dirty="0">
-                <a:solidFill>
-                  <a:srgbClr val="24313F"/>
-                </a:solidFill>
-                <a:latin typeface="Georgia" pitchFamily="34" charset="0"/>
-                <a:ea typeface="Georgia" pitchFamily="34" charset="-122"/>
-                <a:cs typeface="Georgia" pitchFamily="34" charset="-120"/>
-              </a:rPr>
-              <a:t>What is your opening promising?</a:t>
-            </a:r>
-            <a:endParaRPr lang="en-US" sz="3400" dirty="0"/>
-          </a:p>
-        </p:txBody>
-      </p:sp>
-      <p:sp>
-        <p:nvSpPr>
-          <p:cNvPr id="6" name="Text 4"/>
-          <p:cNvSpPr/>
-          <p:nvPr/>
-        </p:nvSpPr>
-        <p:spPr>
-          <a:xfrm>
-            <a:off x="822960" y="1965960"/>
-            <a:ext cx="822960" cy="548640"/>
-          </a:xfrm>
-          <a:prstGeom prst="rect">
-            <a:avLst/>
-          </a:prstGeom>
-          <a:noFill/>
-          <a:ln/>
-        </p:spPr>
-        <p:txBody>
-          <a:bodyPr wrap="square" lIns="0" tIns="0" rIns="0" bIns="0" rtlCol="0" anchor="ctr"/>
-          <a:lstStyle/>
-          <a:p>
-            <a:pPr indent="0" marL="0">
-              <a:buNone/>
-            </a:pPr>
-            <a:r>
-              <a:rPr lang="en-US" sz="2600" dirty="0">
-                <a:solidFill>
-                  <a:srgbClr val="A3C1AD"/>
-                </a:solidFill>
-                <a:latin typeface="Georgia" pitchFamily="34" charset="0"/>
-                <a:ea typeface="Georgia" pitchFamily="34" charset="-122"/>
-                <a:cs typeface="Georgia" pitchFamily="34" charset="-120"/>
-              </a:rPr>
-              <a:t>01</a:t>
-            </a:r>
-            <a:endParaRPr lang="en-US" sz="2600" dirty="0"/>
-          </a:p>
-        </p:txBody>
-      </p:sp>
-      <p:sp>
-        <p:nvSpPr>
-          <p:cNvPr id="7" name="Text 5"/>
-          <p:cNvSpPr/>
-          <p:nvPr/>
-        </p:nvSpPr>
-        <p:spPr>
-          <a:xfrm>
-            <a:off x="1828800" y="1965960"/>
-            <a:ext cx="3108960" cy="548640"/>
-          </a:xfrm>
-          <a:prstGeom prst="rect">
-            <a:avLst/>
-          </a:prstGeom>
-          <a:noFill/>
-          <a:ln/>
-        </p:spPr>
-        <p:txBody>
-          <a:bodyPr wrap="square" lIns="0" tIns="0" rIns="0" bIns="0" rtlCol="0" anchor="ctr"/>
-          <a:lstStyle/>
-          <a:p>
-            <a:pPr indent="0" marL="0">
-              <a:buNone/>
-            </a:pPr>
-            <a:r>
-              <a:rPr lang="en-US" sz="2100" dirty="0">
-                <a:solidFill>
-                  <a:srgbClr val="4A6B5D"/>
-                </a:solidFill>
-                <a:latin typeface="Georgia" pitchFamily="34" charset="0"/>
-                <a:ea typeface="Georgia" pitchFamily="34" charset="-122"/>
-                <a:cs typeface="Georgia" pitchFamily="34" charset="-120"/>
-              </a:rPr>
-              <a:t>The genre</a:t>
-            </a:r>
-            <a:endParaRPr lang="en-US" sz="2100" dirty="0"/>
-          </a:p>
-        </p:txBody>
-      </p:sp>
-      <p:sp>
-        <p:nvSpPr>
-          <p:cNvPr id="8" name="Text 6"/>
-          <p:cNvSpPr/>
-          <p:nvPr/>
-        </p:nvSpPr>
-        <p:spPr>
-          <a:xfrm>
-            <a:off x="5120640" y="1965960"/>
-            <a:ext cx="6949440" cy="548640"/>
-          </a:xfrm>
-          <a:prstGeom prst="rect">
-            <a:avLst/>
-          </a:prstGeom>
-          <a:noFill/>
-          <a:ln/>
-        </p:spPr>
-        <p:txBody>
-          <a:bodyPr wrap="square" lIns="0" tIns="0" rIns="0" bIns="0" rtlCol="0" anchor="ctr"/>
-          <a:lstStyle/>
-          <a:p>
-            <a:pPr indent="0" marL="0">
-              <a:buNone/>
-            </a:pPr>
-            <a:r>
-              <a:rPr lang="en-US" sz="1650" dirty="0">
-                <a:solidFill>
-                  <a:srgbClr val="24313F"/>
-                </a:solidFill>
-                <a:latin typeface="Georgia" pitchFamily="34" charset="0"/>
-                <a:ea typeface="Georgia" pitchFamily="34" charset="-122"/>
-                <a:cs typeface="Georgia" pitchFamily="34" charset="-120"/>
-              </a:rPr>
-              <a:t>which one your opening is offering, named plainly</a:t>
-            </a:r>
-            <a:endParaRPr lang="en-US" sz="1650" dirty="0"/>
-          </a:p>
-        </p:txBody>
-      </p:sp>
-      <p:sp>
-        <p:nvSpPr>
-          <p:cNvPr id="9" name="Text 7"/>
-          <p:cNvSpPr/>
-          <p:nvPr/>
-        </p:nvSpPr>
-        <p:spPr>
-          <a:xfrm>
-            <a:off x="822960" y="2862072"/>
-            <a:ext cx="822960" cy="548640"/>
-          </a:xfrm>
-          <a:prstGeom prst="rect">
-            <a:avLst/>
-          </a:prstGeom>
-          <a:noFill/>
-          <a:ln/>
-        </p:spPr>
-        <p:txBody>
-          <a:bodyPr wrap="square" lIns="0" tIns="0" rIns="0" bIns="0" rtlCol="0" anchor="ctr"/>
-          <a:lstStyle/>
-          <a:p>
-            <a:pPr indent="0" marL="0">
-              <a:buNone/>
-            </a:pPr>
-            <a:r>
-              <a:rPr lang="en-US" sz="2600" dirty="0">
-                <a:solidFill>
-                  <a:srgbClr val="A3C1AD"/>
-                </a:solidFill>
-                <a:latin typeface="Georgia" pitchFamily="34" charset="0"/>
-                <a:ea typeface="Georgia" pitchFamily="34" charset="-122"/>
-                <a:cs typeface="Georgia" pitchFamily="34" charset="-120"/>
-              </a:rPr>
-              <a:t>02</a:t>
-            </a:r>
-            <a:endParaRPr lang="en-US" sz="2600" dirty="0"/>
-          </a:p>
-        </p:txBody>
-      </p:sp>
-      <p:sp>
-        <p:nvSpPr>
-          <p:cNvPr id="10" name="Text 8"/>
-          <p:cNvSpPr/>
-          <p:nvPr/>
-        </p:nvSpPr>
-        <p:spPr>
-          <a:xfrm>
-            <a:off x="1828800" y="2862072"/>
-            <a:ext cx="3108960" cy="548640"/>
-          </a:xfrm>
-          <a:prstGeom prst="rect">
-            <a:avLst/>
-          </a:prstGeom>
-          <a:noFill/>
-          <a:ln/>
-        </p:spPr>
-        <p:txBody>
-          <a:bodyPr wrap="square" lIns="0" tIns="0" rIns="0" bIns="0" rtlCol="0" anchor="ctr"/>
-          <a:lstStyle/>
-          <a:p>
-            <a:pPr indent="0" marL="0">
-              <a:buNone/>
-            </a:pPr>
-            <a:r>
-              <a:rPr lang="en-US" sz="2100" dirty="0">
-                <a:solidFill>
-                  <a:srgbClr val="4A6B5D"/>
-                </a:solidFill>
-                <a:latin typeface="Georgia" pitchFamily="34" charset="0"/>
-                <a:ea typeface="Georgia" pitchFamily="34" charset="-122"/>
-                <a:cs typeface="Georgia" pitchFamily="34" charset="-120"/>
-              </a:rPr>
-              <a:t>The promise</a:t>
-            </a:r>
-            <a:endParaRPr lang="en-US" sz="2100" dirty="0"/>
-          </a:p>
-        </p:txBody>
-      </p:sp>
-      <p:sp>
-        <p:nvSpPr>
-          <p:cNvPr id="11" name="Text 9"/>
-          <p:cNvSpPr/>
-          <p:nvPr/>
-        </p:nvSpPr>
-        <p:spPr>
-          <a:xfrm>
-            <a:off x="5120640" y="2862072"/>
-            <a:ext cx="6949440" cy="548640"/>
-          </a:xfrm>
-          <a:prstGeom prst="rect">
-            <a:avLst/>
-          </a:prstGeom>
-          <a:noFill/>
-          <a:ln/>
-        </p:spPr>
-        <p:txBody>
-          <a:bodyPr wrap="square" lIns="0" tIns="0" rIns="0" bIns="0" rtlCol="0" anchor="ctr"/>
-          <a:lstStyle/>
-          <a:p>
-            <a:pPr indent="0" marL="0">
-              <a:buNone/>
-            </a:pPr>
-            <a:r>
-              <a:rPr lang="en-US" sz="1650" dirty="0">
-                <a:solidFill>
-                  <a:srgbClr val="24313F"/>
-                </a:solidFill>
-                <a:latin typeface="Georgia" pitchFamily="34" charset="0"/>
-                <a:ea typeface="Georgia" pitchFamily="34" charset="-122"/>
-                <a:cs typeface="Georgia" pitchFamily="34" charset="-120"/>
-              </a:rPr>
-              <a:t>what the audience is being sold: fear, romance, awe, comfort</a:t>
-            </a:r>
-            <a:endParaRPr lang="en-US" sz="1650" dirty="0"/>
-          </a:p>
-        </p:txBody>
-      </p:sp>
-      <p:sp>
-        <p:nvSpPr>
-          <p:cNvPr id="12" name="Text 10"/>
-          <p:cNvSpPr/>
-          <p:nvPr/>
-        </p:nvSpPr>
-        <p:spPr>
-          <a:xfrm>
-            <a:off x="822960" y="3758184"/>
-            <a:ext cx="822960" cy="548640"/>
-          </a:xfrm>
-          <a:prstGeom prst="rect">
-            <a:avLst/>
-          </a:prstGeom>
-          <a:noFill/>
-          <a:ln/>
-        </p:spPr>
-        <p:txBody>
-          <a:bodyPr wrap="square" lIns="0" tIns="0" rIns="0" bIns="0" rtlCol="0" anchor="ctr"/>
-          <a:lstStyle/>
-          <a:p>
-            <a:pPr indent="0" marL="0">
-              <a:buNone/>
-            </a:pPr>
-            <a:r>
-              <a:rPr lang="en-US" sz="2600" dirty="0">
-                <a:solidFill>
-                  <a:srgbClr val="A3C1AD"/>
-                </a:solidFill>
-                <a:latin typeface="Georgia" pitchFamily="34" charset="0"/>
-                <a:ea typeface="Georgia" pitchFamily="34" charset="-122"/>
-                <a:cs typeface="Georgia" pitchFamily="34" charset="-120"/>
-              </a:rPr>
-              <a:t>03</a:t>
-            </a:r>
-            <a:endParaRPr lang="en-US" sz="2600" dirty="0"/>
-          </a:p>
-        </p:txBody>
-      </p:sp>
-      <p:sp>
-        <p:nvSpPr>
-          <p:cNvPr id="13" name="Text 11"/>
-          <p:cNvSpPr/>
-          <p:nvPr/>
-        </p:nvSpPr>
-        <p:spPr>
-          <a:xfrm>
-            <a:off x="1828800" y="3758184"/>
-            <a:ext cx="3108960" cy="548640"/>
-          </a:xfrm>
-          <a:prstGeom prst="rect">
-            <a:avLst/>
-          </a:prstGeom>
-          <a:noFill/>
-          <a:ln/>
-        </p:spPr>
-        <p:txBody>
-          <a:bodyPr wrap="square" lIns="0" tIns="0" rIns="0" bIns="0" rtlCol="0" anchor="ctr"/>
-          <a:lstStyle/>
-          <a:p>
-            <a:pPr indent="0" marL="0">
-              <a:buNone/>
-            </a:pPr>
-            <a:r>
-              <a:rPr lang="en-US" sz="2100" dirty="0">
-                <a:solidFill>
-                  <a:srgbClr val="4A6B5D"/>
-                </a:solidFill>
-                <a:latin typeface="Georgia" pitchFamily="34" charset="0"/>
-                <a:ea typeface="Georgia" pitchFamily="34" charset="-122"/>
-                <a:cs typeface="Georgia" pitchFamily="34" charset="-120"/>
-              </a:rPr>
-              <a:t>Three codes</a:t>
-            </a:r>
-            <a:endParaRPr lang="en-US" sz="2100" dirty="0"/>
-          </a:p>
-        </p:txBody>
-      </p:sp>
-      <p:sp>
-        <p:nvSpPr>
-          <p:cNvPr id="14" name="Text 12"/>
-          <p:cNvSpPr/>
-          <p:nvPr/>
-        </p:nvSpPr>
-        <p:spPr>
-          <a:xfrm>
-            <a:off x="5120640" y="3758184"/>
-            <a:ext cx="6949440" cy="548640"/>
-          </a:xfrm>
-          <a:prstGeom prst="rect">
-            <a:avLst/>
-          </a:prstGeom>
-          <a:noFill/>
-          <a:ln/>
-        </p:spPr>
-        <p:txBody>
-          <a:bodyPr wrap="square" lIns="0" tIns="0" rIns="0" bIns="0" rtlCol="0" anchor="ctr"/>
-          <a:lstStyle/>
-          <a:p>
-            <a:pPr indent="0" marL="0">
-              <a:buNone/>
-            </a:pPr>
-            <a:r>
-              <a:rPr lang="en-US" sz="1650" dirty="0">
-                <a:solidFill>
-                  <a:srgbClr val="24313F"/>
-                </a:solidFill>
-                <a:latin typeface="Georgia" pitchFamily="34" charset="0"/>
-                <a:ea typeface="Georgia" pitchFamily="34" charset="-122"/>
-                <a:cs typeface="Georgia" pitchFamily="34" charset="-120"/>
-              </a:rPr>
-              <a:t>which technical or symbolic codes carry that promise</a:t>
-            </a:r>
-            <a:endParaRPr lang="en-US" sz="1650" dirty="0"/>
-          </a:p>
-        </p:txBody>
-      </p:sp>
-      <p:sp>
-        <p:nvSpPr>
-          <p:cNvPr id="15" name="Text 13"/>
-          <p:cNvSpPr/>
-          <p:nvPr/>
-        </p:nvSpPr>
-        <p:spPr>
-          <a:xfrm>
-            <a:off x="822960" y="4654296"/>
-            <a:ext cx="822960" cy="548640"/>
-          </a:xfrm>
-          <a:prstGeom prst="rect">
-            <a:avLst/>
-          </a:prstGeom>
-          <a:noFill/>
-          <a:ln/>
-        </p:spPr>
-        <p:txBody>
-          <a:bodyPr wrap="square" lIns="0" tIns="0" rIns="0" bIns="0" rtlCol="0" anchor="ctr"/>
-          <a:lstStyle/>
-          <a:p>
-            <a:pPr indent="0" marL="0">
-              <a:buNone/>
-            </a:pPr>
-            <a:r>
-              <a:rPr lang="en-US" sz="2600" dirty="0">
-                <a:solidFill>
-                  <a:srgbClr val="A3C1AD"/>
-                </a:solidFill>
-                <a:latin typeface="Georgia" pitchFamily="34" charset="0"/>
-                <a:ea typeface="Georgia" pitchFamily="34" charset="-122"/>
-                <a:cs typeface="Georgia" pitchFamily="34" charset="-120"/>
-              </a:rPr>
-              <a:t>04</a:t>
-            </a:r>
-            <a:endParaRPr lang="en-US" sz="2600" dirty="0"/>
-          </a:p>
-        </p:txBody>
-      </p:sp>
-      <p:sp>
-        <p:nvSpPr>
-          <p:cNvPr id="16" name="Text 14"/>
-          <p:cNvSpPr/>
-          <p:nvPr/>
-        </p:nvSpPr>
-        <p:spPr>
-          <a:xfrm>
-            <a:off x="1828800" y="4654296"/>
-            <a:ext cx="3108960" cy="548640"/>
-          </a:xfrm>
-          <a:prstGeom prst="rect">
-            <a:avLst/>
-          </a:prstGeom>
-          <a:noFill/>
-          <a:ln/>
-        </p:spPr>
-        <p:txBody>
-          <a:bodyPr wrap="square" lIns="0" tIns="0" rIns="0" bIns="0" rtlCol="0" anchor="ctr"/>
-          <a:lstStyle/>
-          <a:p>
-            <a:pPr indent="0" marL="0">
-              <a:buNone/>
-            </a:pPr>
-            <a:r>
-              <a:rPr lang="en-US" sz="2100" dirty="0">
-                <a:solidFill>
-                  <a:srgbClr val="4A6B5D"/>
-                </a:solidFill>
-                <a:latin typeface="Georgia" pitchFamily="34" charset="0"/>
-                <a:ea typeface="Georgia" pitchFamily="34" charset="-122"/>
-                <a:cs typeface="Georgia" pitchFamily="34" charset="-120"/>
-              </a:rPr>
-              <a:t>The variation</a:t>
-            </a:r>
-            <a:endParaRPr lang="en-US" sz="2100" dirty="0"/>
-          </a:p>
-        </p:txBody>
-      </p:sp>
-      <p:sp>
-        <p:nvSpPr>
-          <p:cNvPr id="17" name="Text 15"/>
-          <p:cNvSpPr/>
-          <p:nvPr/>
-        </p:nvSpPr>
-        <p:spPr>
-          <a:xfrm>
-            <a:off x="5120640" y="4654296"/>
-            <a:ext cx="6949440" cy="548640"/>
-          </a:xfrm>
-          <a:prstGeom prst="rect">
-            <a:avLst/>
-          </a:prstGeom>
-          <a:noFill/>
-          <a:ln/>
-        </p:spPr>
-        <p:txBody>
-          <a:bodyPr wrap="square" lIns="0" tIns="0" rIns="0" bIns="0" rtlCol="0" anchor="ctr"/>
-          <a:lstStyle/>
-          <a:p>
-            <a:pPr indent="0" marL="0">
-              <a:buNone/>
-            </a:pPr>
-            <a:r>
-              <a:rPr lang="en-US" sz="1650" dirty="0">
-                <a:solidFill>
-                  <a:srgbClr val="24313F"/>
-                </a:solidFill>
-                <a:latin typeface="Georgia" pitchFamily="34" charset="0"/>
-                <a:ea typeface="Georgia" pitchFamily="34" charset="-122"/>
-                <a:cs typeface="Georgia" pitchFamily="34" charset="-120"/>
-              </a:rPr>
-              <a:t>what you will do differently, so it is not a copy</a:t>
-            </a:r>
-            <a:endParaRPr lang="en-US" sz="1650" dirty="0"/>
-          </a:p>
-        </p:txBody>
-      </p:sp>
-      <p:sp>
-        <p:nvSpPr>
-          <p:cNvPr id="18" name="Shape 16"/>
-          <p:cNvSpPr/>
-          <p:nvPr/>
-        </p:nvSpPr>
-        <p:spPr>
-          <a:xfrm>
-            <a:off x="822960" y="5623560"/>
-            <a:ext cx="10543032" cy="822960"/>
+          <p:cNvPr id="5" name="Shape 3"/>
+          <p:cNvSpPr/>
+          <p:nvPr/>
+        </p:nvSpPr>
+        <p:spPr>
+          <a:xfrm>
+            <a:off x="822960" y="1097280"/>
+            <a:ext cx="3717036" cy="4297680"/>
           </a:xfrm>
           <a:prstGeom prst="rect">
             <a:avLst/>
           </a:prstGeom>
           <a:solidFill>
-            <a:srgbClr val="E8EFE7"/>
+            <a:srgbClr val="FAF8F1"/>
           </a:solidFill>
-          <a:ln/>
-        </p:spPr>
-      </p:sp>
-      <p:sp>
-        <p:nvSpPr>
-          <p:cNvPr id="19" name="Text 17"/>
-          <p:cNvSpPr/>
-          <p:nvPr/>
-        </p:nvSpPr>
-        <p:spPr>
-          <a:xfrm>
-            <a:off x="1097280" y="5669280"/>
-            <a:ext cx="9994392" cy="731520"/>
-          </a:xfrm>
-          <a:prstGeom prst="rect">
-            <a:avLst/>
-          </a:prstGeom>
-          <a:noFill/>
-          <a:ln/>
-        </p:spPr>
-        <p:txBody>
-          <a:bodyPr wrap="square" lIns="0" tIns="0" rIns="0" bIns="0" rtlCol="0" anchor="ctr"/>
-          <a:lstStyle/>
-          <a:p>
-            <a:pPr indent="0" marL="0">
-              <a:buNone/>
-            </a:pPr>
-            <a:r>
-              <a:rPr lang="en-US" sz="1600" i="1" dirty="0">
-                <a:solidFill>
-                  <a:srgbClr val="4A6B5D"/>
-                </a:solidFill>
-                <a:latin typeface="Georgia" pitchFamily="34" charset="0"/>
-                <a:ea typeface="Georgia" pitchFamily="34" charset="-122"/>
-                <a:cs typeface="Georgia" pitchFamily="34" charset="-120"/>
-              </a:rPr>
-              <a:t>A group that cannot answer the last one has designed a pastiche, and now knows it eight days before A2. That is why genre sits here and not in November.</a:t>
-            </a:r>
-            <a:endParaRPr lang="en-US" sz="1600" dirty="0"/>
-          </a:p>
-        </p:txBody>
-      </p:sp>
-      <p:sp>
-        <p:nvSpPr>
-          <p:cNvPr id="20" name="Shape 18"/>
-          <p:cNvSpPr/>
-          <p:nvPr/>
-        </p:nvSpPr>
-        <p:spPr>
-          <a:xfrm>
-            <a:off x="822960" y="6382512"/>
-            <a:ext cx="10543032" cy="0"/>
-          </a:xfrm>
-          <a:prstGeom prst="line">
-            <a:avLst/>
-          </a:prstGeom>
-          <a:noFill/>
           <a:ln w="9525">
             <a:solidFill>
               <a:srgbClr val="D9D4C4"/>
@@ -5692,32 +6972,105 @@
           </a:ln>
         </p:spPr>
       </p:sp>
-      <p:sp>
-        <p:nvSpPr>
-          <p:cNvPr id="21" name="Text 19"/>
-          <p:cNvSpPr/>
-          <p:nvPr/>
-        </p:nvSpPr>
-        <p:spPr>
-          <a:xfrm>
-            <a:off x="822960" y="6419088"/>
-            <a:ext cx="7315200" cy="274320"/>
-          </a:xfrm>
-          <a:prstGeom prst="rect">
-            <a:avLst/>
-          </a:prstGeom>
-          <a:noFill/>
-          <a:ln/>
-        </p:spPr>
-        <p:txBody>
-          <a:bodyPr wrap="square" lIns="0" tIns="0" rIns="0" bIns="0" rtlCol="0" anchor="ctr"/>
-          <a:lstStyle/>
-          <a:p>
-            <a:pPr indent="0" marL="0">
-              <a:buNone/>
-            </a:pPr>
-            <a:r>
-              <a:rPr lang="en-US" sz="900" spc="150" kern="0" dirty="0">
+      <p:pic>
+        <p:nvPicPr>
+          <p:cNvPr id="6" name="Image 0" descr="/Users/dogan/Documents/Vaults/Courses/wiki/classes/media-studies/decks/_build/img/poster-conjuring.jpg">    </p:cNvPr>
+          <p:cNvPicPr>
+            <a:picLocks noChangeAspect="1"/>
+          </p:cNvPicPr>
+          <p:nvPr/>
+        </p:nvPicPr>
+        <p:blipFill>
+          <a:blip r:embed="rId1"/>
+          <a:stretch>
+            <a:fillRect/>
+          </a:stretch>
+        </p:blipFill>
+        <p:spPr>
+          <a:xfrm>
+            <a:off x="1189635" y="1170432"/>
+            <a:ext cx="2983686" cy="4151376"/>
+          </a:xfrm>
+          <a:prstGeom prst="rect">
+            <a:avLst/>
+          </a:prstGeom>
+        </p:spPr>
+      </p:pic>
+      <p:sp>
+        <p:nvSpPr>
+          <p:cNvPr id="7" name="Shape 4"/>
+          <p:cNvSpPr/>
+          <p:nvPr/>
+        </p:nvSpPr>
+        <p:spPr>
+          <a:xfrm>
+            <a:off x="4905756" y="1097280"/>
+            <a:ext cx="3717036" cy="4297680"/>
+          </a:xfrm>
+          <a:prstGeom prst="rect">
+            <a:avLst/>
+          </a:prstGeom>
+          <a:solidFill>
+            <a:srgbClr val="FAF8F1"/>
+          </a:solidFill>
+          <a:ln w="9525">
+            <a:solidFill>
+              <a:srgbClr val="D9D4C4"/>
+            </a:solidFill>
+            <a:prstDash val="solid"/>
+          </a:ln>
+        </p:spPr>
+      </p:sp>
+      <p:pic>
+        <p:nvPicPr>
+          <p:cNvPr id="8" name="Image 1" descr="/Users/dogan/Documents/Vaults/Courses/wiki/classes/media-studies/decks/_build/img/poster-freesolo.jpg">    </p:cNvPr>
+          <p:cNvPicPr>
+            <a:picLocks noChangeAspect="1"/>
+          </p:cNvPicPr>
+          <p:nvPr/>
+        </p:nvPicPr>
+        <p:blipFill>
+          <a:blip r:embed="rId2"/>
+          <a:stretch>
+            <a:fillRect/>
+          </a:stretch>
+        </p:blipFill>
+        <p:spPr>
+          <a:xfrm>
+            <a:off x="5297454" y="1170432"/>
+            <a:ext cx="2933639" cy="4151376"/>
+          </a:xfrm>
+          <a:prstGeom prst="rect">
+            <a:avLst/>
+          </a:prstGeom>
+        </p:spPr>
+      </p:pic>
+      <p:sp>
+        <p:nvSpPr>
+          <p:cNvPr id="9" name="Text 5"/>
+          <p:cNvSpPr/>
+          <p:nvPr/>
+        </p:nvSpPr>
+        <p:spPr>
+          <a:xfrm>
+            <a:off x="822960" y="5413248"/>
+            <a:ext cx="3717036" cy="274320"/>
+          </a:xfrm>
+          <a:prstGeom prst="rect">
+            <a:avLst/>
+          </a:prstGeom>
+          <a:noFill/>
+          <a:ln/>
+        </p:spPr>
+        <p:txBody>
+          <a:bodyPr wrap="square" lIns="0" tIns="0" rIns="0" bIns="0" rtlCol="0" anchor="ctr"/>
+          <a:lstStyle/>
+          <a:p>
+            <a:pPr algn="ctr" indent="0" marL="0">
+              <a:buNone/>
+            </a:pPr>
+            <a:r>
+              <a:rPr lang="en-US" sz="1000" dirty="0">
                 <a:solidFill>
                   <a:srgbClr val="7A7F72"/>
                 </a:solidFill>
@@ -5725,6 +7078,269 @@
                 <a:ea typeface="Arial" pitchFamily="34" charset="-122"/>
                 <a:cs typeface="Arial" pitchFamily="34" charset="-120"/>
               </a:rPr>
+              <a:t>The Conjuring (2013)</a:t>
+            </a:r>
+            <a:endParaRPr lang="en-US" sz="1000" dirty="0"/>
+          </a:p>
+        </p:txBody>
+      </p:sp>
+      <p:sp>
+        <p:nvSpPr>
+          <p:cNvPr id="10" name="Text 6"/>
+          <p:cNvSpPr/>
+          <p:nvPr/>
+        </p:nvSpPr>
+        <p:spPr>
+          <a:xfrm>
+            <a:off x="4905756" y="5413248"/>
+            <a:ext cx="3717036" cy="274320"/>
+          </a:xfrm>
+          <a:prstGeom prst="rect">
+            <a:avLst/>
+          </a:prstGeom>
+          <a:noFill/>
+          <a:ln/>
+        </p:spPr>
+        <p:txBody>
+          <a:bodyPr wrap="square" lIns="0" tIns="0" rIns="0" bIns="0" rtlCol="0" anchor="ctr"/>
+          <a:lstStyle/>
+          <a:p>
+            <a:pPr algn="ctr" indent="0" marL="0">
+              <a:buNone/>
+            </a:pPr>
+            <a:r>
+              <a:rPr lang="en-US" sz="1000" dirty="0">
+                <a:solidFill>
+                  <a:srgbClr val="7A7F72"/>
+                </a:solidFill>
+                <a:latin typeface="Arial" pitchFamily="34" charset="0"/>
+                <a:ea typeface="Arial" pitchFamily="34" charset="-122"/>
+                <a:cs typeface="Arial" pitchFamily="34" charset="-120"/>
+              </a:rPr>
+              <a:t>Free Solo (2018)</a:t>
+            </a:r>
+            <a:endParaRPr lang="en-US" sz="1000" dirty="0"/>
+          </a:p>
+        </p:txBody>
+      </p:sp>
+      <p:sp>
+        <p:nvSpPr>
+          <p:cNvPr id="11" name="Text 7"/>
+          <p:cNvSpPr/>
+          <p:nvPr/>
+        </p:nvSpPr>
+        <p:spPr>
+          <a:xfrm>
+            <a:off x="9079992" y="1371600"/>
+            <a:ext cx="2468880" cy="411480"/>
+          </a:xfrm>
+          <a:prstGeom prst="rect">
+            <a:avLst/>
+          </a:prstGeom>
+          <a:noFill/>
+          <a:ln/>
+        </p:spPr>
+        <p:txBody>
+          <a:bodyPr wrap="square" lIns="0" tIns="0" rIns="0" bIns="0" rtlCol="0" anchor="ctr"/>
+          <a:lstStyle/>
+          <a:p>
+            <a:pPr indent="0" marL="0">
+              <a:buNone/>
+            </a:pPr>
+            <a:r>
+              <a:rPr lang="en-US" sz="1300" b="1" spc="100" kern="0" dirty="0">
+                <a:solidFill>
+                  <a:srgbClr val="4A6B5D"/>
+                </a:solidFill>
+                <a:latin typeface="Arial" pitchFamily="34" charset="0"/>
+                <a:ea typeface="Arial" pitchFamily="34" charset="-122"/>
+                <a:cs typeface="Arial" pitchFamily="34" charset="-120"/>
+              </a:rPr>
+              <a:t>Expectations</a:t>
+            </a:r>
+            <a:endParaRPr lang="en-US" sz="1300" dirty="0"/>
+          </a:p>
+        </p:txBody>
+      </p:sp>
+      <p:sp>
+        <p:nvSpPr>
+          <p:cNvPr id="12" name="Text 8"/>
+          <p:cNvSpPr/>
+          <p:nvPr/>
+        </p:nvSpPr>
+        <p:spPr>
+          <a:xfrm>
+            <a:off x="9079992" y="1810512"/>
+            <a:ext cx="2468880" cy="1463040"/>
+          </a:xfrm>
+          <a:prstGeom prst="rect">
+            <a:avLst/>
+          </a:prstGeom>
+          <a:noFill/>
+          <a:ln/>
+        </p:spPr>
+        <p:txBody>
+          <a:bodyPr wrap="square" lIns="0" tIns="0" rIns="0" bIns="0" rtlCol="0" anchor="t"/>
+          <a:lstStyle/>
+          <a:p>
+            <a:pPr indent="0" marL="0">
+              <a:lnSpc>
+                <a:spcPts val="1800"/>
+              </a:lnSpc>
+              <a:buNone/>
+            </a:pPr>
+            <a:r>
+              <a:rPr lang="en-US" sz="1350" dirty="0">
+                <a:solidFill>
+                  <a:srgbClr val="24313F"/>
+                </a:solidFill>
+                <a:latin typeface="Georgia" pitchFamily="34" charset="0"/>
+                <a:ea typeface="Georgia" pitchFamily="34" charset="-122"/>
+                <a:cs typeface="Georgia" pitchFamily="34" charset="-120"/>
+              </a:rPr>
+              <a:t>What does each poster promise the evening will feel like?</a:t>
+            </a:r>
+            <a:endParaRPr lang="en-US" sz="1350" dirty="0"/>
+          </a:p>
+        </p:txBody>
+      </p:sp>
+      <p:sp>
+        <p:nvSpPr>
+          <p:cNvPr id="13" name="Text 9"/>
+          <p:cNvSpPr/>
+          <p:nvPr/>
+        </p:nvSpPr>
+        <p:spPr>
+          <a:xfrm>
+            <a:off x="9079992" y="3520440"/>
+            <a:ext cx="2468880" cy="411480"/>
+          </a:xfrm>
+          <a:prstGeom prst="rect">
+            <a:avLst/>
+          </a:prstGeom>
+          <a:noFill/>
+          <a:ln/>
+        </p:spPr>
+        <p:txBody>
+          <a:bodyPr wrap="square" lIns="0" tIns="0" rIns="0" bIns="0" rtlCol="0" anchor="ctr"/>
+          <a:lstStyle/>
+          <a:p>
+            <a:pPr indent="0" marL="0">
+              <a:buNone/>
+            </a:pPr>
+            <a:r>
+              <a:rPr lang="en-US" sz="1300" b="1" spc="100" kern="0" dirty="0">
+                <a:solidFill>
+                  <a:srgbClr val="4A6B5D"/>
+                </a:solidFill>
+                <a:latin typeface="Arial" pitchFamily="34" charset="0"/>
+                <a:ea typeface="Arial" pitchFamily="34" charset="-122"/>
+                <a:cs typeface="Arial" pitchFamily="34" charset="-120"/>
+              </a:rPr>
+              <a:t>Signifiers</a:t>
+            </a:r>
+            <a:endParaRPr lang="en-US" sz="1300" dirty="0"/>
+          </a:p>
+        </p:txBody>
+      </p:sp>
+      <p:sp>
+        <p:nvSpPr>
+          <p:cNvPr id="14" name="Text 10"/>
+          <p:cNvSpPr/>
+          <p:nvPr/>
+        </p:nvSpPr>
+        <p:spPr>
+          <a:xfrm>
+            <a:off x="9079992" y="3959352"/>
+            <a:ext cx="2468880" cy="1463040"/>
+          </a:xfrm>
+          <a:prstGeom prst="rect">
+            <a:avLst/>
+          </a:prstGeom>
+          <a:noFill/>
+          <a:ln/>
+        </p:spPr>
+        <p:txBody>
+          <a:bodyPr wrap="square" lIns="0" tIns="0" rIns="0" bIns="0" rtlCol="0" anchor="t"/>
+          <a:lstStyle/>
+          <a:p>
+            <a:pPr indent="0" marL="0">
+              <a:lnSpc>
+                <a:spcPts val="1800"/>
+              </a:lnSpc>
+              <a:buNone/>
+            </a:pPr>
+            <a:r>
+              <a:rPr lang="en-US" sz="1350" dirty="0">
+                <a:solidFill>
+                  <a:srgbClr val="24313F"/>
+                </a:solidFill>
+                <a:latin typeface="Georgia" pitchFamily="34" charset="0"/>
+                <a:ea typeface="Georgia" pitchFamily="34" charset="-122"/>
+                <a:cs typeface="Georgia" pitchFamily="34" charset="-120"/>
+              </a:rPr>
+              <a:t>Which exact elements carry the promise: type, palette, light, face, body?</a:t>
+            </a:r>
+            <a:endParaRPr lang="en-US" sz="1350" dirty="0"/>
+          </a:p>
+        </p:txBody>
+      </p:sp>
+      <p:sp>
+        <p:nvSpPr>
+          <p:cNvPr id="15" name="Shape 11"/>
+          <p:cNvSpPr/>
+          <p:nvPr/>
+        </p:nvSpPr>
+        <p:spPr>
+          <a:xfrm>
+            <a:off x="822960" y="6382512"/>
+            <a:ext cx="10543032" cy="0"/>
+          </a:xfrm>
+          <a:prstGeom prst="line">
+            <a:avLst/>
+          </a:prstGeom>
+          <a:noFill/>
+          <a:ln w="9525">
+            <a:solidFill>
+              <a:srgbClr val="D9D4C4"/>
+            </a:solidFill>
+            <a:prstDash val="solid"/>
+          </a:ln>
+        </p:spPr>
+      </p:sp>
+      <p:sp>
+        <p:nvSpPr>
+          <p:cNvPr id="16" name="Text 12"/>
+          <p:cNvSpPr/>
+          <p:nvPr/>
+        </p:nvSpPr>
+        <p:spPr>
+          <a:xfrm>
+            <a:off x="822960" y="6419088"/>
+            <a:ext cx="7315200" cy="274320"/>
+          </a:xfrm>
+          <a:prstGeom prst="rect">
+            <a:avLst/>
+          </a:prstGeom>
+          <a:noFill/>
+          <a:ln/>
+        </p:spPr>
+        <p:txBody>
+          <a:bodyPr wrap="square" lIns="0" tIns="0" rIns="0" bIns="0" rtlCol="0" anchor="ctr"/>
+          <a:lstStyle/>
+          <a:p>
+            <a:pPr indent="0" marL="0">
+              <a:buNone/>
+            </a:pPr>
+            <a:r>
+              <a:rPr lang="en-US" sz="900" spc="150" kern="0" dirty="0">
+                <a:solidFill>
+                  <a:srgbClr val="7A7F72"/>
+                </a:solidFill>
+                <a:latin typeface="Arial" pitchFamily="34" charset="0"/>
+                <a:ea typeface="Arial" pitchFamily="34" charset="-122"/>
+                <a:cs typeface="Arial" pitchFamily="34" charset="-120"/>
+              </a:rPr>
               <a:t>MEDIA STUDIES 9607 · SEMESTER I</a:t>
             </a:r>
             <a:endParaRPr lang="en-US" sz="900" dirty="0"/>
@@ -5733,7 +7349,7 @@
       </p:sp>
       <p:sp>
         <p:nvSpPr>
-          <p:cNvPr id="22" name="Text 20"/>
+          <p:cNvPr id="17" name="Text 13"/>
           <p:cNvSpPr/>
           <p:nvPr/>
         </p:nvSpPr>

--- a/content/decks/media-studies/media-studies-s1-lesson-09-genre.pptx
+++ b/content/decks/media-studies/media-studies-s1-lesson-09-genre.pptx
@@ -2367,12 +2367,29 @@
           <a:p>
             <a:pPr indent="0" marL="0">
               <a:lnSpc>
-                <a:spcPts val="2400"/>
+                <a:spcPts val="2300"/>
               </a:lnSpc>
               <a:buNone/>
             </a:pPr>
             <a:r>
-              <a:rPr lang="en-US" sz="1700" dirty="0">
+              <a:rPr lang="en-US" sz="1400" b="1" spc="100" kern="0" dirty="0">
+                <a:solidFill>
+                  <a:srgbClr val="4A6B5D"/>
+                </a:solidFill>
+                <a:latin typeface="Arial" pitchFamily="34" charset="0"/>
+                <a:ea typeface="Arial" pitchFamily="34" charset="-122"/>
+                <a:cs typeface="Arial" pitchFamily="34" charset="-120"/>
+              </a:rPr>
+              <a:t>TERM   </a:t>
+            </a:r>
+            <a:pPr indent="0" marL="0">
+              <a:lnSpc>
+                <a:spcPts val="2300"/>
+              </a:lnSpc>
+              <a:buNone/>
+            </a:pPr>
+            <a:r>
+              <a:rPr lang="en-US" sz="1600" dirty="0">
                 <a:solidFill>
                   <a:srgbClr val="24313F"/>
                 </a:solidFill>
@@ -2380,28 +2397,19 @@
                 <a:ea typeface="Georgia" pitchFamily="34" charset="-122"/>
                 <a:cs typeface="Georgia" pitchFamily="34" charset="-120"/>
               </a:rPr>
-              <a:t>A romantic comedy. With zombies. The tagline names both parents, because the film needs both audiences: the romcom's promise of warmth and the zombie film's promise of chaos, each kept.</a:t>
-            </a:r>
-            <a:endParaRPr lang="en-US" sz="1700" dirty="0"/>
+              <a:t>Hybridity: one text holding two genre contracts at once.</a:t>
+            </a:r>
+            <a:endParaRPr lang="en-US" sz="1400" dirty="0"/>
           </a:p>
           <a:p>
             <a:pPr indent="0" marL="0">
               <a:lnSpc>
-                <a:spcPts val="2400"/>
+                <a:spcPts val="2300"/>
               </a:lnSpc>
               <a:buNone/>
             </a:pPr>
-            <a:endParaRPr lang="en-US" sz="1700" dirty="0"/>
-          </a:p>
-          <a:p>
-            <a:pPr indent="0" marL="0">
-              <a:lnSpc>
-                <a:spcPts val="2400"/>
-              </a:lnSpc>
-              <a:buNone/>
-            </a:pPr>
-            <a:r>
-              <a:rPr lang="en-US" sz="1700" dirty="0">
+            <a:r>
+              <a:rPr lang="en-US" sz="1600" dirty="0">
                 <a:solidFill>
                   <a:srgbClr val="24313F"/>
                 </a:solidFill>
@@ -2409,9 +2417,46 @@
                 <a:ea typeface="Georgia" pitchFamily="34" charset="-122"/>
                 <a:cs typeface="Georgia" pitchFamily="34" charset="-120"/>
               </a:rPr>
-              <a:t>Genres are not boxes. Name one text that sits across two, and say what each parent contributes. Studios build hybrids to reach two audiences with one budget.</a:t>
-            </a:r>
-            <a:endParaRPr lang="en-US" sz="1700" dirty="0"/>
+              <a:t>A romantic comedy, with zombies. The film keeps both promises: the warmth and the chaos. It needs both audiences.</a:t>
+            </a:r>
+            <a:endParaRPr lang="en-US" sz="1400" dirty="0"/>
+          </a:p>
+          <a:p>
+            <a:pPr indent="0" marL="0">
+              <a:lnSpc>
+                <a:spcPts val="2300"/>
+              </a:lnSpc>
+              <a:buNone/>
+            </a:pPr>
+            <a:r>
+              <a:rPr lang="en-US" sz="1400" b="1" spc="100" kern="0" dirty="0">
+                <a:solidFill>
+                  <a:srgbClr val="4A6B5D"/>
+                </a:solidFill>
+                <a:latin typeface="Arial" pitchFamily="34" charset="0"/>
+                <a:ea typeface="Arial" pitchFamily="34" charset="-122"/>
+                <a:cs typeface="Arial" pitchFamily="34" charset="-120"/>
+              </a:rPr>
+              <a:t>TASK   </a:t>
+            </a:r>
+            <a:pPr indent="0" marL="0">
+              <a:lnSpc>
+                <a:spcPts val="2300"/>
+              </a:lnSpc>
+              <a:buNone/>
+            </a:pPr>
+            <a:r>
+              <a:rPr lang="en-US" sz="1600" dirty="0">
+                <a:solidFill>
+                  <a:srgbClr val="24313F"/>
+                </a:solidFill>
+                <a:latin typeface="Georgia" pitchFamily="34" charset="0"/>
+                <a:ea typeface="Georgia" pitchFamily="34" charset="-122"/>
+                <a:cs typeface="Georgia" pitchFamily="34" charset="-120"/>
+              </a:rPr>
+              <a:t>Name one hybrid text. Say what each parent genre contributes.</a:t>
+            </a:r>
+            <a:endParaRPr lang="en-US" sz="1400" dirty="0"/>
           </a:p>
         </p:txBody>
       </p:sp>
@@ -2868,7 +2913,7 @@
         <p:spPr>
           <a:xfrm>
             <a:off x="822960" y="5120640"/>
-            <a:ext cx="10424160" cy="640080"/>
+            <a:ext cx="10424160" cy="685800"/>
           </a:xfrm>
           <a:prstGeom prst="rect">
             <a:avLst/>
@@ -2882,12 +2927,29 @@
           <a:p>
             <a:pPr indent="0" marL="0">
               <a:lnSpc>
-                <a:spcPts val="2200"/>
+                <a:spcPts val="2100"/>
               </a:lnSpc>
               <a:buNone/>
             </a:pPr>
             <a:r>
-              <a:rPr lang="en-US" sz="1650" i="1" dirty="0">
+              <a:rPr lang="en-US" sz="1350" b="1" spc="100" kern="0" dirty="0">
+                <a:solidFill>
+                  <a:srgbClr val="4A6B5D"/>
+                </a:solidFill>
+                <a:latin typeface="Arial" pitchFamily="34" charset="0"/>
+                <a:ea typeface="Arial" pitchFamily="34" charset="-122"/>
+                <a:cs typeface="Arial" pitchFamily="34" charset="-120"/>
+              </a:rPr>
+              <a:t>TASK   </a:t>
+            </a:r>
+            <a:pPr indent="0" marL="0">
+              <a:lnSpc>
+                <a:spcPts val="2100"/>
+              </a:lnSpc>
+              <a:buNone/>
+            </a:pPr>
+            <a:r>
+              <a:rPr lang="en-US" sz="1550" dirty="0">
                 <a:solidFill>
                   <a:srgbClr val="4A6B5D"/>
                 </a:solidFill>
@@ -2895,9 +2957,9 @@
                 <a:ea typeface="Georgia" pitchFamily="34" charset="-122"/>
                 <a:cs typeface="Georgia" pitchFamily="34" charset="-120"/>
               </a:rPr>
-              <a:t>Four clips, titles and credits removed, four candidate genres in the four corners. Commit by moving, then defend the corner from codes alone, two pieces of evidence noted.</a:t>
-            </a:r>
-            <a:endParaRPr lang="en-US" sz="1650" dirty="0"/>
+              <a:t>Four clips, titles removed. Four genres, four corners. Move to your corner, then defend it with two pieces of code evidence.</a:t>
+            </a:r>
+            <a:endParaRPr lang="en-US" sz="1350" dirty="0"/>
           </a:p>
         </p:txBody>
       </p:sp>
@@ -3670,24 +3732,44 @@
         </p:nvSpPr>
         <p:spPr>
           <a:xfrm>
-            <a:off x="1097280" y="5669280"/>
-            <a:ext cx="9994392" cy="731520"/>
-          </a:xfrm>
-          <a:prstGeom prst="rect">
-            <a:avLst/>
-          </a:prstGeom>
-          <a:noFill/>
-          <a:ln/>
-        </p:spPr>
-        <p:txBody>
-          <a:bodyPr wrap="square" lIns="0" tIns="0" rIns="0" bIns="0" rtlCol="0" anchor="ctr"/>
-          <a:lstStyle/>
-          <a:p>
-            <a:pPr indent="0" marL="0">
-              <a:buNone/>
-            </a:pPr>
-            <a:r>
-              <a:rPr lang="en-US" sz="1600" i="1" dirty="0">
+            <a:off x="1097280" y="5806440"/>
+            <a:ext cx="9994392" cy="502920"/>
+          </a:xfrm>
+          <a:prstGeom prst="rect">
+            <a:avLst/>
+          </a:prstGeom>
+          <a:noFill/>
+          <a:ln/>
+        </p:spPr>
+        <p:txBody>
+          <a:bodyPr wrap="square" lIns="0" tIns="0" rIns="0" bIns="0" rtlCol="0" anchor="t"/>
+          <a:lstStyle/>
+          <a:p>
+            <a:pPr indent="0" marL="0">
+              <a:lnSpc>
+                <a:spcPts val="2000"/>
+              </a:lnSpc>
+              <a:buNone/>
+            </a:pPr>
+            <a:r>
+              <a:rPr lang="en-US" sz="1300" b="1" spc="100" kern="0" dirty="0">
+                <a:solidFill>
+                  <a:srgbClr val="4A6B5D"/>
+                </a:solidFill>
+                <a:latin typeface="Arial" pitchFamily="34" charset="0"/>
+                <a:ea typeface="Arial" pitchFamily="34" charset="-122"/>
+                <a:cs typeface="Arial" pitchFamily="34" charset="-120"/>
+              </a:rPr>
+              <a:t>WHY NOW   </a:t>
+            </a:r>
+            <a:pPr indent="0" marL="0">
+              <a:lnSpc>
+                <a:spcPts val="2000"/>
+              </a:lnSpc>
+              <a:buNone/>
+            </a:pPr>
+            <a:r>
+              <a:rPr lang="en-US" sz="1500" i="1" dirty="0">
                 <a:solidFill>
                   <a:srgbClr val="4A6B5D"/>
                 </a:solidFill>
@@ -3695,9 +3777,9 @@
                 <a:ea typeface="Georgia" pitchFamily="34" charset="-122"/>
                 <a:cs typeface="Georgia" pitchFamily="34" charset="-120"/>
               </a:rPr>
-              <a:t>A group that cannot answer the last one has designed a pastiche, and now knows it eight days before A2. That is why genre sits here and not in November.</a:t>
-            </a:r>
-            <a:endParaRPr lang="en-US" sz="1600" dirty="0"/>
+              <a:t>A group that cannot answer question four has designed a copy, and learns it eight days before A2, with time to fix it.</a:t>
+            </a:r>
+            <a:endParaRPr lang="en-US" sz="1300" dirty="0"/>
           </a:p>
         </p:txBody>
       </p:sp>
@@ -3994,7 +4076,7 @@
                 <a:ea typeface="Georgia" pitchFamily="34" charset="-122"/>
                 <a:cs typeface="Georgia" pitchFamily="34" charset="-120"/>
               </a:rPr>
-              <a:t>Lesson 10. Todorov and Propp with their failure conditions attached, then the audit that makes A2 safe.</a:t>
+              <a:t>Lesson 10. Todorov and Propp, with the cases where they fail, then the blog audit that makes A2 safe.</a:t>
             </a:r>
             <a:endParaRPr lang="en-US" sz="2200" dirty="0"/>
           </a:p>
@@ -4677,7 +4759,7 @@
                 <a:ea typeface="Arial" pitchFamily="34" charset="-122"/>
                 <a:cs typeface="Arial" pitchFamily="34" charset="-120"/>
               </a:rPr>
-              <a:t>Two skulls, three centuries apart. The recognition was instant, and it happened before a single film term. That recognition is genre working.</a:t>
+              <a:t>Two skulls, three hundred years apart. You recognized the connection instantly, before any film term. That instant recognition is genre at work.</a:t>
             </a:r>
             <a:endParaRPr lang="en-US" sz="1200" dirty="0"/>
           </a:p>
@@ -4858,6 +4940,65 @@
           </a:p>
         </p:txBody>
       </p:sp>
+      <p:sp>
+        <p:nvSpPr>
+          <p:cNvPr id="6" name="Text 4"/>
+          <p:cNvSpPr/>
+          <p:nvPr/>
+        </p:nvSpPr>
+        <p:spPr>
+          <a:xfrm>
+            <a:off x="822960" y="5806440"/>
+            <a:ext cx="10424160" cy="640080"/>
+          </a:xfrm>
+          <a:prstGeom prst="rect">
+            <a:avLst/>
+          </a:prstGeom>
+          <a:noFill/>
+          <a:ln/>
+        </p:spPr>
+        <p:txBody>
+          <a:bodyPr wrap="square" lIns="0" tIns="0" rIns="0" bIns="0" rtlCol="0" anchor="t"/>
+          <a:lstStyle/>
+          <a:p>
+            <a:pPr indent="0" marL="0">
+              <a:lnSpc>
+                <a:spcPts val="1900"/>
+              </a:lnSpc>
+              <a:buNone/>
+            </a:pPr>
+            <a:r>
+              <a:rPr lang="en-US" sz="1200" b="1" spc="100" kern="0" dirty="0">
+                <a:solidFill>
+                  <a:srgbClr val="7A7F72"/>
+                </a:solidFill>
+                <a:latin typeface="Arial" pitchFamily="34" charset="0"/>
+                <a:ea typeface="Arial" pitchFamily="34" charset="-122"/>
+                <a:cs typeface="Arial" pitchFamily="34" charset="-120"/>
+              </a:rPr>
+              <a:t>IN PLAIN WORDS   </a:t>
+            </a:r>
+            <a:pPr indent="0" marL="0">
+              <a:lnSpc>
+                <a:spcPts val="1900"/>
+              </a:lnSpc>
+              <a:buNone/>
+            </a:pPr>
+            <a:r>
+              <a:rPr lang="en-US" sz="1400" i="1" dirty="0">
+                <a:solidFill>
+                  <a:srgbClr val="4A6B5D"/>
+                </a:solidFill>
+                <a:latin typeface="Georgia" pitchFamily="34" charset="0"/>
+                <a:ea typeface="Georgia" pitchFamily="34" charset="-122"/>
+                <a:cs typeface="Georgia" pitchFamily="34" charset="-120"/>
+              </a:rPr>
+              <a:t>A genre repeats what audiences expect, and changes just enough. The change is what sells the ticket.</a:t>
+            </a:r>
+            <a:endParaRPr lang="en-US" sz="1200" dirty="0"/>
+          </a:p>
+        </p:txBody>
+      </p:sp>
     </p:spTree>
   </p:cSld>
   <p:clrMapOvr>
@@ -5128,7 +5269,7 @@
                 <a:ea typeface="Georgia" pitchFamily="34" charset="-122"/>
                 <a:cs typeface="Georgia" pitchFamily="34" charset="-120"/>
               </a:rPr>
-              <a:t>A pre-sold, budgetable product. Genre lowers the risk: audiences already know roughly what they are buying.</a:t>
+              <a:t>A pre-sold product with a predictable budget. Genre lowers the risk: audiences already know what they are buying.</a:t>
             </a:r>
             <a:endParaRPr lang="en-US" sz="1700" dirty="0"/>
           </a:p>
@@ -5270,23 +5411,26 @@
         <p:spPr>
           <a:xfrm>
             <a:off x="822960" y="5394960"/>
-            <a:ext cx="10058400" cy="457200"/>
-          </a:xfrm>
-          <a:prstGeom prst="rect">
-            <a:avLst/>
-          </a:prstGeom>
-          <a:noFill/>
-          <a:ln/>
-        </p:spPr>
-        <p:txBody>
-          <a:bodyPr wrap="square" lIns="0" tIns="0" rIns="0" bIns="0" rtlCol="0" anchor="ctr"/>
-          <a:lstStyle/>
-          <a:p>
-            <a:pPr indent="0" marL="0">
-              <a:buNone/>
-            </a:pPr>
-            <a:r>
-              <a:rPr lang="en-US" sz="1250" i="1" dirty="0">
+            <a:ext cx="10058400" cy="320040"/>
+          </a:xfrm>
+          <a:prstGeom prst="rect">
+            <a:avLst/>
+          </a:prstGeom>
+          <a:noFill/>
+          <a:ln/>
+        </p:spPr>
+        <p:txBody>
+          <a:bodyPr wrap="square" lIns="0" tIns="0" rIns="0" bIns="0" rtlCol="0" anchor="t"/>
+          <a:lstStyle/>
+          <a:p>
+            <a:pPr indent="0" marL="0">
+              <a:lnSpc>
+                <a:spcPts val="1700"/>
+              </a:lnSpc>
+              <a:buNone/>
+            </a:pPr>
+            <a:r>
+              <a:rPr lang="en-US" sz="1050" b="1" spc="100" kern="0" dirty="0">
                 <a:solidFill>
                   <a:srgbClr val="7A7F72"/>
                 </a:solidFill>
@@ -5294,9 +5438,26 @@
                 <a:ea typeface="Arial" pitchFamily="34" charset="-122"/>
                 <a:cs typeface="Arial" pitchFamily="34" charset="-120"/>
               </a:rPr>
-              <a:t>Exit question: why does the industry need genre more than we do?</a:t>
-            </a:r>
-            <a:endParaRPr lang="en-US" sz="1250" dirty="0"/>
+              <a:t>EXIT QUESTION   </a:t>
+            </a:r>
+            <a:pPr indent="0" marL="0">
+              <a:lnSpc>
+                <a:spcPts val="1700"/>
+              </a:lnSpc>
+              <a:buNone/>
+            </a:pPr>
+            <a:r>
+              <a:rPr lang="en-US" sz="1250" dirty="0">
+                <a:solidFill>
+                  <a:srgbClr val="7A7F72"/>
+                </a:solidFill>
+                <a:latin typeface="Georgia" pitchFamily="34" charset="0"/>
+                <a:ea typeface="Georgia" pitchFamily="34" charset="-122"/>
+                <a:cs typeface="Georgia" pitchFamily="34" charset="-120"/>
+              </a:rPr>
+              <a:t>Why does the industry need genre more than we do?</a:t>
+            </a:r>
+            <a:endParaRPr lang="en-US" sz="1050" dirty="0"/>
           </a:p>
         </p:txBody>
       </p:sp>
@@ -5752,7 +5913,7 @@
         <p:spPr>
           <a:xfrm>
             <a:off x="822960" y="5852160"/>
-            <a:ext cx="10543032" cy="457200"/>
+            <a:ext cx="10543032" cy="438912"/>
           </a:xfrm>
           <a:prstGeom prst="rect">
             <a:avLst/>
@@ -5766,12 +5927,29 @@
           <a:p>
             <a:pPr indent="0" marL="0">
               <a:lnSpc>
-                <a:spcPts val="1700"/>
+                <a:spcPts val="1600"/>
               </a:lnSpc>
               <a:buNone/>
             </a:pPr>
             <a:r>
-              <a:rPr lang="en-US" sz="1300" i="1" dirty="0">
+              <a:rPr lang="en-US" sz="1000" b="1" spc="100" kern="0" dirty="0">
+                <a:solidFill>
+                  <a:srgbClr val="4A6B5D"/>
+                </a:solidFill>
+                <a:latin typeface="Arial" pitchFamily="34" charset="0"/>
+                <a:ea typeface="Arial" pitchFamily="34" charset="-122"/>
+                <a:cs typeface="Arial" pitchFamily="34" charset="-120"/>
+              </a:rPr>
+              <a:t>KEY POINT   </a:t>
+            </a:r>
+            <a:pPr indent="0" marL="0">
+              <a:lnSpc>
+                <a:spcPts val="1600"/>
+              </a:lnSpc>
+              <a:buNone/>
+            </a:pPr>
+            <a:r>
+              <a:rPr lang="en-US" sz="1200" dirty="0">
                 <a:solidFill>
                   <a:srgbClr val="4A6B5D"/>
                 </a:solidFill>
@@ -5779,9 +5957,46 @@
                 <a:ea typeface="Georgia" pitchFamily="34" charset="-122"/>
                 <a:cs typeface="Georgia" pitchFamily="34" charset="-120"/>
               </a:rPr>
-              <a:t>Same mask, same type, same faces arranged the same way: the repetition is the promise. The number is the difference, and the difference is what sells the ticket twice more. Neale's economy of genre, in three posters.</a:t>
-            </a:r>
-            <a:endParaRPr lang="en-US" sz="1300" dirty="0"/>
+              <a:t>Same mask, same title style, same faces: repetition is the promise. The number is the difference that sells the ticket again.</a:t>
+            </a:r>
+            <a:endParaRPr lang="en-US" sz="1000" dirty="0"/>
+          </a:p>
+          <a:p>
+            <a:pPr indent="0" marL="0">
+              <a:lnSpc>
+                <a:spcPts val="1600"/>
+              </a:lnSpc>
+              <a:buNone/>
+            </a:pPr>
+            <a:r>
+              <a:rPr lang="en-US" sz="1000" b="1" spc="100" kern="0" dirty="0">
+                <a:solidFill>
+                  <a:srgbClr val="4A6B5D"/>
+                </a:solidFill>
+                <a:latin typeface="Arial" pitchFamily="34" charset="0"/>
+                <a:ea typeface="Arial" pitchFamily="34" charset="-122"/>
+                <a:cs typeface="Arial" pitchFamily="34" charset="-120"/>
+              </a:rPr>
+              <a:t>TERM   </a:t>
+            </a:r>
+            <a:pPr indent="0" marL="0">
+              <a:lnSpc>
+                <a:spcPts val="1600"/>
+              </a:lnSpc>
+              <a:buNone/>
+            </a:pPr>
+            <a:r>
+              <a:rPr lang="en-US" sz="1200" dirty="0">
+                <a:solidFill>
+                  <a:srgbClr val="4A6B5D"/>
+                </a:solidFill>
+                <a:latin typeface="Georgia" pitchFamily="34" charset="0"/>
+                <a:ea typeface="Georgia" pitchFamily="34" charset="-122"/>
+                <a:cs typeface="Georgia" pitchFamily="34" charset="-120"/>
+              </a:rPr>
+              <a:t>Neale calls this the economy of genre.</a:t>
+            </a:r>
+            <a:endParaRPr lang="en-US" sz="1000" dirty="0"/>
           </a:p>
         </p:txBody>
       </p:sp>
@@ -6412,7 +6627,7 @@
                 <a:ea typeface="Georgia" pitchFamily="34" charset="-122"/>
                 <a:cs typeface="Georgia" pitchFamily="34" charset="-120"/>
               </a:rPr>
-              <a:t>Who banks on the repetition: the studio, the platform, the franchise.</a:t>
+              <a:t>Who makes money from the repetition: the studio, the platform, the franchise.</a:t>
             </a:r>
             <a:endParaRPr lang="en-US" sz="1550" dirty="0"/>
           </a:p>
@@ -6811,6 +7026,65 @@
               <a:t>David Buckingham, 1993</a:t>
             </a:r>
             <a:endParaRPr lang="en-US" sz="1400" dirty="0"/>
+          </a:p>
+        </p:txBody>
+      </p:sp>
+      <p:sp>
+        <p:nvSpPr>
+          <p:cNvPr id="6" name="Text 4"/>
+          <p:cNvSpPr/>
+          <p:nvPr/>
+        </p:nvSpPr>
+        <p:spPr>
+          <a:xfrm>
+            <a:off x="822960" y="5806440"/>
+            <a:ext cx="10424160" cy="640080"/>
+          </a:xfrm>
+          <a:prstGeom prst="rect">
+            <a:avLst/>
+          </a:prstGeom>
+          <a:noFill/>
+          <a:ln/>
+        </p:spPr>
+        <p:txBody>
+          <a:bodyPr wrap="square" lIns="0" tIns="0" rIns="0" bIns="0" rtlCol="0" anchor="t"/>
+          <a:lstStyle/>
+          <a:p>
+            <a:pPr indent="0" marL="0">
+              <a:lnSpc>
+                <a:spcPts val="1900"/>
+              </a:lnSpc>
+              <a:buNone/>
+            </a:pPr>
+            <a:r>
+              <a:rPr lang="en-US" sz="1200" b="1" spc="100" kern="0" dirty="0">
+                <a:solidFill>
+                  <a:srgbClr val="7A7F72"/>
+                </a:solidFill>
+                <a:latin typeface="Arial" pitchFamily="34" charset="0"/>
+                <a:ea typeface="Arial" pitchFamily="34" charset="-122"/>
+                <a:cs typeface="Arial" pitchFamily="34" charset="-120"/>
+              </a:rPr>
+              <a:t>IN PLAIN WORDS   </a:t>
+            </a:r>
+            <a:pPr indent="0" marL="0">
+              <a:lnSpc>
+                <a:spcPts val="1900"/>
+              </a:lnSpc>
+              <a:buNone/>
+            </a:pPr>
+            <a:r>
+              <a:rPr lang="en-US" sz="1400" i="1" dirty="0">
+                <a:solidFill>
+                  <a:srgbClr val="4A6B5D"/>
+                </a:solidFill>
+                <a:latin typeface="Georgia" pitchFamily="34" charset="0"/>
+                <a:ea typeface="Georgia" pitchFamily="34" charset="-122"/>
+                <a:cs typeface="Georgia" pitchFamily="34" charset="-120"/>
+              </a:rPr>
+              <a:t>Genres are not fixed. Audiences and the industry keep re-negotiating what belongs in them.</a:t>
+            </a:r>
+            <a:endParaRPr lang="en-US" sz="1200" dirty="0"/>
           </a:p>
         </p:txBody>
       </p:sp>
